--- a/Technical-Documents/Parallel-Computing/parallel-computing-course/GPUNet.pptx
+++ b/Technical-Documents/Parallel-Computing/parallel-computing-course/GPUNet.pptx
@@ -5,7 +5,7 @@
     <p:sldMasterId id="2147483660" r:id="rId1"/>
   </p:sldMasterIdLst>
   <p:notesMasterIdLst>
-    <p:notesMasterId r:id="rId30"/>
+    <p:notesMasterId r:id="rId32"/>
   </p:notesMasterIdLst>
   <p:sldIdLst>
     <p:sldId id="272" r:id="rId2"/>
@@ -24,18 +24,20 @@
     <p:sldId id="284" r:id="rId15"/>
     <p:sldId id="287" r:id="rId16"/>
     <p:sldId id="296" r:id="rId17"/>
-    <p:sldId id="298" r:id="rId18"/>
-    <p:sldId id="297" r:id="rId19"/>
-    <p:sldId id="304" r:id="rId20"/>
-    <p:sldId id="303" r:id="rId21"/>
-    <p:sldId id="302" r:id="rId22"/>
-    <p:sldId id="301" r:id="rId23"/>
-    <p:sldId id="285" r:id="rId24"/>
-    <p:sldId id="277" r:id="rId25"/>
-    <p:sldId id="299" r:id="rId26"/>
-    <p:sldId id="300" r:id="rId27"/>
-    <p:sldId id="286" r:id="rId28"/>
-    <p:sldId id="278" r:id="rId29"/>
+    <p:sldId id="305" r:id="rId18"/>
+    <p:sldId id="298" r:id="rId19"/>
+    <p:sldId id="297" r:id="rId20"/>
+    <p:sldId id="304" r:id="rId21"/>
+    <p:sldId id="303" r:id="rId22"/>
+    <p:sldId id="302" r:id="rId23"/>
+    <p:sldId id="301" r:id="rId24"/>
+    <p:sldId id="285" r:id="rId25"/>
+    <p:sldId id="277" r:id="rId26"/>
+    <p:sldId id="299" r:id="rId27"/>
+    <p:sldId id="300" r:id="rId28"/>
+    <p:sldId id="286" r:id="rId29"/>
+    <p:sldId id="278" r:id="rId30"/>
+    <p:sldId id="306" r:id="rId31"/>
   </p:sldIdLst>
   <p:sldSz cx="12192000" cy="6858000"/>
   <p:notesSz cx="6858000" cy="9144000"/>
@@ -224,7 +226,7 @@
           <a:p>
             <a:fld id="{73A93084-53C3-4D41-9C09-AF8810E82D9D}" type="datetimeFigureOut">
               <a:rPr lang="zh-CN" altLang="en-US" smtClean="0"/>
-              <a:t>2019/3/12</a:t>
+              <a:t>2019/3/13</a:t>
             </a:fld>
             <a:endParaRPr lang="zh-CN" altLang="en-US"/>
           </a:p>
@@ -513,7 +515,7 @@
           <p:cNvPr id="6146" name="幻灯片图像占位符 1">
             <a:extLst>
               <a:ext uri="{FF2B5EF4-FFF2-40B4-BE49-F238E27FC236}">
-                <a16:creationId xmlns:a16="http://schemas.microsoft.com/office/drawing/2014/main" xmlns="" id="{4908B133-C54F-400F-8F70-355C57C0BE11}"/>
+                <a16:creationId xmlns="" xmlns:a16="http://schemas.microsoft.com/office/drawing/2014/main" id="{4908B133-C54F-400F-8F70-355C57C0BE11}"/>
               </a:ext>
             </a:extLst>
           </p:cNvPr>
@@ -550,7 +552,7 @@
           <p:cNvPr id="6147" name="备注占位符 2">
             <a:extLst>
               <a:ext uri="{FF2B5EF4-FFF2-40B4-BE49-F238E27FC236}">
-                <a16:creationId xmlns:a16="http://schemas.microsoft.com/office/drawing/2014/main" xmlns="" id="{7D16C196-D24B-4BE0-AE74-D44907B2A1B1}"/>
+                <a16:creationId xmlns="" xmlns:a16="http://schemas.microsoft.com/office/drawing/2014/main" id="{7D16C196-D24B-4BE0-AE74-D44907B2A1B1}"/>
               </a:ext>
             </a:extLst>
           </p:cNvPr>
@@ -605,7 +607,7 @@
           <p:cNvPr id="6148" name="灯片编号占位符 3">
             <a:extLst>
               <a:ext uri="{FF2B5EF4-FFF2-40B4-BE49-F238E27FC236}">
-                <a16:creationId xmlns:a16="http://schemas.microsoft.com/office/drawing/2014/main" xmlns="" id="{D230392C-ED50-49C3-93A6-10868BF6DADE}"/>
+                <a16:creationId xmlns="" xmlns:a16="http://schemas.microsoft.com/office/drawing/2014/main" id="{D230392C-ED50-49C3-93A6-10868BF6DADE}"/>
               </a:ext>
             </a:extLst>
           </p:cNvPr>
@@ -855,7 +857,7 @@
           <p:cNvPr id="6146" name="幻灯片图像占位符 1">
             <a:extLst>
               <a:ext uri="{FF2B5EF4-FFF2-40B4-BE49-F238E27FC236}">
-                <a16:creationId xmlns:a16="http://schemas.microsoft.com/office/drawing/2014/main" xmlns="" id="{4908B133-C54F-400F-8F70-355C57C0BE11}"/>
+                <a16:creationId xmlns="" xmlns:a16="http://schemas.microsoft.com/office/drawing/2014/main" id="{4908B133-C54F-400F-8F70-355C57C0BE11}"/>
               </a:ext>
             </a:extLst>
           </p:cNvPr>
@@ -892,7 +894,7 @@
           <p:cNvPr id="6147" name="备注占位符 2">
             <a:extLst>
               <a:ext uri="{FF2B5EF4-FFF2-40B4-BE49-F238E27FC236}">
-                <a16:creationId xmlns:a16="http://schemas.microsoft.com/office/drawing/2014/main" xmlns="" id="{7D16C196-D24B-4BE0-AE74-D44907B2A1B1}"/>
+                <a16:creationId xmlns="" xmlns:a16="http://schemas.microsoft.com/office/drawing/2014/main" id="{7D16C196-D24B-4BE0-AE74-D44907B2A1B1}"/>
               </a:ext>
             </a:extLst>
           </p:cNvPr>
@@ -947,7 +949,7 @@
           <p:cNvPr id="6148" name="灯片编号占位符 3">
             <a:extLst>
               <a:ext uri="{FF2B5EF4-FFF2-40B4-BE49-F238E27FC236}">
-                <a16:creationId xmlns:a16="http://schemas.microsoft.com/office/drawing/2014/main" xmlns="" id="{D230392C-ED50-49C3-93A6-10868BF6DADE}"/>
+                <a16:creationId xmlns="" xmlns:a16="http://schemas.microsoft.com/office/drawing/2014/main" id="{D230392C-ED50-49C3-93A6-10868BF6DADE}"/>
               </a:ext>
             </a:extLst>
           </p:cNvPr>
@@ -1197,7 +1199,7 @@
           <p:cNvPr id="6146" name="幻灯片图像占位符 1">
             <a:extLst>
               <a:ext uri="{FF2B5EF4-FFF2-40B4-BE49-F238E27FC236}">
-                <a16:creationId xmlns:a16="http://schemas.microsoft.com/office/drawing/2014/main" xmlns="" id="{4908B133-C54F-400F-8F70-355C57C0BE11}"/>
+                <a16:creationId xmlns="" xmlns:a16="http://schemas.microsoft.com/office/drawing/2014/main" id="{4908B133-C54F-400F-8F70-355C57C0BE11}"/>
               </a:ext>
             </a:extLst>
           </p:cNvPr>
@@ -1234,7 +1236,7 @@
           <p:cNvPr id="6147" name="备注占位符 2">
             <a:extLst>
               <a:ext uri="{FF2B5EF4-FFF2-40B4-BE49-F238E27FC236}">
-                <a16:creationId xmlns:a16="http://schemas.microsoft.com/office/drawing/2014/main" xmlns="" id="{7D16C196-D24B-4BE0-AE74-D44907B2A1B1}"/>
+                <a16:creationId xmlns="" xmlns:a16="http://schemas.microsoft.com/office/drawing/2014/main" id="{7D16C196-D24B-4BE0-AE74-D44907B2A1B1}"/>
               </a:ext>
             </a:extLst>
           </p:cNvPr>
@@ -1289,7 +1291,7 @@
           <p:cNvPr id="6148" name="灯片编号占位符 3">
             <a:extLst>
               <a:ext uri="{FF2B5EF4-FFF2-40B4-BE49-F238E27FC236}">
-                <a16:creationId xmlns:a16="http://schemas.microsoft.com/office/drawing/2014/main" xmlns="" id="{D230392C-ED50-49C3-93A6-10868BF6DADE}"/>
+                <a16:creationId xmlns="" xmlns:a16="http://schemas.microsoft.com/office/drawing/2014/main" id="{D230392C-ED50-49C3-93A6-10868BF6DADE}"/>
               </a:ext>
             </a:extLst>
           </p:cNvPr>
@@ -1539,7 +1541,7 @@
           <p:cNvPr id="6146" name="幻灯片图像占位符 1">
             <a:extLst>
               <a:ext uri="{FF2B5EF4-FFF2-40B4-BE49-F238E27FC236}">
-                <a16:creationId xmlns:a16="http://schemas.microsoft.com/office/drawing/2014/main" xmlns="" id="{4908B133-C54F-400F-8F70-355C57C0BE11}"/>
+                <a16:creationId xmlns="" xmlns:a16="http://schemas.microsoft.com/office/drawing/2014/main" id="{4908B133-C54F-400F-8F70-355C57C0BE11}"/>
               </a:ext>
             </a:extLst>
           </p:cNvPr>
@@ -1576,7 +1578,7 @@
           <p:cNvPr id="6147" name="备注占位符 2">
             <a:extLst>
               <a:ext uri="{FF2B5EF4-FFF2-40B4-BE49-F238E27FC236}">
-                <a16:creationId xmlns:a16="http://schemas.microsoft.com/office/drawing/2014/main" xmlns="" id="{7D16C196-D24B-4BE0-AE74-D44907B2A1B1}"/>
+                <a16:creationId xmlns="" xmlns:a16="http://schemas.microsoft.com/office/drawing/2014/main" id="{7D16C196-D24B-4BE0-AE74-D44907B2A1B1}"/>
               </a:ext>
             </a:extLst>
           </p:cNvPr>
@@ -1631,7 +1633,7 @@
           <p:cNvPr id="6148" name="灯片编号占位符 3">
             <a:extLst>
               <a:ext uri="{FF2B5EF4-FFF2-40B4-BE49-F238E27FC236}">
-                <a16:creationId xmlns:a16="http://schemas.microsoft.com/office/drawing/2014/main" xmlns="" id="{D230392C-ED50-49C3-93A6-10868BF6DADE}"/>
+                <a16:creationId xmlns="" xmlns:a16="http://schemas.microsoft.com/office/drawing/2014/main" id="{D230392C-ED50-49C3-93A6-10868BF6DADE}"/>
               </a:ext>
             </a:extLst>
           </p:cNvPr>
@@ -1881,7 +1883,7 @@
           <p:cNvPr id="6146" name="幻灯片图像占位符 1">
             <a:extLst>
               <a:ext uri="{FF2B5EF4-FFF2-40B4-BE49-F238E27FC236}">
-                <a16:creationId xmlns:a16="http://schemas.microsoft.com/office/drawing/2014/main" xmlns="" id="{4908B133-C54F-400F-8F70-355C57C0BE11}"/>
+                <a16:creationId xmlns="" xmlns:a16="http://schemas.microsoft.com/office/drawing/2014/main" id="{4908B133-C54F-400F-8F70-355C57C0BE11}"/>
               </a:ext>
             </a:extLst>
           </p:cNvPr>
@@ -1918,7 +1920,7 @@
           <p:cNvPr id="6147" name="备注占位符 2">
             <a:extLst>
               <a:ext uri="{FF2B5EF4-FFF2-40B4-BE49-F238E27FC236}">
-                <a16:creationId xmlns:a16="http://schemas.microsoft.com/office/drawing/2014/main" xmlns="" id="{7D16C196-D24B-4BE0-AE74-D44907B2A1B1}"/>
+                <a16:creationId xmlns="" xmlns:a16="http://schemas.microsoft.com/office/drawing/2014/main" id="{7D16C196-D24B-4BE0-AE74-D44907B2A1B1}"/>
               </a:ext>
             </a:extLst>
           </p:cNvPr>
@@ -1973,7 +1975,7 @@
           <p:cNvPr id="6148" name="灯片编号占位符 3">
             <a:extLst>
               <a:ext uri="{FF2B5EF4-FFF2-40B4-BE49-F238E27FC236}">
-                <a16:creationId xmlns:a16="http://schemas.microsoft.com/office/drawing/2014/main" xmlns="" id="{D230392C-ED50-49C3-93A6-10868BF6DADE}"/>
+                <a16:creationId xmlns="" xmlns:a16="http://schemas.microsoft.com/office/drawing/2014/main" id="{D230392C-ED50-49C3-93A6-10868BF6DADE}"/>
               </a:ext>
             </a:extLst>
           </p:cNvPr>
@@ -2223,7 +2225,7 @@
           <p:cNvPr id="6146" name="幻灯片图像占位符 1">
             <a:extLst>
               <a:ext uri="{FF2B5EF4-FFF2-40B4-BE49-F238E27FC236}">
-                <a16:creationId xmlns:a16="http://schemas.microsoft.com/office/drawing/2014/main" xmlns="" id="{4908B133-C54F-400F-8F70-355C57C0BE11}"/>
+                <a16:creationId xmlns="" xmlns:a16="http://schemas.microsoft.com/office/drawing/2014/main" id="{4908B133-C54F-400F-8F70-355C57C0BE11}"/>
               </a:ext>
             </a:extLst>
           </p:cNvPr>
@@ -2260,7 +2262,7 @@
           <p:cNvPr id="6147" name="备注占位符 2">
             <a:extLst>
               <a:ext uri="{FF2B5EF4-FFF2-40B4-BE49-F238E27FC236}">
-                <a16:creationId xmlns:a16="http://schemas.microsoft.com/office/drawing/2014/main" xmlns="" id="{7D16C196-D24B-4BE0-AE74-D44907B2A1B1}"/>
+                <a16:creationId xmlns="" xmlns:a16="http://schemas.microsoft.com/office/drawing/2014/main" id="{7D16C196-D24B-4BE0-AE74-D44907B2A1B1}"/>
               </a:ext>
             </a:extLst>
           </p:cNvPr>
@@ -2315,7 +2317,7 @@
           <p:cNvPr id="6148" name="灯片编号占位符 3">
             <a:extLst>
               <a:ext uri="{FF2B5EF4-FFF2-40B4-BE49-F238E27FC236}">
-                <a16:creationId xmlns:a16="http://schemas.microsoft.com/office/drawing/2014/main" xmlns="" id="{D230392C-ED50-49C3-93A6-10868BF6DADE}"/>
+                <a16:creationId xmlns="" xmlns:a16="http://schemas.microsoft.com/office/drawing/2014/main" id="{D230392C-ED50-49C3-93A6-10868BF6DADE}"/>
               </a:ext>
             </a:extLst>
           </p:cNvPr>
@@ -2565,7 +2567,7 @@
           <p:cNvPr id="6146" name="幻灯片图像占位符 1">
             <a:extLst>
               <a:ext uri="{FF2B5EF4-FFF2-40B4-BE49-F238E27FC236}">
-                <a16:creationId xmlns:a16="http://schemas.microsoft.com/office/drawing/2014/main" xmlns="" id="{4908B133-C54F-400F-8F70-355C57C0BE11}"/>
+                <a16:creationId xmlns="" xmlns:a16="http://schemas.microsoft.com/office/drawing/2014/main" id="{4908B133-C54F-400F-8F70-355C57C0BE11}"/>
               </a:ext>
             </a:extLst>
           </p:cNvPr>
@@ -2602,7 +2604,7 @@
           <p:cNvPr id="6147" name="备注占位符 2">
             <a:extLst>
               <a:ext uri="{FF2B5EF4-FFF2-40B4-BE49-F238E27FC236}">
-                <a16:creationId xmlns:a16="http://schemas.microsoft.com/office/drawing/2014/main" xmlns="" id="{7D16C196-D24B-4BE0-AE74-D44907B2A1B1}"/>
+                <a16:creationId xmlns="" xmlns:a16="http://schemas.microsoft.com/office/drawing/2014/main" id="{7D16C196-D24B-4BE0-AE74-D44907B2A1B1}"/>
               </a:ext>
             </a:extLst>
           </p:cNvPr>
@@ -2657,7 +2659,7 @@
           <p:cNvPr id="6148" name="灯片编号占位符 3">
             <a:extLst>
               <a:ext uri="{FF2B5EF4-FFF2-40B4-BE49-F238E27FC236}">
-                <a16:creationId xmlns:a16="http://schemas.microsoft.com/office/drawing/2014/main" xmlns="" id="{D230392C-ED50-49C3-93A6-10868BF6DADE}"/>
+                <a16:creationId xmlns="" xmlns:a16="http://schemas.microsoft.com/office/drawing/2014/main" id="{D230392C-ED50-49C3-93A6-10868BF6DADE}"/>
               </a:ext>
             </a:extLst>
           </p:cNvPr>
@@ -2907,7 +2909,7 @@
           <p:cNvPr id="6146" name="幻灯片图像占位符 1">
             <a:extLst>
               <a:ext uri="{FF2B5EF4-FFF2-40B4-BE49-F238E27FC236}">
-                <a16:creationId xmlns:a16="http://schemas.microsoft.com/office/drawing/2014/main" xmlns="" id="{4908B133-C54F-400F-8F70-355C57C0BE11}"/>
+                <a16:creationId xmlns="" xmlns:a16="http://schemas.microsoft.com/office/drawing/2014/main" id="{4908B133-C54F-400F-8F70-355C57C0BE11}"/>
               </a:ext>
             </a:extLst>
           </p:cNvPr>
@@ -2944,7 +2946,7 @@
           <p:cNvPr id="6147" name="备注占位符 2">
             <a:extLst>
               <a:ext uri="{FF2B5EF4-FFF2-40B4-BE49-F238E27FC236}">
-                <a16:creationId xmlns:a16="http://schemas.microsoft.com/office/drawing/2014/main" xmlns="" id="{7D16C196-D24B-4BE0-AE74-D44907B2A1B1}"/>
+                <a16:creationId xmlns="" xmlns:a16="http://schemas.microsoft.com/office/drawing/2014/main" id="{7D16C196-D24B-4BE0-AE74-D44907B2A1B1}"/>
               </a:ext>
             </a:extLst>
           </p:cNvPr>
@@ -2999,7 +3001,7 @@
           <p:cNvPr id="6148" name="灯片编号占位符 3">
             <a:extLst>
               <a:ext uri="{FF2B5EF4-FFF2-40B4-BE49-F238E27FC236}">
-                <a16:creationId xmlns:a16="http://schemas.microsoft.com/office/drawing/2014/main" xmlns="" id="{D230392C-ED50-49C3-93A6-10868BF6DADE}"/>
+                <a16:creationId xmlns="" xmlns:a16="http://schemas.microsoft.com/office/drawing/2014/main" id="{D230392C-ED50-49C3-93A6-10868BF6DADE}"/>
               </a:ext>
             </a:extLst>
           </p:cNvPr>
@@ -3249,7 +3251,7 @@
           <p:cNvPr id="6146" name="幻灯片图像占位符 1">
             <a:extLst>
               <a:ext uri="{FF2B5EF4-FFF2-40B4-BE49-F238E27FC236}">
-                <a16:creationId xmlns:a16="http://schemas.microsoft.com/office/drawing/2014/main" xmlns="" id="{4908B133-C54F-400F-8F70-355C57C0BE11}"/>
+                <a16:creationId xmlns="" xmlns:a16="http://schemas.microsoft.com/office/drawing/2014/main" id="{4908B133-C54F-400F-8F70-355C57C0BE11}"/>
               </a:ext>
             </a:extLst>
           </p:cNvPr>
@@ -3286,7 +3288,7 @@
           <p:cNvPr id="6147" name="备注占位符 2">
             <a:extLst>
               <a:ext uri="{FF2B5EF4-FFF2-40B4-BE49-F238E27FC236}">
-                <a16:creationId xmlns:a16="http://schemas.microsoft.com/office/drawing/2014/main" xmlns="" id="{7D16C196-D24B-4BE0-AE74-D44907B2A1B1}"/>
+                <a16:creationId xmlns="" xmlns:a16="http://schemas.microsoft.com/office/drawing/2014/main" id="{7D16C196-D24B-4BE0-AE74-D44907B2A1B1}"/>
               </a:ext>
             </a:extLst>
           </p:cNvPr>
@@ -3341,7 +3343,7 @@
           <p:cNvPr id="6148" name="灯片编号占位符 3">
             <a:extLst>
               <a:ext uri="{FF2B5EF4-FFF2-40B4-BE49-F238E27FC236}">
-                <a16:creationId xmlns:a16="http://schemas.microsoft.com/office/drawing/2014/main" xmlns="" id="{D230392C-ED50-49C3-93A6-10868BF6DADE}"/>
+                <a16:creationId xmlns="" xmlns:a16="http://schemas.microsoft.com/office/drawing/2014/main" id="{D230392C-ED50-49C3-93A6-10868BF6DADE}"/>
               </a:ext>
             </a:extLst>
           </p:cNvPr>
@@ -3559,7 +3561,7 @@
     </p:spTree>
     <p:extLst>
       <p:ext uri="{BB962C8B-B14F-4D97-AF65-F5344CB8AC3E}">
-        <p14:creationId xmlns:p14="http://schemas.microsoft.com/office/powerpoint/2010/main" val="3174227115"/>
+        <p14:creationId xmlns:p14="http://schemas.microsoft.com/office/powerpoint/2010/main" val="3785226635"/>
       </p:ext>
     </p:extLst>
   </p:cSld>
@@ -3591,7 +3593,7 @@
           <p:cNvPr id="6146" name="幻灯片图像占位符 1">
             <a:extLst>
               <a:ext uri="{FF2B5EF4-FFF2-40B4-BE49-F238E27FC236}">
-                <a16:creationId xmlns:a16="http://schemas.microsoft.com/office/drawing/2014/main" xmlns="" id="{4908B133-C54F-400F-8F70-355C57C0BE11}"/>
+                <a16:creationId xmlns="" xmlns:a16="http://schemas.microsoft.com/office/drawing/2014/main" id="{4908B133-C54F-400F-8F70-355C57C0BE11}"/>
               </a:ext>
             </a:extLst>
           </p:cNvPr>
@@ -3628,7 +3630,7 @@
           <p:cNvPr id="6147" name="备注占位符 2">
             <a:extLst>
               <a:ext uri="{FF2B5EF4-FFF2-40B4-BE49-F238E27FC236}">
-                <a16:creationId xmlns:a16="http://schemas.microsoft.com/office/drawing/2014/main" xmlns="" id="{7D16C196-D24B-4BE0-AE74-D44907B2A1B1}"/>
+                <a16:creationId xmlns="" xmlns:a16="http://schemas.microsoft.com/office/drawing/2014/main" id="{7D16C196-D24B-4BE0-AE74-D44907B2A1B1}"/>
               </a:ext>
             </a:extLst>
           </p:cNvPr>
@@ -3683,7 +3685,7 @@
           <p:cNvPr id="6148" name="灯片编号占位符 3">
             <a:extLst>
               <a:ext uri="{FF2B5EF4-FFF2-40B4-BE49-F238E27FC236}">
-                <a16:creationId xmlns:a16="http://schemas.microsoft.com/office/drawing/2014/main" xmlns="" id="{D230392C-ED50-49C3-93A6-10868BF6DADE}"/>
+                <a16:creationId xmlns="" xmlns:a16="http://schemas.microsoft.com/office/drawing/2014/main" id="{D230392C-ED50-49C3-93A6-10868BF6DADE}"/>
               </a:ext>
             </a:extLst>
           </p:cNvPr>
@@ -3901,7 +3903,7 @@
     </p:spTree>
     <p:extLst>
       <p:ext uri="{BB962C8B-B14F-4D97-AF65-F5344CB8AC3E}">
-        <p14:creationId xmlns:p14="http://schemas.microsoft.com/office/powerpoint/2010/main" val="983696688"/>
+        <p14:creationId xmlns:p14="http://schemas.microsoft.com/office/powerpoint/2010/main" val="3174227115"/>
       </p:ext>
     </p:extLst>
   </p:cSld>
@@ -3933,7 +3935,7 @@
           <p:cNvPr id="6146" name="幻灯片图像占位符 1">
             <a:extLst>
               <a:ext uri="{FF2B5EF4-FFF2-40B4-BE49-F238E27FC236}">
-                <a16:creationId xmlns:a16="http://schemas.microsoft.com/office/drawing/2014/main" xmlns="" id="{4908B133-C54F-400F-8F70-355C57C0BE11}"/>
+                <a16:creationId xmlns="" xmlns:a16="http://schemas.microsoft.com/office/drawing/2014/main" id="{4908B133-C54F-400F-8F70-355C57C0BE11}"/>
               </a:ext>
             </a:extLst>
           </p:cNvPr>
@@ -3970,7 +3972,7 @@
           <p:cNvPr id="6147" name="备注占位符 2">
             <a:extLst>
               <a:ext uri="{FF2B5EF4-FFF2-40B4-BE49-F238E27FC236}">
-                <a16:creationId xmlns:a16="http://schemas.microsoft.com/office/drawing/2014/main" xmlns="" id="{7D16C196-D24B-4BE0-AE74-D44907B2A1B1}"/>
+                <a16:creationId xmlns="" xmlns:a16="http://schemas.microsoft.com/office/drawing/2014/main" id="{7D16C196-D24B-4BE0-AE74-D44907B2A1B1}"/>
               </a:ext>
             </a:extLst>
           </p:cNvPr>
@@ -4025,7 +4027,7 @@
           <p:cNvPr id="6148" name="灯片编号占位符 3">
             <a:extLst>
               <a:ext uri="{FF2B5EF4-FFF2-40B4-BE49-F238E27FC236}">
-                <a16:creationId xmlns:a16="http://schemas.microsoft.com/office/drawing/2014/main" xmlns="" id="{D230392C-ED50-49C3-93A6-10868BF6DADE}"/>
+                <a16:creationId xmlns="" xmlns:a16="http://schemas.microsoft.com/office/drawing/2014/main" id="{D230392C-ED50-49C3-93A6-10868BF6DADE}"/>
               </a:ext>
             </a:extLst>
           </p:cNvPr>
@@ -4243,7 +4245,7 @@
     </p:spTree>
     <p:extLst>
       <p:ext uri="{BB962C8B-B14F-4D97-AF65-F5344CB8AC3E}">
-        <p14:creationId xmlns:p14="http://schemas.microsoft.com/office/powerpoint/2010/main" val="1633012883"/>
+        <p14:creationId xmlns:p14="http://schemas.microsoft.com/office/powerpoint/2010/main" val="983696688"/>
       </p:ext>
     </p:extLst>
   </p:cSld>
@@ -4275,7 +4277,7 @@
           <p:cNvPr id="6146" name="幻灯片图像占位符 1">
             <a:extLst>
               <a:ext uri="{FF2B5EF4-FFF2-40B4-BE49-F238E27FC236}">
-                <a16:creationId xmlns:a16="http://schemas.microsoft.com/office/drawing/2014/main" xmlns="" id="{4908B133-C54F-400F-8F70-355C57C0BE11}"/>
+                <a16:creationId xmlns="" xmlns:a16="http://schemas.microsoft.com/office/drawing/2014/main" id="{4908B133-C54F-400F-8F70-355C57C0BE11}"/>
               </a:ext>
             </a:extLst>
           </p:cNvPr>
@@ -4312,7 +4314,7 @@
           <p:cNvPr id="6147" name="备注占位符 2">
             <a:extLst>
               <a:ext uri="{FF2B5EF4-FFF2-40B4-BE49-F238E27FC236}">
-                <a16:creationId xmlns:a16="http://schemas.microsoft.com/office/drawing/2014/main" xmlns="" id="{7D16C196-D24B-4BE0-AE74-D44907B2A1B1}"/>
+                <a16:creationId xmlns="" xmlns:a16="http://schemas.microsoft.com/office/drawing/2014/main" id="{7D16C196-D24B-4BE0-AE74-D44907B2A1B1}"/>
               </a:ext>
             </a:extLst>
           </p:cNvPr>
@@ -4367,7 +4369,7 @@
           <p:cNvPr id="6148" name="灯片编号占位符 3">
             <a:extLst>
               <a:ext uri="{FF2B5EF4-FFF2-40B4-BE49-F238E27FC236}">
-                <a16:creationId xmlns:a16="http://schemas.microsoft.com/office/drawing/2014/main" xmlns="" id="{D230392C-ED50-49C3-93A6-10868BF6DADE}"/>
+                <a16:creationId xmlns="" xmlns:a16="http://schemas.microsoft.com/office/drawing/2014/main" id="{D230392C-ED50-49C3-93A6-10868BF6DADE}"/>
               </a:ext>
             </a:extLst>
           </p:cNvPr>
@@ -4617,7 +4619,7 @@
           <p:cNvPr id="6146" name="幻灯片图像占位符 1">
             <a:extLst>
               <a:ext uri="{FF2B5EF4-FFF2-40B4-BE49-F238E27FC236}">
-                <a16:creationId xmlns:a16="http://schemas.microsoft.com/office/drawing/2014/main" xmlns="" id="{4908B133-C54F-400F-8F70-355C57C0BE11}"/>
+                <a16:creationId xmlns="" xmlns:a16="http://schemas.microsoft.com/office/drawing/2014/main" id="{4908B133-C54F-400F-8F70-355C57C0BE11}"/>
               </a:ext>
             </a:extLst>
           </p:cNvPr>
@@ -4654,7 +4656,7 @@
           <p:cNvPr id="6147" name="备注占位符 2">
             <a:extLst>
               <a:ext uri="{FF2B5EF4-FFF2-40B4-BE49-F238E27FC236}">
-                <a16:creationId xmlns:a16="http://schemas.microsoft.com/office/drawing/2014/main" xmlns="" id="{7D16C196-D24B-4BE0-AE74-D44907B2A1B1}"/>
+                <a16:creationId xmlns="" xmlns:a16="http://schemas.microsoft.com/office/drawing/2014/main" id="{7D16C196-D24B-4BE0-AE74-D44907B2A1B1}"/>
               </a:ext>
             </a:extLst>
           </p:cNvPr>
@@ -4709,7 +4711,7 @@
           <p:cNvPr id="6148" name="灯片编号占位符 3">
             <a:extLst>
               <a:ext uri="{FF2B5EF4-FFF2-40B4-BE49-F238E27FC236}">
-                <a16:creationId xmlns:a16="http://schemas.microsoft.com/office/drawing/2014/main" xmlns="" id="{D230392C-ED50-49C3-93A6-10868BF6DADE}"/>
+                <a16:creationId xmlns="" xmlns:a16="http://schemas.microsoft.com/office/drawing/2014/main" id="{D230392C-ED50-49C3-93A6-10868BF6DADE}"/>
               </a:ext>
             </a:extLst>
           </p:cNvPr>
@@ -4927,7 +4929,7 @@
     </p:spTree>
     <p:extLst>
       <p:ext uri="{BB962C8B-B14F-4D97-AF65-F5344CB8AC3E}">
-        <p14:creationId xmlns:p14="http://schemas.microsoft.com/office/powerpoint/2010/main" val="2888513784"/>
+        <p14:creationId xmlns:p14="http://schemas.microsoft.com/office/powerpoint/2010/main" val="1633012883"/>
       </p:ext>
     </p:extLst>
   </p:cSld>
@@ -4959,7 +4961,7 @@
           <p:cNvPr id="6146" name="幻灯片图像占位符 1">
             <a:extLst>
               <a:ext uri="{FF2B5EF4-FFF2-40B4-BE49-F238E27FC236}">
-                <a16:creationId xmlns:a16="http://schemas.microsoft.com/office/drawing/2014/main" xmlns="" id="{4908B133-C54F-400F-8F70-355C57C0BE11}"/>
+                <a16:creationId xmlns="" xmlns:a16="http://schemas.microsoft.com/office/drawing/2014/main" id="{4908B133-C54F-400F-8F70-355C57C0BE11}"/>
               </a:ext>
             </a:extLst>
           </p:cNvPr>
@@ -4996,7 +4998,7 @@
           <p:cNvPr id="6147" name="备注占位符 2">
             <a:extLst>
               <a:ext uri="{FF2B5EF4-FFF2-40B4-BE49-F238E27FC236}">
-                <a16:creationId xmlns:a16="http://schemas.microsoft.com/office/drawing/2014/main" xmlns="" id="{7D16C196-D24B-4BE0-AE74-D44907B2A1B1}"/>
+                <a16:creationId xmlns="" xmlns:a16="http://schemas.microsoft.com/office/drawing/2014/main" id="{7D16C196-D24B-4BE0-AE74-D44907B2A1B1}"/>
               </a:ext>
             </a:extLst>
           </p:cNvPr>
@@ -5051,7 +5053,7 @@
           <p:cNvPr id="6148" name="灯片编号占位符 3">
             <a:extLst>
               <a:ext uri="{FF2B5EF4-FFF2-40B4-BE49-F238E27FC236}">
-                <a16:creationId xmlns:a16="http://schemas.microsoft.com/office/drawing/2014/main" xmlns="" id="{D230392C-ED50-49C3-93A6-10868BF6DADE}"/>
+                <a16:creationId xmlns="" xmlns:a16="http://schemas.microsoft.com/office/drawing/2014/main" id="{D230392C-ED50-49C3-93A6-10868BF6DADE}"/>
               </a:ext>
             </a:extLst>
           </p:cNvPr>
@@ -5269,7 +5271,7 @@
     </p:spTree>
     <p:extLst>
       <p:ext uri="{BB962C8B-B14F-4D97-AF65-F5344CB8AC3E}">
-        <p14:creationId xmlns:p14="http://schemas.microsoft.com/office/powerpoint/2010/main" val="2427175632"/>
+        <p14:creationId xmlns:p14="http://schemas.microsoft.com/office/powerpoint/2010/main" val="2888513784"/>
       </p:ext>
     </p:extLst>
   </p:cSld>
@@ -5301,7 +5303,7 @@
           <p:cNvPr id="6146" name="幻灯片图像占位符 1">
             <a:extLst>
               <a:ext uri="{FF2B5EF4-FFF2-40B4-BE49-F238E27FC236}">
-                <a16:creationId xmlns:a16="http://schemas.microsoft.com/office/drawing/2014/main" xmlns="" id="{4908B133-C54F-400F-8F70-355C57C0BE11}"/>
+                <a16:creationId xmlns="" xmlns:a16="http://schemas.microsoft.com/office/drawing/2014/main" id="{4908B133-C54F-400F-8F70-355C57C0BE11}"/>
               </a:ext>
             </a:extLst>
           </p:cNvPr>
@@ -5338,7 +5340,7 @@
           <p:cNvPr id="6147" name="备注占位符 2">
             <a:extLst>
               <a:ext uri="{FF2B5EF4-FFF2-40B4-BE49-F238E27FC236}">
-                <a16:creationId xmlns:a16="http://schemas.microsoft.com/office/drawing/2014/main" xmlns="" id="{7D16C196-D24B-4BE0-AE74-D44907B2A1B1}"/>
+                <a16:creationId xmlns="" xmlns:a16="http://schemas.microsoft.com/office/drawing/2014/main" id="{7D16C196-D24B-4BE0-AE74-D44907B2A1B1}"/>
               </a:ext>
             </a:extLst>
           </p:cNvPr>
@@ -5393,7 +5395,7 @@
           <p:cNvPr id="6148" name="灯片编号占位符 3">
             <a:extLst>
               <a:ext uri="{FF2B5EF4-FFF2-40B4-BE49-F238E27FC236}">
-                <a16:creationId xmlns:a16="http://schemas.microsoft.com/office/drawing/2014/main" xmlns="" id="{D230392C-ED50-49C3-93A6-10868BF6DADE}"/>
+                <a16:creationId xmlns="" xmlns:a16="http://schemas.microsoft.com/office/drawing/2014/main" id="{D230392C-ED50-49C3-93A6-10868BF6DADE}"/>
               </a:ext>
             </a:extLst>
           </p:cNvPr>
@@ -5611,7 +5613,7 @@
     </p:spTree>
     <p:extLst>
       <p:ext uri="{BB962C8B-B14F-4D97-AF65-F5344CB8AC3E}">
-        <p14:creationId xmlns:p14="http://schemas.microsoft.com/office/powerpoint/2010/main" val="3119320973"/>
+        <p14:creationId xmlns:p14="http://schemas.microsoft.com/office/powerpoint/2010/main" val="2427175632"/>
       </p:ext>
     </p:extLst>
   </p:cSld>
@@ -5643,7 +5645,7 @@
           <p:cNvPr id="6146" name="幻灯片图像占位符 1">
             <a:extLst>
               <a:ext uri="{FF2B5EF4-FFF2-40B4-BE49-F238E27FC236}">
-                <a16:creationId xmlns:a16="http://schemas.microsoft.com/office/drawing/2014/main" xmlns="" id="{4908B133-C54F-400F-8F70-355C57C0BE11}"/>
+                <a16:creationId xmlns="" xmlns:a16="http://schemas.microsoft.com/office/drawing/2014/main" id="{4908B133-C54F-400F-8F70-355C57C0BE11}"/>
               </a:ext>
             </a:extLst>
           </p:cNvPr>
@@ -5680,7 +5682,7 @@
           <p:cNvPr id="6147" name="备注占位符 2">
             <a:extLst>
               <a:ext uri="{FF2B5EF4-FFF2-40B4-BE49-F238E27FC236}">
-                <a16:creationId xmlns:a16="http://schemas.microsoft.com/office/drawing/2014/main" xmlns="" id="{7D16C196-D24B-4BE0-AE74-D44907B2A1B1}"/>
+                <a16:creationId xmlns="" xmlns:a16="http://schemas.microsoft.com/office/drawing/2014/main" id="{7D16C196-D24B-4BE0-AE74-D44907B2A1B1}"/>
               </a:ext>
             </a:extLst>
           </p:cNvPr>
@@ -5735,7 +5737,7 @@
           <p:cNvPr id="6148" name="灯片编号占位符 3">
             <a:extLst>
               <a:ext uri="{FF2B5EF4-FFF2-40B4-BE49-F238E27FC236}">
-                <a16:creationId xmlns:a16="http://schemas.microsoft.com/office/drawing/2014/main" xmlns="" id="{D230392C-ED50-49C3-93A6-10868BF6DADE}"/>
+                <a16:creationId xmlns="" xmlns:a16="http://schemas.microsoft.com/office/drawing/2014/main" id="{D230392C-ED50-49C3-93A6-10868BF6DADE}"/>
               </a:ext>
             </a:extLst>
           </p:cNvPr>
@@ -5953,7 +5955,7 @@
     </p:spTree>
     <p:extLst>
       <p:ext uri="{BB962C8B-B14F-4D97-AF65-F5344CB8AC3E}">
-        <p14:creationId xmlns:p14="http://schemas.microsoft.com/office/powerpoint/2010/main" val="3195105378"/>
+        <p14:creationId xmlns:p14="http://schemas.microsoft.com/office/powerpoint/2010/main" val="3119320973"/>
       </p:ext>
     </p:extLst>
   </p:cSld>
@@ -5985,7 +5987,7 @@
           <p:cNvPr id="6146" name="幻灯片图像占位符 1">
             <a:extLst>
               <a:ext uri="{FF2B5EF4-FFF2-40B4-BE49-F238E27FC236}">
-                <a16:creationId xmlns:a16="http://schemas.microsoft.com/office/drawing/2014/main" xmlns="" id="{4908B133-C54F-400F-8F70-355C57C0BE11}"/>
+                <a16:creationId xmlns="" xmlns:a16="http://schemas.microsoft.com/office/drawing/2014/main" id="{4908B133-C54F-400F-8F70-355C57C0BE11}"/>
               </a:ext>
             </a:extLst>
           </p:cNvPr>
@@ -6022,7 +6024,7 @@
           <p:cNvPr id="6147" name="备注占位符 2">
             <a:extLst>
               <a:ext uri="{FF2B5EF4-FFF2-40B4-BE49-F238E27FC236}">
-                <a16:creationId xmlns:a16="http://schemas.microsoft.com/office/drawing/2014/main" xmlns="" id="{7D16C196-D24B-4BE0-AE74-D44907B2A1B1}"/>
+                <a16:creationId xmlns="" xmlns:a16="http://schemas.microsoft.com/office/drawing/2014/main" id="{7D16C196-D24B-4BE0-AE74-D44907B2A1B1}"/>
               </a:ext>
             </a:extLst>
           </p:cNvPr>
@@ -6077,7 +6079,7 @@
           <p:cNvPr id="6148" name="灯片编号占位符 3">
             <a:extLst>
               <a:ext uri="{FF2B5EF4-FFF2-40B4-BE49-F238E27FC236}">
-                <a16:creationId xmlns:a16="http://schemas.microsoft.com/office/drawing/2014/main" xmlns="" id="{D230392C-ED50-49C3-93A6-10868BF6DADE}"/>
+                <a16:creationId xmlns="" xmlns:a16="http://schemas.microsoft.com/office/drawing/2014/main" id="{D230392C-ED50-49C3-93A6-10868BF6DADE}"/>
               </a:ext>
             </a:extLst>
           </p:cNvPr>
@@ -6295,7 +6297,7 @@
     </p:spTree>
     <p:extLst>
       <p:ext uri="{BB962C8B-B14F-4D97-AF65-F5344CB8AC3E}">
-        <p14:creationId xmlns:p14="http://schemas.microsoft.com/office/powerpoint/2010/main" val="410745193"/>
+        <p14:creationId xmlns:p14="http://schemas.microsoft.com/office/powerpoint/2010/main" val="3195105378"/>
       </p:ext>
     </p:extLst>
   </p:cSld>
@@ -6327,7 +6329,7 @@
           <p:cNvPr id="6146" name="幻灯片图像占位符 1">
             <a:extLst>
               <a:ext uri="{FF2B5EF4-FFF2-40B4-BE49-F238E27FC236}">
-                <a16:creationId xmlns:a16="http://schemas.microsoft.com/office/drawing/2014/main" xmlns="" id="{4908B133-C54F-400F-8F70-355C57C0BE11}"/>
+                <a16:creationId xmlns="" xmlns:a16="http://schemas.microsoft.com/office/drawing/2014/main" id="{4908B133-C54F-400F-8F70-355C57C0BE11}"/>
               </a:ext>
             </a:extLst>
           </p:cNvPr>
@@ -6364,7 +6366,7 @@
           <p:cNvPr id="6147" name="备注占位符 2">
             <a:extLst>
               <a:ext uri="{FF2B5EF4-FFF2-40B4-BE49-F238E27FC236}">
-                <a16:creationId xmlns:a16="http://schemas.microsoft.com/office/drawing/2014/main" xmlns="" id="{7D16C196-D24B-4BE0-AE74-D44907B2A1B1}"/>
+                <a16:creationId xmlns="" xmlns:a16="http://schemas.microsoft.com/office/drawing/2014/main" id="{7D16C196-D24B-4BE0-AE74-D44907B2A1B1}"/>
               </a:ext>
             </a:extLst>
           </p:cNvPr>
@@ -6419,7 +6421,7 @@
           <p:cNvPr id="6148" name="灯片编号占位符 3">
             <a:extLst>
               <a:ext uri="{FF2B5EF4-FFF2-40B4-BE49-F238E27FC236}">
-                <a16:creationId xmlns:a16="http://schemas.microsoft.com/office/drawing/2014/main" xmlns="" id="{D230392C-ED50-49C3-93A6-10868BF6DADE}"/>
+                <a16:creationId xmlns="" xmlns:a16="http://schemas.microsoft.com/office/drawing/2014/main" id="{D230392C-ED50-49C3-93A6-10868BF6DADE}"/>
               </a:ext>
             </a:extLst>
           </p:cNvPr>
@@ -6637,7 +6639,7 @@
     </p:spTree>
     <p:extLst>
       <p:ext uri="{BB962C8B-B14F-4D97-AF65-F5344CB8AC3E}">
-        <p14:creationId xmlns:p14="http://schemas.microsoft.com/office/powerpoint/2010/main" val="2027339421"/>
+        <p14:creationId xmlns:p14="http://schemas.microsoft.com/office/powerpoint/2010/main" val="410745193"/>
       </p:ext>
     </p:extLst>
   </p:cSld>
@@ -6669,7 +6671,7 @@
           <p:cNvPr id="6146" name="幻灯片图像占位符 1">
             <a:extLst>
               <a:ext uri="{FF2B5EF4-FFF2-40B4-BE49-F238E27FC236}">
-                <a16:creationId xmlns:a16="http://schemas.microsoft.com/office/drawing/2014/main" xmlns="" id="{4908B133-C54F-400F-8F70-355C57C0BE11}"/>
+                <a16:creationId xmlns="" xmlns:a16="http://schemas.microsoft.com/office/drawing/2014/main" id="{4908B133-C54F-400F-8F70-355C57C0BE11}"/>
               </a:ext>
             </a:extLst>
           </p:cNvPr>
@@ -6706,7 +6708,7 @@
           <p:cNvPr id="6147" name="备注占位符 2">
             <a:extLst>
               <a:ext uri="{FF2B5EF4-FFF2-40B4-BE49-F238E27FC236}">
-                <a16:creationId xmlns:a16="http://schemas.microsoft.com/office/drawing/2014/main" xmlns="" id="{7D16C196-D24B-4BE0-AE74-D44907B2A1B1}"/>
+                <a16:creationId xmlns="" xmlns:a16="http://schemas.microsoft.com/office/drawing/2014/main" id="{7D16C196-D24B-4BE0-AE74-D44907B2A1B1}"/>
               </a:ext>
             </a:extLst>
           </p:cNvPr>
@@ -6761,7 +6763,7 @@
           <p:cNvPr id="6148" name="灯片编号占位符 3">
             <a:extLst>
               <a:ext uri="{FF2B5EF4-FFF2-40B4-BE49-F238E27FC236}">
-                <a16:creationId xmlns:a16="http://schemas.microsoft.com/office/drawing/2014/main" xmlns="" id="{D230392C-ED50-49C3-93A6-10868BF6DADE}"/>
+                <a16:creationId xmlns="" xmlns:a16="http://schemas.microsoft.com/office/drawing/2014/main" id="{D230392C-ED50-49C3-93A6-10868BF6DADE}"/>
               </a:ext>
             </a:extLst>
           </p:cNvPr>
@@ -6979,7 +6981,7 @@
     </p:spTree>
     <p:extLst>
       <p:ext uri="{BB962C8B-B14F-4D97-AF65-F5344CB8AC3E}">
-        <p14:creationId xmlns:p14="http://schemas.microsoft.com/office/powerpoint/2010/main" val="1653989876"/>
+        <p14:creationId xmlns:p14="http://schemas.microsoft.com/office/powerpoint/2010/main" val="2027339421"/>
       </p:ext>
     </p:extLst>
   </p:cSld>
@@ -7011,7 +7013,7 @@
           <p:cNvPr id="6146" name="幻灯片图像占位符 1">
             <a:extLst>
               <a:ext uri="{FF2B5EF4-FFF2-40B4-BE49-F238E27FC236}">
-                <a16:creationId xmlns:a16="http://schemas.microsoft.com/office/drawing/2014/main" xmlns="" id="{4908B133-C54F-400F-8F70-355C57C0BE11}"/>
+                <a16:creationId xmlns="" xmlns:a16="http://schemas.microsoft.com/office/drawing/2014/main" id="{4908B133-C54F-400F-8F70-355C57C0BE11}"/>
               </a:ext>
             </a:extLst>
           </p:cNvPr>
@@ -7048,7 +7050,7 @@
           <p:cNvPr id="6147" name="备注占位符 2">
             <a:extLst>
               <a:ext uri="{FF2B5EF4-FFF2-40B4-BE49-F238E27FC236}">
-                <a16:creationId xmlns:a16="http://schemas.microsoft.com/office/drawing/2014/main" xmlns="" id="{7D16C196-D24B-4BE0-AE74-D44907B2A1B1}"/>
+                <a16:creationId xmlns="" xmlns:a16="http://schemas.microsoft.com/office/drawing/2014/main" id="{7D16C196-D24B-4BE0-AE74-D44907B2A1B1}"/>
               </a:ext>
             </a:extLst>
           </p:cNvPr>
@@ -7103,7 +7105,7 @@
           <p:cNvPr id="6148" name="灯片编号占位符 3">
             <a:extLst>
               <a:ext uri="{FF2B5EF4-FFF2-40B4-BE49-F238E27FC236}">
-                <a16:creationId xmlns:a16="http://schemas.microsoft.com/office/drawing/2014/main" xmlns="" id="{D230392C-ED50-49C3-93A6-10868BF6DADE}"/>
+                <a16:creationId xmlns="" xmlns:a16="http://schemas.microsoft.com/office/drawing/2014/main" id="{D230392C-ED50-49C3-93A6-10868BF6DADE}"/>
               </a:ext>
             </a:extLst>
           </p:cNvPr>
@@ -7321,7 +7323,7 @@
     </p:spTree>
     <p:extLst>
       <p:ext uri="{BB962C8B-B14F-4D97-AF65-F5344CB8AC3E}">
-        <p14:creationId xmlns:p14="http://schemas.microsoft.com/office/powerpoint/2010/main" val="2915692240"/>
+        <p14:creationId xmlns:p14="http://schemas.microsoft.com/office/powerpoint/2010/main" val="1653989876"/>
       </p:ext>
     </p:extLst>
   </p:cSld>
@@ -7353,7 +7355,7 @@
           <p:cNvPr id="6146" name="幻灯片图像占位符 1">
             <a:extLst>
               <a:ext uri="{FF2B5EF4-FFF2-40B4-BE49-F238E27FC236}">
-                <a16:creationId xmlns:a16="http://schemas.microsoft.com/office/drawing/2014/main" xmlns="" id="{4908B133-C54F-400F-8F70-355C57C0BE11}"/>
+                <a16:creationId xmlns="" xmlns:a16="http://schemas.microsoft.com/office/drawing/2014/main" id="{4908B133-C54F-400F-8F70-355C57C0BE11}"/>
               </a:ext>
             </a:extLst>
           </p:cNvPr>
@@ -7390,7 +7392,7 @@
           <p:cNvPr id="6147" name="备注占位符 2">
             <a:extLst>
               <a:ext uri="{FF2B5EF4-FFF2-40B4-BE49-F238E27FC236}">
-                <a16:creationId xmlns:a16="http://schemas.microsoft.com/office/drawing/2014/main" xmlns="" id="{7D16C196-D24B-4BE0-AE74-D44907B2A1B1}"/>
+                <a16:creationId xmlns="" xmlns:a16="http://schemas.microsoft.com/office/drawing/2014/main" id="{7D16C196-D24B-4BE0-AE74-D44907B2A1B1}"/>
               </a:ext>
             </a:extLst>
           </p:cNvPr>
@@ -7445,7 +7447,7 @@
           <p:cNvPr id="6148" name="灯片编号占位符 3">
             <a:extLst>
               <a:ext uri="{FF2B5EF4-FFF2-40B4-BE49-F238E27FC236}">
-                <a16:creationId xmlns:a16="http://schemas.microsoft.com/office/drawing/2014/main" xmlns="" id="{D230392C-ED50-49C3-93A6-10868BF6DADE}"/>
+                <a16:creationId xmlns="" xmlns:a16="http://schemas.microsoft.com/office/drawing/2014/main" id="{D230392C-ED50-49C3-93A6-10868BF6DADE}"/>
               </a:ext>
             </a:extLst>
           </p:cNvPr>
@@ -7642,6 +7644,348 @@
                 <a:defRPr/>
               </a:pPr>
               <a:t>28</a:t>
+            </a:fld>
+            <a:endParaRPr kumimoji="0" lang="zh-CN" altLang="en-US" sz="1200" b="0" i="0" u="none" strike="noStrike" kern="1200" cap="none" spc="0" normalizeH="0" baseline="0" noProof="0">
+              <a:ln>
+                <a:noFill/>
+              </a:ln>
+              <a:solidFill>
+                <a:prstClr val="black"/>
+              </a:solidFill>
+              <a:effectLst/>
+              <a:uLnTx/>
+              <a:uFillTx/>
+              <a:latin typeface="Arial" panose="020B0604020202020204" pitchFamily="34" charset="0"/>
+              <a:ea typeface="宋体" panose="02010600030101010101" pitchFamily="2" charset="-122"/>
+              <a:cs typeface="+mn-cs"/>
+            </a:endParaRPr>
+          </a:p>
+        </p:txBody>
+      </p:sp>
+    </p:spTree>
+    <p:extLst>
+      <p:ext uri="{BB962C8B-B14F-4D97-AF65-F5344CB8AC3E}">
+        <p14:creationId xmlns:p14="http://schemas.microsoft.com/office/powerpoint/2010/main" val="2915692240"/>
+      </p:ext>
+    </p:extLst>
+  </p:cSld>
+  <p:clrMapOvr>
+    <a:masterClrMapping/>
+  </p:clrMapOvr>
+</p:notes>
+</file>
+
+<file path=ppt/notesSlides/notesSlide29.xml><?xml version="1.0" encoding="utf-8"?>
+<p:notes xmlns:a="http://schemas.openxmlformats.org/drawingml/2006/main" xmlns:r="http://schemas.openxmlformats.org/officeDocument/2006/relationships" xmlns:p="http://schemas.openxmlformats.org/presentationml/2006/main">
+  <p:cSld>
+    <p:spTree>
+      <p:nvGrpSpPr>
+        <p:cNvPr id="1" name=""/>
+        <p:cNvGrpSpPr/>
+        <p:nvPr/>
+      </p:nvGrpSpPr>
+      <p:grpSpPr>
+        <a:xfrm>
+          <a:off x="0" y="0"/>
+          <a:ext cx="0" cy="0"/>
+          <a:chOff x="0" y="0"/>
+          <a:chExt cx="0" cy="0"/>
+        </a:xfrm>
+      </p:grpSpPr>
+      <p:sp>
+        <p:nvSpPr>
+          <p:cNvPr id="6146" name="幻灯片图像占位符 1">
+            <a:extLst>
+              <a:ext uri="{FF2B5EF4-FFF2-40B4-BE49-F238E27FC236}">
+                <a16:creationId xmlns="" xmlns:a16="http://schemas.microsoft.com/office/drawing/2014/main" id="{4908B133-C54F-400F-8F70-355C57C0BE11}"/>
+              </a:ext>
+            </a:extLst>
+          </p:cNvPr>
+          <p:cNvSpPr>
+            <a:spLocks noGrp="1" noRot="1" noChangeAspect="1" noTextEdit="1"/>
+          </p:cNvSpPr>
+          <p:nvPr>
+            <p:ph type="sldImg"/>
+          </p:nvPr>
+        </p:nvSpPr>
+        <p:spPr bwMode="auto">
+          <a:noFill/>
+          <a:ln>
+            <a:solidFill>
+              <a:srgbClr val="000000"/>
+            </a:solidFill>
+            <a:miter lim="800000"/>
+            <a:headEnd/>
+            <a:tailEnd/>
+          </a:ln>
+          <a:extLst>
+            <a:ext uri="{909E8E84-426E-40DD-AFC4-6F175D3DCCD1}">
+              <a14:hiddenFill xmlns:a14="http://schemas.microsoft.com/office/drawing/2010/main">
+                <a:solidFill>
+                  <a:srgbClr val="FFFFFF"/>
+                </a:solidFill>
+              </a14:hiddenFill>
+            </a:ext>
+          </a:extLst>
+        </p:spPr>
+      </p:sp>
+      <p:sp>
+        <p:nvSpPr>
+          <p:cNvPr id="6147" name="备注占位符 2">
+            <a:extLst>
+              <a:ext uri="{FF2B5EF4-FFF2-40B4-BE49-F238E27FC236}">
+                <a16:creationId xmlns="" xmlns:a16="http://schemas.microsoft.com/office/drawing/2014/main" id="{7D16C196-D24B-4BE0-AE74-D44907B2A1B1}"/>
+              </a:ext>
+            </a:extLst>
+          </p:cNvPr>
+          <p:cNvSpPr>
+            <a:spLocks noGrp="1"/>
+          </p:cNvSpPr>
+          <p:nvPr>
+            <p:ph type="body" idx="1"/>
+          </p:nvPr>
+        </p:nvSpPr>
+        <p:spPr bwMode="auto">
+          <a:noFill/>
+          <a:extLst>
+            <a:ext uri="{909E8E84-426E-40DD-AFC4-6F175D3DCCD1}">
+              <a14:hiddenFill xmlns:a14="http://schemas.microsoft.com/office/drawing/2010/main">
+                <a:solidFill>
+                  <a:srgbClr val="FFFFFF"/>
+                </a:solidFill>
+              </a14:hiddenFill>
+            </a:ext>
+            <a:ext uri="{91240B29-F687-4F45-9708-019B960494DF}">
+              <a14:hiddenLine xmlns:a14="http://schemas.microsoft.com/office/drawing/2010/main" w="9525">
+                <a:solidFill>
+                  <a:srgbClr val="000000"/>
+                </a:solidFill>
+                <a:miter lim="800000"/>
+                <a:headEnd/>
+                <a:tailEnd/>
+              </a14:hiddenLine>
+            </a:ext>
+          </a:extLst>
+        </p:spPr>
+        <p:txBody>
+          <a:bodyPr wrap="square" numCol="1" anchor="t" anchorCtr="0" compatLnSpc="1">
+            <a:prstTxWarp prst="textNoShape">
+              <a:avLst/>
+            </a:prstTxWarp>
+          </a:bodyPr>
+          <a:lstStyle/>
+          <a:p>
+            <a:pPr eaLnBrk="1" hangingPunct="1">
+              <a:spcBef>
+                <a:spcPct val="0"/>
+              </a:spcBef>
+            </a:pPr>
+            <a:endParaRPr lang="zh-CN" altLang="en-US" dirty="0"/>
+          </a:p>
+        </p:txBody>
+      </p:sp>
+      <p:sp>
+        <p:nvSpPr>
+          <p:cNvPr id="6148" name="灯片编号占位符 3">
+            <a:extLst>
+              <a:ext uri="{FF2B5EF4-FFF2-40B4-BE49-F238E27FC236}">
+                <a16:creationId xmlns="" xmlns:a16="http://schemas.microsoft.com/office/drawing/2014/main" id="{D230392C-ED50-49C3-93A6-10868BF6DADE}"/>
+              </a:ext>
+            </a:extLst>
+          </p:cNvPr>
+          <p:cNvSpPr>
+            <a:spLocks noGrp="1"/>
+          </p:cNvSpPr>
+          <p:nvPr>
+            <p:ph type="sldNum" sz="quarter" idx="5"/>
+          </p:nvPr>
+        </p:nvSpPr>
+        <p:spPr bwMode="auto">
+          <a:noFill/>
+          <a:extLst>
+            <a:ext uri="{909E8E84-426E-40DD-AFC4-6F175D3DCCD1}">
+              <a14:hiddenFill xmlns:a14="http://schemas.microsoft.com/office/drawing/2010/main">
+                <a:solidFill>
+                  <a:srgbClr val="FFFFFF"/>
+                </a:solidFill>
+              </a14:hiddenFill>
+            </a:ext>
+            <a:ext uri="{91240B29-F687-4F45-9708-019B960494DF}">
+              <a14:hiddenLine xmlns:a14="http://schemas.microsoft.com/office/drawing/2010/main" w="9525">
+                <a:solidFill>
+                  <a:srgbClr val="000000"/>
+                </a:solidFill>
+                <a:miter lim="800000"/>
+                <a:headEnd/>
+                <a:tailEnd/>
+              </a14:hiddenLine>
+            </a:ext>
+          </a:extLst>
+        </p:spPr>
+        <p:txBody>
+          <a:bodyPr wrap="square" numCol="1" anchorCtr="0" compatLnSpc="1">
+            <a:prstTxWarp prst="textNoShape">
+              <a:avLst/>
+            </a:prstTxWarp>
+          </a:bodyPr>
+          <a:lstStyle>
+            <a:lvl1pPr>
+              <a:defRPr>
+                <a:solidFill>
+                  <a:schemeClr val="tx1"/>
+                </a:solidFill>
+                <a:latin typeface="Arial" panose="020B0604020202020204" pitchFamily="34" charset="0"/>
+                <a:ea typeface="宋体" panose="02010600030101010101" pitchFamily="2" charset="-122"/>
+              </a:defRPr>
+            </a:lvl1pPr>
+            <a:lvl2pPr marL="742950" indent="-285750">
+              <a:defRPr>
+                <a:solidFill>
+                  <a:schemeClr val="tx1"/>
+                </a:solidFill>
+                <a:latin typeface="Arial" panose="020B0604020202020204" pitchFamily="34" charset="0"/>
+                <a:ea typeface="宋体" panose="02010600030101010101" pitchFamily="2" charset="-122"/>
+              </a:defRPr>
+            </a:lvl2pPr>
+            <a:lvl3pPr marL="1143000" indent="-228600">
+              <a:defRPr>
+                <a:solidFill>
+                  <a:schemeClr val="tx1"/>
+                </a:solidFill>
+                <a:latin typeface="Arial" panose="020B0604020202020204" pitchFamily="34" charset="0"/>
+                <a:ea typeface="宋体" panose="02010600030101010101" pitchFamily="2" charset="-122"/>
+              </a:defRPr>
+            </a:lvl3pPr>
+            <a:lvl4pPr marL="1600200" indent="-228600">
+              <a:defRPr>
+                <a:solidFill>
+                  <a:schemeClr val="tx1"/>
+                </a:solidFill>
+                <a:latin typeface="Arial" panose="020B0604020202020204" pitchFamily="34" charset="0"/>
+                <a:ea typeface="宋体" panose="02010600030101010101" pitchFamily="2" charset="-122"/>
+              </a:defRPr>
+            </a:lvl4pPr>
+            <a:lvl5pPr marL="2057400" indent="-228600">
+              <a:defRPr>
+                <a:solidFill>
+                  <a:schemeClr val="tx1"/>
+                </a:solidFill>
+                <a:latin typeface="Arial" panose="020B0604020202020204" pitchFamily="34" charset="0"/>
+                <a:ea typeface="宋体" panose="02010600030101010101" pitchFamily="2" charset="-122"/>
+              </a:defRPr>
+            </a:lvl5pPr>
+            <a:lvl6pPr marL="2514600" indent="-228600" eaLnBrk="0" fontAlgn="base" hangingPunct="0">
+              <a:spcBef>
+                <a:spcPct val="0"/>
+              </a:spcBef>
+              <a:spcAft>
+                <a:spcPct val="0"/>
+              </a:spcAft>
+              <a:defRPr>
+                <a:solidFill>
+                  <a:schemeClr val="tx1"/>
+                </a:solidFill>
+                <a:latin typeface="Arial" panose="020B0604020202020204" pitchFamily="34" charset="0"/>
+                <a:ea typeface="宋体" panose="02010600030101010101" pitchFamily="2" charset="-122"/>
+              </a:defRPr>
+            </a:lvl6pPr>
+            <a:lvl7pPr marL="2971800" indent="-228600" eaLnBrk="0" fontAlgn="base" hangingPunct="0">
+              <a:spcBef>
+                <a:spcPct val="0"/>
+              </a:spcBef>
+              <a:spcAft>
+                <a:spcPct val="0"/>
+              </a:spcAft>
+              <a:defRPr>
+                <a:solidFill>
+                  <a:schemeClr val="tx1"/>
+                </a:solidFill>
+                <a:latin typeface="Arial" panose="020B0604020202020204" pitchFamily="34" charset="0"/>
+                <a:ea typeface="宋体" panose="02010600030101010101" pitchFamily="2" charset="-122"/>
+              </a:defRPr>
+            </a:lvl7pPr>
+            <a:lvl8pPr marL="3429000" indent="-228600" eaLnBrk="0" fontAlgn="base" hangingPunct="0">
+              <a:spcBef>
+                <a:spcPct val="0"/>
+              </a:spcBef>
+              <a:spcAft>
+                <a:spcPct val="0"/>
+              </a:spcAft>
+              <a:defRPr>
+                <a:solidFill>
+                  <a:schemeClr val="tx1"/>
+                </a:solidFill>
+                <a:latin typeface="Arial" panose="020B0604020202020204" pitchFamily="34" charset="0"/>
+                <a:ea typeface="宋体" panose="02010600030101010101" pitchFamily="2" charset="-122"/>
+              </a:defRPr>
+            </a:lvl8pPr>
+            <a:lvl9pPr marL="3886200" indent="-228600" eaLnBrk="0" fontAlgn="base" hangingPunct="0">
+              <a:spcBef>
+                <a:spcPct val="0"/>
+              </a:spcBef>
+              <a:spcAft>
+                <a:spcPct val="0"/>
+              </a:spcAft>
+              <a:defRPr>
+                <a:solidFill>
+                  <a:schemeClr val="tx1"/>
+                </a:solidFill>
+                <a:latin typeface="Arial" panose="020B0604020202020204" pitchFamily="34" charset="0"/>
+                <a:ea typeface="宋体" panose="02010600030101010101" pitchFamily="2" charset="-122"/>
+              </a:defRPr>
+            </a:lvl9pPr>
+          </a:lstStyle>
+          <a:p>
+            <a:pPr marL="0" marR="0" lvl="0" indent="0" algn="r" defTabSz="914400" rtl="0" eaLnBrk="0" fontAlgn="base" latinLnBrk="0" hangingPunct="0">
+              <a:lnSpc>
+                <a:spcPct val="100000"/>
+              </a:lnSpc>
+              <a:spcBef>
+                <a:spcPct val="0"/>
+              </a:spcBef>
+              <a:spcAft>
+                <a:spcPct val="0"/>
+              </a:spcAft>
+              <a:buClrTx/>
+              <a:buSzTx/>
+              <a:buFontTx/>
+              <a:buNone/>
+              <a:tabLst/>
+              <a:defRPr/>
+            </a:pPr>
+            <a:fld id="{38B77654-DC41-416A-BE3E-48F8E5B1370F}" type="slidenum">
+              <a:rPr kumimoji="0" lang="zh-CN" altLang="en-US" sz="1200" b="0" i="0" u="none" strike="noStrike" kern="1200" cap="none" spc="0" normalizeH="0" baseline="0" noProof="0" smtClean="0">
+                <a:ln>
+                  <a:noFill/>
+                </a:ln>
+                <a:solidFill>
+                  <a:prstClr val="black"/>
+                </a:solidFill>
+                <a:effectLst/>
+                <a:uLnTx/>
+                <a:uFillTx/>
+                <a:latin typeface="Arial" panose="020B0604020202020204" pitchFamily="34" charset="0"/>
+                <a:ea typeface="宋体" panose="02010600030101010101" pitchFamily="2" charset="-122"/>
+                <a:cs typeface="+mn-cs"/>
+              </a:rPr>
+              <a:pPr marL="0" marR="0" lvl="0" indent="0" algn="r" defTabSz="914400" rtl="0" eaLnBrk="0" fontAlgn="base" latinLnBrk="0" hangingPunct="0">
+                <a:lnSpc>
+                  <a:spcPct val="100000"/>
+                </a:lnSpc>
+                <a:spcBef>
+                  <a:spcPct val="0"/>
+                </a:spcBef>
+                <a:spcAft>
+                  <a:spcPct val="0"/>
+                </a:spcAft>
+                <a:buClrTx/>
+                <a:buSzTx/>
+                <a:buFontTx/>
+                <a:buNone/>
+                <a:tabLst/>
+                <a:defRPr/>
+              </a:pPr>
+              <a:t>29</a:t>
             </a:fld>
             <a:endParaRPr kumimoji="0" lang="zh-CN" altLang="en-US" sz="1200" b="0" i="0" u="none" strike="noStrike" kern="1200" cap="none" spc="0" normalizeH="0" baseline="0" noProof="0">
               <a:ln>
@@ -7695,7 +8039,7 @@
           <p:cNvPr id="6146" name="幻灯片图像占位符 1">
             <a:extLst>
               <a:ext uri="{FF2B5EF4-FFF2-40B4-BE49-F238E27FC236}">
-                <a16:creationId xmlns:a16="http://schemas.microsoft.com/office/drawing/2014/main" xmlns="" id="{4908B133-C54F-400F-8F70-355C57C0BE11}"/>
+                <a16:creationId xmlns="" xmlns:a16="http://schemas.microsoft.com/office/drawing/2014/main" id="{4908B133-C54F-400F-8F70-355C57C0BE11}"/>
               </a:ext>
             </a:extLst>
           </p:cNvPr>
@@ -7732,7 +8076,7 @@
           <p:cNvPr id="6147" name="备注占位符 2">
             <a:extLst>
               <a:ext uri="{FF2B5EF4-FFF2-40B4-BE49-F238E27FC236}">
-                <a16:creationId xmlns:a16="http://schemas.microsoft.com/office/drawing/2014/main" xmlns="" id="{7D16C196-D24B-4BE0-AE74-D44907B2A1B1}"/>
+                <a16:creationId xmlns="" xmlns:a16="http://schemas.microsoft.com/office/drawing/2014/main" id="{7D16C196-D24B-4BE0-AE74-D44907B2A1B1}"/>
               </a:ext>
             </a:extLst>
           </p:cNvPr>
@@ -7787,7 +8131,7 @@
           <p:cNvPr id="6148" name="灯片编号占位符 3">
             <a:extLst>
               <a:ext uri="{FF2B5EF4-FFF2-40B4-BE49-F238E27FC236}">
-                <a16:creationId xmlns:a16="http://schemas.microsoft.com/office/drawing/2014/main" xmlns="" id="{D230392C-ED50-49C3-93A6-10868BF6DADE}"/>
+                <a16:creationId xmlns="" xmlns:a16="http://schemas.microsoft.com/office/drawing/2014/main" id="{D230392C-ED50-49C3-93A6-10868BF6DADE}"/>
               </a:ext>
             </a:extLst>
           </p:cNvPr>
@@ -8015,7 +8359,7 @@
 </p:notes>
 </file>
 
-<file path=ppt/notesSlides/notesSlide4.xml><?xml version="1.0" encoding="utf-8"?>
+<file path=ppt/notesSlides/notesSlide30.xml><?xml version="1.0" encoding="utf-8"?>
 <p:notes xmlns:a="http://schemas.openxmlformats.org/drawingml/2006/main" xmlns:r="http://schemas.openxmlformats.org/officeDocument/2006/relationships" xmlns:p="http://schemas.openxmlformats.org/presentationml/2006/main">
   <p:cSld>
     <p:spTree>
@@ -8037,7 +8381,7 @@
           <p:cNvPr id="6146" name="幻灯片图像占位符 1">
             <a:extLst>
               <a:ext uri="{FF2B5EF4-FFF2-40B4-BE49-F238E27FC236}">
-                <a16:creationId xmlns:a16="http://schemas.microsoft.com/office/drawing/2014/main" xmlns="" id="{4908B133-C54F-400F-8F70-355C57C0BE11}"/>
+                <a16:creationId xmlns="" xmlns:a16="http://schemas.microsoft.com/office/drawing/2014/main" id="{4908B133-C54F-400F-8F70-355C57C0BE11}"/>
               </a:ext>
             </a:extLst>
           </p:cNvPr>
@@ -8074,7 +8418,7 @@
           <p:cNvPr id="6147" name="备注占位符 2">
             <a:extLst>
               <a:ext uri="{FF2B5EF4-FFF2-40B4-BE49-F238E27FC236}">
-                <a16:creationId xmlns:a16="http://schemas.microsoft.com/office/drawing/2014/main" xmlns="" id="{7D16C196-D24B-4BE0-AE74-D44907B2A1B1}"/>
+                <a16:creationId xmlns="" xmlns:a16="http://schemas.microsoft.com/office/drawing/2014/main" id="{7D16C196-D24B-4BE0-AE74-D44907B2A1B1}"/>
               </a:ext>
             </a:extLst>
           </p:cNvPr>
@@ -8129,7 +8473,349 @@
           <p:cNvPr id="6148" name="灯片编号占位符 3">
             <a:extLst>
               <a:ext uri="{FF2B5EF4-FFF2-40B4-BE49-F238E27FC236}">
-                <a16:creationId xmlns:a16="http://schemas.microsoft.com/office/drawing/2014/main" xmlns="" id="{D230392C-ED50-49C3-93A6-10868BF6DADE}"/>
+                <a16:creationId xmlns="" xmlns:a16="http://schemas.microsoft.com/office/drawing/2014/main" id="{D230392C-ED50-49C3-93A6-10868BF6DADE}"/>
+              </a:ext>
+            </a:extLst>
+          </p:cNvPr>
+          <p:cNvSpPr>
+            <a:spLocks noGrp="1"/>
+          </p:cNvSpPr>
+          <p:nvPr>
+            <p:ph type="sldNum" sz="quarter" idx="5"/>
+          </p:nvPr>
+        </p:nvSpPr>
+        <p:spPr bwMode="auto">
+          <a:noFill/>
+          <a:extLst>
+            <a:ext uri="{909E8E84-426E-40DD-AFC4-6F175D3DCCD1}">
+              <a14:hiddenFill xmlns:a14="http://schemas.microsoft.com/office/drawing/2010/main">
+                <a:solidFill>
+                  <a:srgbClr val="FFFFFF"/>
+                </a:solidFill>
+              </a14:hiddenFill>
+            </a:ext>
+            <a:ext uri="{91240B29-F687-4F45-9708-019B960494DF}">
+              <a14:hiddenLine xmlns:a14="http://schemas.microsoft.com/office/drawing/2010/main" w="9525">
+                <a:solidFill>
+                  <a:srgbClr val="000000"/>
+                </a:solidFill>
+                <a:miter lim="800000"/>
+                <a:headEnd/>
+                <a:tailEnd/>
+              </a14:hiddenLine>
+            </a:ext>
+          </a:extLst>
+        </p:spPr>
+        <p:txBody>
+          <a:bodyPr wrap="square" numCol="1" anchorCtr="0" compatLnSpc="1">
+            <a:prstTxWarp prst="textNoShape">
+              <a:avLst/>
+            </a:prstTxWarp>
+          </a:bodyPr>
+          <a:lstStyle>
+            <a:lvl1pPr>
+              <a:defRPr>
+                <a:solidFill>
+                  <a:schemeClr val="tx1"/>
+                </a:solidFill>
+                <a:latin typeface="Arial" panose="020B0604020202020204" pitchFamily="34" charset="0"/>
+                <a:ea typeface="宋体" panose="02010600030101010101" pitchFamily="2" charset="-122"/>
+              </a:defRPr>
+            </a:lvl1pPr>
+            <a:lvl2pPr marL="742950" indent="-285750">
+              <a:defRPr>
+                <a:solidFill>
+                  <a:schemeClr val="tx1"/>
+                </a:solidFill>
+                <a:latin typeface="Arial" panose="020B0604020202020204" pitchFamily="34" charset="0"/>
+                <a:ea typeface="宋体" panose="02010600030101010101" pitchFamily="2" charset="-122"/>
+              </a:defRPr>
+            </a:lvl2pPr>
+            <a:lvl3pPr marL="1143000" indent="-228600">
+              <a:defRPr>
+                <a:solidFill>
+                  <a:schemeClr val="tx1"/>
+                </a:solidFill>
+                <a:latin typeface="Arial" panose="020B0604020202020204" pitchFamily="34" charset="0"/>
+                <a:ea typeface="宋体" panose="02010600030101010101" pitchFamily="2" charset="-122"/>
+              </a:defRPr>
+            </a:lvl3pPr>
+            <a:lvl4pPr marL="1600200" indent="-228600">
+              <a:defRPr>
+                <a:solidFill>
+                  <a:schemeClr val="tx1"/>
+                </a:solidFill>
+                <a:latin typeface="Arial" panose="020B0604020202020204" pitchFamily="34" charset="0"/>
+                <a:ea typeface="宋体" panose="02010600030101010101" pitchFamily="2" charset="-122"/>
+              </a:defRPr>
+            </a:lvl4pPr>
+            <a:lvl5pPr marL="2057400" indent="-228600">
+              <a:defRPr>
+                <a:solidFill>
+                  <a:schemeClr val="tx1"/>
+                </a:solidFill>
+                <a:latin typeface="Arial" panose="020B0604020202020204" pitchFamily="34" charset="0"/>
+                <a:ea typeface="宋体" panose="02010600030101010101" pitchFamily="2" charset="-122"/>
+              </a:defRPr>
+            </a:lvl5pPr>
+            <a:lvl6pPr marL="2514600" indent="-228600" eaLnBrk="0" fontAlgn="base" hangingPunct="0">
+              <a:spcBef>
+                <a:spcPct val="0"/>
+              </a:spcBef>
+              <a:spcAft>
+                <a:spcPct val="0"/>
+              </a:spcAft>
+              <a:defRPr>
+                <a:solidFill>
+                  <a:schemeClr val="tx1"/>
+                </a:solidFill>
+                <a:latin typeface="Arial" panose="020B0604020202020204" pitchFamily="34" charset="0"/>
+                <a:ea typeface="宋体" panose="02010600030101010101" pitchFamily="2" charset="-122"/>
+              </a:defRPr>
+            </a:lvl6pPr>
+            <a:lvl7pPr marL="2971800" indent="-228600" eaLnBrk="0" fontAlgn="base" hangingPunct="0">
+              <a:spcBef>
+                <a:spcPct val="0"/>
+              </a:spcBef>
+              <a:spcAft>
+                <a:spcPct val="0"/>
+              </a:spcAft>
+              <a:defRPr>
+                <a:solidFill>
+                  <a:schemeClr val="tx1"/>
+                </a:solidFill>
+                <a:latin typeface="Arial" panose="020B0604020202020204" pitchFamily="34" charset="0"/>
+                <a:ea typeface="宋体" panose="02010600030101010101" pitchFamily="2" charset="-122"/>
+              </a:defRPr>
+            </a:lvl7pPr>
+            <a:lvl8pPr marL="3429000" indent="-228600" eaLnBrk="0" fontAlgn="base" hangingPunct="0">
+              <a:spcBef>
+                <a:spcPct val="0"/>
+              </a:spcBef>
+              <a:spcAft>
+                <a:spcPct val="0"/>
+              </a:spcAft>
+              <a:defRPr>
+                <a:solidFill>
+                  <a:schemeClr val="tx1"/>
+                </a:solidFill>
+                <a:latin typeface="Arial" panose="020B0604020202020204" pitchFamily="34" charset="0"/>
+                <a:ea typeface="宋体" panose="02010600030101010101" pitchFamily="2" charset="-122"/>
+              </a:defRPr>
+            </a:lvl8pPr>
+            <a:lvl9pPr marL="3886200" indent="-228600" eaLnBrk="0" fontAlgn="base" hangingPunct="0">
+              <a:spcBef>
+                <a:spcPct val="0"/>
+              </a:spcBef>
+              <a:spcAft>
+                <a:spcPct val="0"/>
+              </a:spcAft>
+              <a:defRPr>
+                <a:solidFill>
+                  <a:schemeClr val="tx1"/>
+                </a:solidFill>
+                <a:latin typeface="Arial" panose="020B0604020202020204" pitchFamily="34" charset="0"/>
+                <a:ea typeface="宋体" panose="02010600030101010101" pitchFamily="2" charset="-122"/>
+              </a:defRPr>
+            </a:lvl9pPr>
+          </a:lstStyle>
+          <a:p>
+            <a:pPr marL="0" marR="0" lvl="0" indent="0" algn="r" defTabSz="914400" rtl="0" eaLnBrk="0" fontAlgn="base" latinLnBrk="0" hangingPunct="0">
+              <a:lnSpc>
+                <a:spcPct val="100000"/>
+              </a:lnSpc>
+              <a:spcBef>
+                <a:spcPct val="0"/>
+              </a:spcBef>
+              <a:spcAft>
+                <a:spcPct val="0"/>
+              </a:spcAft>
+              <a:buClrTx/>
+              <a:buSzTx/>
+              <a:buFontTx/>
+              <a:buNone/>
+              <a:tabLst/>
+              <a:defRPr/>
+            </a:pPr>
+            <a:fld id="{38B77654-DC41-416A-BE3E-48F8E5B1370F}" type="slidenum">
+              <a:rPr kumimoji="0" lang="zh-CN" altLang="en-US" sz="1200" b="0" i="0" u="none" strike="noStrike" kern="1200" cap="none" spc="0" normalizeH="0" baseline="0" noProof="0" smtClean="0">
+                <a:ln>
+                  <a:noFill/>
+                </a:ln>
+                <a:solidFill>
+                  <a:prstClr val="black"/>
+                </a:solidFill>
+                <a:effectLst/>
+                <a:uLnTx/>
+                <a:uFillTx/>
+                <a:latin typeface="Arial" panose="020B0604020202020204" pitchFamily="34" charset="0"/>
+                <a:ea typeface="宋体" panose="02010600030101010101" pitchFamily="2" charset="-122"/>
+                <a:cs typeface="+mn-cs"/>
+              </a:rPr>
+              <a:pPr marL="0" marR="0" lvl="0" indent="0" algn="r" defTabSz="914400" rtl="0" eaLnBrk="0" fontAlgn="base" latinLnBrk="0" hangingPunct="0">
+                <a:lnSpc>
+                  <a:spcPct val="100000"/>
+                </a:lnSpc>
+                <a:spcBef>
+                  <a:spcPct val="0"/>
+                </a:spcBef>
+                <a:spcAft>
+                  <a:spcPct val="0"/>
+                </a:spcAft>
+                <a:buClrTx/>
+                <a:buSzTx/>
+                <a:buFontTx/>
+                <a:buNone/>
+                <a:tabLst/>
+                <a:defRPr/>
+              </a:pPr>
+              <a:t>30</a:t>
+            </a:fld>
+            <a:endParaRPr kumimoji="0" lang="zh-CN" altLang="en-US" sz="1200" b="0" i="0" u="none" strike="noStrike" kern="1200" cap="none" spc="0" normalizeH="0" baseline="0" noProof="0">
+              <a:ln>
+                <a:noFill/>
+              </a:ln>
+              <a:solidFill>
+                <a:prstClr val="black"/>
+              </a:solidFill>
+              <a:effectLst/>
+              <a:uLnTx/>
+              <a:uFillTx/>
+              <a:latin typeface="Arial" panose="020B0604020202020204" pitchFamily="34" charset="0"/>
+              <a:ea typeface="宋体" panose="02010600030101010101" pitchFamily="2" charset="-122"/>
+              <a:cs typeface="+mn-cs"/>
+            </a:endParaRPr>
+          </a:p>
+        </p:txBody>
+      </p:sp>
+    </p:spTree>
+    <p:extLst>
+      <p:ext uri="{BB962C8B-B14F-4D97-AF65-F5344CB8AC3E}">
+        <p14:creationId xmlns:p14="http://schemas.microsoft.com/office/powerpoint/2010/main" val="3042121322"/>
+      </p:ext>
+    </p:extLst>
+  </p:cSld>
+  <p:clrMapOvr>
+    <a:masterClrMapping/>
+  </p:clrMapOvr>
+</p:notes>
+</file>
+
+<file path=ppt/notesSlides/notesSlide4.xml><?xml version="1.0" encoding="utf-8"?>
+<p:notes xmlns:a="http://schemas.openxmlformats.org/drawingml/2006/main" xmlns:r="http://schemas.openxmlformats.org/officeDocument/2006/relationships" xmlns:p="http://schemas.openxmlformats.org/presentationml/2006/main">
+  <p:cSld>
+    <p:spTree>
+      <p:nvGrpSpPr>
+        <p:cNvPr id="1" name=""/>
+        <p:cNvGrpSpPr/>
+        <p:nvPr/>
+      </p:nvGrpSpPr>
+      <p:grpSpPr>
+        <a:xfrm>
+          <a:off x="0" y="0"/>
+          <a:ext cx="0" cy="0"/>
+          <a:chOff x="0" y="0"/>
+          <a:chExt cx="0" cy="0"/>
+        </a:xfrm>
+      </p:grpSpPr>
+      <p:sp>
+        <p:nvSpPr>
+          <p:cNvPr id="6146" name="幻灯片图像占位符 1">
+            <a:extLst>
+              <a:ext uri="{FF2B5EF4-FFF2-40B4-BE49-F238E27FC236}">
+                <a16:creationId xmlns="" xmlns:a16="http://schemas.microsoft.com/office/drawing/2014/main" id="{4908B133-C54F-400F-8F70-355C57C0BE11}"/>
+              </a:ext>
+            </a:extLst>
+          </p:cNvPr>
+          <p:cNvSpPr>
+            <a:spLocks noGrp="1" noRot="1" noChangeAspect="1" noTextEdit="1"/>
+          </p:cNvSpPr>
+          <p:nvPr>
+            <p:ph type="sldImg"/>
+          </p:nvPr>
+        </p:nvSpPr>
+        <p:spPr bwMode="auto">
+          <a:noFill/>
+          <a:ln>
+            <a:solidFill>
+              <a:srgbClr val="000000"/>
+            </a:solidFill>
+            <a:miter lim="800000"/>
+            <a:headEnd/>
+            <a:tailEnd/>
+          </a:ln>
+          <a:extLst>
+            <a:ext uri="{909E8E84-426E-40DD-AFC4-6F175D3DCCD1}">
+              <a14:hiddenFill xmlns:a14="http://schemas.microsoft.com/office/drawing/2010/main">
+                <a:solidFill>
+                  <a:srgbClr val="FFFFFF"/>
+                </a:solidFill>
+              </a14:hiddenFill>
+            </a:ext>
+          </a:extLst>
+        </p:spPr>
+      </p:sp>
+      <p:sp>
+        <p:nvSpPr>
+          <p:cNvPr id="6147" name="备注占位符 2">
+            <a:extLst>
+              <a:ext uri="{FF2B5EF4-FFF2-40B4-BE49-F238E27FC236}">
+                <a16:creationId xmlns="" xmlns:a16="http://schemas.microsoft.com/office/drawing/2014/main" id="{7D16C196-D24B-4BE0-AE74-D44907B2A1B1}"/>
+              </a:ext>
+            </a:extLst>
+          </p:cNvPr>
+          <p:cNvSpPr>
+            <a:spLocks noGrp="1"/>
+          </p:cNvSpPr>
+          <p:nvPr>
+            <p:ph type="body" idx="1"/>
+          </p:nvPr>
+        </p:nvSpPr>
+        <p:spPr bwMode="auto">
+          <a:noFill/>
+          <a:extLst>
+            <a:ext uri="{909E8E84-426E-40DD-AFC4-6F175D3DCCD1}">
+              <a14:hiddenFill xmlns:a14="http://schemas.microsoft.com/office/drawing/2010/main">
+                <a:solidFill>
+                  <a:srgbClr val="FFFFFF"/>
+                </a:solidFill>
+              </a14:hiddenFill>
+            </a:ext>
+            <a:ext uri="{91240B29-F687-4F45-9708-019B960494DF}">
+              <a14:hiddenLine xmlns:a14="http://schemas.microsoft.com/office/drawing/2010/main" w="9525">
+                <a:solidFill>
+                  <a:srgbClr val="000000"/>
+                </a:solidFill>
+                <a:miter lim="800000"/>
+                <a:headEnd/>
+                <a:tailEnd/>
+              </a14:hiddenLine>
+            </a:ext>
+          </a:extLst>
+        </p:spPr>
+        <p:txBody>
+          <a:bodyPr wrap="square" numCol="1" anchor="t" anchorCtr="0" compatLnSpc="1">
+            <a:prstTxWarp prst="textNoShape">
+              <a:avLst/>
+            </a:prstTxWarp>
+          </a:bodyPr>
+          <a:lstStyle/>
+          <a:p>
+            <a:pPr eaLnBrk="1" hangingPunct="1">
+              <a:spcBef>
+                <a:spcPct val="0"/>
+              </a:spcBef>
+            </a:pPr>
+            <a:endParaRPr lang="zh-CN" altLang="en-US" dirty="0"/>
+          </a:p>
+        </p:txBody>
+      </p:sp>
+      <p:sp>
+        <p:nvSpPr>
+          <p:cNvPr id="6148" name="灯片编号占位符 3">
+            <a:extLst>
+              <a:ext uri="{FF2B5EF4-FFF2-40B4-BE49-F238E27FC236}">
+                <a16:creationId xmlns="" xmlns:a16="http://schemas.microsoft.com/office/drawing/2014/main" id="{D230392C-ED50-49C3-93A6-10868BF6DADE}"/>
               </a:ext>
             </a:extLst>
           </p:cNvPr>
@@ -8379,7 +9065,7 @@
           <p:cNvPr id="6146" name="幻灯片图像占位符 1">
             <a:extLst>
               <a:ext uri="{FF2B5EF4-FFF2-40B4-BE49-F238E27FC236}">
-                <a16:creationId xmlns:a16="http://schemas.microsoft.com/office/drawing/2014/main" xmlns="" id="{4908B133-C54F-400F-8F70-355C57C0BE11}"/>
+                <a16:creationId xmlns="" xmlns:a16="http://schemas.microsoft.com/office/drawing/2014/main" id="{4908B133-C54F-400F-8F70-355C57C0BE11}"/>
               </a:ext>
             </a:extLst>
           </p:cNvPr>
@@ -8416,7 +9102,7 @@
           <p:cNvPr id="6147" name="备注占位符 2">
             <a:extLst>
               <a:ext uri="{FF2B5EF4-FFF2-40B4-BE49-F238E27FC236}">
-                <a16:creationId xmlns:a16="http://schemas.microsoft.com/office/drawing/2014/main" xmlns="" id="{7D16C196-D24B-4BE0-AE74-D44907B2A1B1}"/>
+                <a16:creationId xmlns="" xmlns:a16="http://schemas.microsoft.com/office/drawing/2014/main" id="{7D16C196-D24B-4BE0-AE74-D44907B2A1B1}"/>
               </a:ext>
             </a:extLst>
           </p:cNvPr>
@@ -8471,7 +9157,7 @@
           <p:cNvPr id="6148" name="灯片编号占位符 3">
             <a:extLst>
               <a:ext uri="{FF2B5EF4-FFF2-40B4-BE49-F238E27FC236}">
-                <a16:creationId xmlns:a16="http://schemas.microsoft.com/office/drawing/2014/main" xmlns="" id="{D230392C-ED50-49C3-93A6-10868BF6DADE}"/>
+                <a16:creationId xmlns="" xmlns:a16="http://schemas.microsoft.com/office/drawing/2014/main" id="{D230392C-ED50-49C3-93A6-10868BF6DADE}"/>
               </a:ext>
             </a:extLst>
           </p:cNvPr>
@@ -8721,7 +9407,7 @@
           <p:cNvPr id="6146" name="幻灯片图像占位符 1">
             <a:extLst>
               <a:ext uri="{FF2B5EF4-FFF2-40B4-BE49-F238E27FC236}">
-                <a16:creationId xmlns:a16="http://schemas.microsoft.com/office/drawing/2014/main" xmlns="" id="{4908B133-C54F-400F-8F70-355C57C0BE11}"/>
+                <a16:creationId xmlns="" xmlns:a16="http://schemas.microsoft.com/office/drawing/2014/main" id="{4908B133-C54F-400F-8F70-355C57C0BE11}"/>
               </a:ext>
             </a:extLst>
           </p:cNvPr>
@@ -8758,7 +9444,7 @@
           <p:cNvPr id="6147" name="备注占位符 2">
             <a:extLst>
               <a:ext uri="{FF2B5EF4-FFF2-40B4-BE49-F238E27FC236}">
-                <a16:creationId xmlns:a16="http://schemas.microsoft.com/office/drawing/2014/main" xmlns="" id="{7D16C196-D24B-4BE0-AE74-D44907B2A1B1}"/>
+                <a16:creationId xmlns="" xmlns:a16="http://schemas.microsoft.com/office/drawing/2014/main" id="{7D16C196-D24B-4BE0-AE74-D44907B2A1B1}"/>
               </a:ext>
             </a:extLst>
           </p:cNvPr>
@@ -8813,7 +9499,7 @@
           <p:cNvPr id="6148" name="灯片编号占位符 3">
             <a:extLst>
               <a:ext uri="{FF2B5EF4-FFF2-40B4-BE49-F238E27FC236}">
-                <a16:creationId xmlns:a16="http://schemas.microsoft.com/office/drawing/2014/main" xmlns="" id="{D230392C-ED50-49C3-93A6-10868BF6DADE}"/>
+                <a16:creationId xmlns="" xmlns:a16="http://schemas.microsoft.com/office/drawing/2014/main" id="{D230392C-ED50-49C3-93A6-10868BF6DADE}"/>
               </a:ext>
             </a:extLst>
           </p:cNvPr>
@@ -9063,7 +9749,7 @@
           <p:cNvPr id="6146" name="幻灯片图像占位符 1">
             <a:extLst>
               <a:ext uri="{FF2B5EF4-FFF2-40B4-BE49-F238E27FC236}">
-                <a16:creationId xmlns:a16="http://schemas.microsoft.com/office/drawing/2014/main" xmlns="" id="{4908B133-C54F-400F-8F70-355C57C0BE11}"/>
+                <a16:creationId xmlns="" xmlns:a16="http://schemas.microsoft.com/office/drawing/2014/main" id="{4908B133-C54F-400F-8F70-355C57C0BE11}"/>
               </a:ext>
             </a:extLst>
           </p:cNvPr>
@@ -9100,7 +9786,7 @@
           <p:cNvPr id="6147" name="备注占位符 2">
             <a:extLst>
               <a:ext uri="{FF2B5EF4-FFF2-40B4-BE49-F238E27FC236}">
-                <a16:creationId xmlns:a16="http://schemas.microsoft.com/office/drawing/2014/main" xmlns="" id="{7D16C196-D24B-4BE0-AE74-D44907B2A1B1}"/>
+                <a16:creationId xmlns="" xmlns:a16="http://schemas.microsoft.com/office/drawing/2014/main" id="{7D16C196-D24B-4BE0-AE74-D44907B2A1B1}"/>
               </a:ext>
             </a:extLst>
           </p:cNvPr>
@@ -9155,7 +9841,7 @@
           <p:cNvPr id="6148" name="灯片编号占位符 3">
             <a:extLst>
               <a:ext uri="{FF2B5EF4-FFF2-40B4-BE49-F238E27FC236}">
-                <a16:creationId xmlns:a16="http://schemas.microsoft.com/office/drawing/2014/main" xmlns="" id="{D230392C-ED50-49C3-93A6-10868BF6DADE}"/>
+                <a16:creationId xmlns="" xmlns:a16="http://schemas.microsoft.com/office/drawing/2014/main" id="{D230392C-ED50-49C3-93A6-10868BF6DADE}"/>
               </a:ext>
             </a:extLst>
           </p:cNvPr>
@@ -9405,7 +10091,7 @@
           <p:cNvPr id="6146" name="幻灯片图像占位符 1">
             <a:extLst>
               <a:ext uri="{FF2B5EF4-FFF2-40B4-BE49-F238E27FC236}">
-                <a16:creationId xmlns:a16="http://schemas.microsoft.com/office/drawing/2014/main" xmlns="" id="{4908B133-C54F-400F-8F70-355C57C0BE11}"/>
+                <a16:creationId xmlns="" xmlns:a16="http://schemas.microsoft.com/office/drawing/2014/main" id="{4908B133-C54F-400F-8F70-355C57C0BE11}"/>
               </a:ext>
             </a:extLst>
           </p:cNvPr>
@@ -9442,7 +10128,7 @@
           <p:cNvPr id="6147" name="备注占位符 2">
             <a:extLst>
               <a:ext uri="{FF2B5EF4-FFF2-40B4-BE49-F238E27FC236}">
-                <a16:creationId xmlns:a16="http://schemas.microsoft.com/office/drawing/2014/main" xmlns="" id="{7D16C196-D24B-4BE0-AE74-D44907B2A1B1}"/>
+                <a16:creationId xmlns="" xmlns:a16="http://schemas.microsoft.com/office/drawing/2014/main" id="{7D16C196-D24B-4BE0-AE74-D44907B2A1B1}"/>
               </a:ext>
             </a:extLst>
           </p:cNvPr>
@@ -9497,7 +10183,7 @@
           <p:cNvPr id="6148" name="灯片编号占位符 3">
             <a:extLst>
               <a:ext uri="{FF2B5EF4-FFF2-40B4-BE49-F238E27FC236}">
-                <a16:creationId xmlns:a16="http://schemas.microsoft.com/office/drawing/2014/main" xmlns="" id="{D230392C-ED50-49C3-93A6-10868BF6DADE}"/>
+                <a16:creationId xmlns="" xmlns:a16="http://schemas.microsoft.com/office/drawing/2014/main" id="{D230392C-ED50-49C3-93A6-10868BF6DADE}"/>
               </a:ext>
             </a:extLst>
           </p:cNvPr>
@@ -9747,7 +10433,7 @@
           <p:cNvPr id="6146" name="幻灯片图像占位符 1">
             <a:extLst>
               <a:ext uri="{FF2B5EF4-FFF2-40B4-BE49-F238E27FC236}">
-                <a16:creationId xmlns:a16="http://schemas.microsoft.com/office/drawing/2014/main" xmlns="" id="{4908B133-C54F-400F-8F70-355C57C0BE11}"/>
+                <a16:creationId xmlns="" xmlns:a16="http://schemas.microsoft.com/office/drawing/2014/main" id="{4908B133-C54F-400F-8F70-355C57C0BE11}"/>
               </a:ext>
             </a:extLst>
           </p:cNvPr>
@@ -9784,7 +10470,7 @@
           <p:cNvPr id="6147" name="备注占位符 2">
             <a:extLst>
               <a:ext uri="{FF2B5EF4-FFF2-40B4-BE49-F238E27FC236}">
-                <a16:creationId xmlns:a16="http://schemas.microsoft.com/office/drawing/2014/main" xmlns="" id="{7D16C196-D24B-4BE0-AE74-D44907B2A1B1}"/>
+                <a16:creationId xmlns="" xmlns:a16="http://schemas.microsoft.com/office/drawing/2014/main" id="{7D16C196-D24B-4BE0-AE74-D44907B2A1B1}"/>
               </a:ext>
             </a:extLst>
           </p:cNvPr>
@@ -9839,7 +10525,7 @@
           <p:cNvPr id="6148" name="灯片编号占位符 3">
             <a:extLst>
               <a:ext uri="{FF2B5EF4-FFF2-40B4-BE49-F238E27FC236}">
-                <a16:creationId xmlns:a16="http://schemas.microsoft.com/office/drawing/2014/main" xmlns="" id="{D230392C-ED50-49C3-93A6-10868BF6DADE}"/>
+                <a16:creationId xmlns="" xmlns:a16="http://schemas.microsoft.com/office/drawing/2014/main" id="{D230392C-ED50-49C3-93A6-10868BF6DADE}"/>
               </a:ext>
             </a:extLst>
           </p:cNvPr>
@@ -10089,7 +10775,7 @@
           <p:cNvPr id="2" name="标题 1">
             <a:extLst>
               <a:ext uri="{FF2B5EF4-FFF2-40B4-BE49-F238E27FC236}">
-                <a16:creationId xmlns:a16="http://schemas.microsoft.com/office/drawing/2014/main" xmlns="" id="{558AFC1F-0EC5-49BF-9268-F0FEE4B60F85}"/>
+                <a16:creationId xmlns="" xmlns:a16="http://schemas.microsoft.com/office/drawing/2014/main" id="{558AFC1F-0EC5-49BF-9268-F0FEE4B60F85}"/>
               </a:ext>
             </a:extLst>
           </p:cNvPr>
@@ -10126,7 +10812,7 @@
           <p:cNvPr id="3" name="副标题 2">
             <a:extLst>
               <a:ext uri="{FF2B5EF4-FFF2-40B4-BE49-F238E27FC236}">
-                <a16:creationId xmlns:a16="http://schemas.microsoft.com/office/drawing/2014/main" xmlns="" id="{411F25FC-AA7A-420B-9A3A-84ECEF4013AF}"/>
+                <a16:creationId xmlns="" xmlns:a16="http://schemas.microsoft.com/office/drawing/2014/main" id="{411F25FC-AA7A-420B-9A3A-84ECEF4013AF}"/>
               </a:ext>
             </a:extLst>
           </p:cNvPr>
@@ -10196,7 +10882,7 @@
           <p:cNvPr id="4" name="Rectangle 4">
             <a:extLst>
               <a:ext uri="{FF2B5EF4-FFF2-40B4-BE49-F238E27FC236}">
-                <a16:creationId xmlns:a16="http://schemas.microsoft.com/office/drawing/2014/main" xmlns="" id="{892DDA44-EBAA-4B0D-B1AD-17FC12E24344}"/>
+                <a16:creationId xmlns="" xmlns:a16="http://schemas.microsoft.com/office/drawing/2014/main" id="{892DDA44-EBAA-4B0D-B1AD-17FC12E24344}"/>
               </a:ext>
             </a:extLst>
           </p:cNvPr>
@@ -10230,7 +10916,7 @@
           <p:cNvPr id="5" name="Rectangle 5">
             <a:extLst>
               <a:ext uri="{FF2B5EF4-FFF2-40B4-BE49-F238E27FC236}">
-                <a16:creationId xmlns:a16="http://schemas.microsoft.com/office/drawing/2014/main" xmlns="" id="{59A68DBD-F8D1-4CAE-ACF1-A66E61D864F9}"/>
+                <a16:creationId xmlns="" xmlns:a16="http://schemas.microsoft.com/office/drawing/2014/main" id="{59A68DBD-F8D1-4CAE-ACF1-A66E61D864F9}"/>
               </a:ext>
             </a:extLst>
           </p:cNvPr>
@@ -10264,7 +10950,7 @@
           <p:cNvPr id="6" name="Rectangle 6">
             <a:extLst>
               <a:ext uri="{FF2B5EF4-FFF2-40B4-BE49-F238E27FC236}">
-                <a16:creationId xmlns:a16="http://schemas.microsoft.com/office/drawing/2014/main" xmlns="" id="{A406CACD-345F-48D9-9536-018A859493C9}"/>
+                <a16:creationId xmlns="" xmlns:a16="http://schemas.microsoft.com/office/drawing/2014/main" id="{A406CACD-345F-48D9-9536-018A859493C9}"/>
               </a:ext>
             </a:extLst>
           </p:cNvPr>
@@ -10335,7 +11021,7 @@
           <p:cNvPr id="2" name="标题 1">
             <a:extLst>
               <a:ext uri="{FF2B5EF4-FFF2-40B4-BE49-F238E27FC236}">
-                <a16:creationId xmlns:a16="http://schemas.microsoft.com/office/drawing/2014/main" xmlns="" id="{413EF4AD-90B9-4E2D-B48C-D5D41ADC00B1}"/>
+                <a16:creationId xmlns="" xmlns:a16="http://schemas.microsoft.com/office/drawing/2014/main" id="{413EF4AD-90B9-4E2D-B48C-D5D41ADC00B1}"/>
               </a:ext>
             </a:extLst>
           </p:cNvPr>
@@ -10363,7 +11049,7 @@
           <p:cNvPr id="3" name="竖排文字占位符 2">
             <a:extLst>
               <a:ext uri="{FF2B5EF4-FFF2-40B4-BE49-F238E27FC236}">
-                <a16:creationId xmlns:a16="http://schemas.microsoft.com/office/drawing/2014/main" xmlns="" id="{2935463B-296C-4D20-B55D-237CE160497F}"/>
+                <a16:creationId xmlns="" xmlns:a16="http://schemas.microsoft.com/office/drawing/2014/main" id="{2935463B-296C-4D20-B55D-237CE160497F}"/>
               </a:ext>
             </a:extLst>
           </p:cNvPr>
@@ -10420,7 +11106,7 @@
           <p:cNvPr id="4" name="Rectangle 4">
             <a:extLst>
               <a:ext uri="{FF2B5EF4-FFF2-40B4-BE49-F238E27FC236}">
-                <a16:creationId xmlns:a16="http://schemas.microsoft.com/office/drawing/2014/main" xmlns="" id="{1572E583-F505-4444-906F-8206A9EE7F1E}"/>
+                <a16:creationId xmlns="" xmlns:a16="http://schemas.microsoft.com/office/drawing/2014/main" id="{1572E583-F505-4444-906F-8206A9EE7F1E}"/>
               </a:ext>
             </a:extLst>
           </p:cNvPr>
@@ -10454,7 +11140,7 @@
           <p:cNvPr id="5" name="Rectangle 5">
             <a:extLst>
               <a:ext uri="{FF2B5EF4-FFF2-40B4-BE49-F238E27FC236}">
-                <a16:creationId xmlns:a16="http://schemas.microsoft.com/office/drawing/2014/main" xmlns="" id="{59D895F1-9DF8-48A9-9C6A-3A7AC93DF390}"/>
+                <a16:creationId xmlns="" xmlns:a16="http://schemas.microsoft.com/office/drawing/2014/main" id="{59D895F1-9DF8-48A9-9C6A-3A7AC93DF390}"/>
               </a:ext>
             </a:extLst>
           </p:cNvPr>
@@ -10488,7 +11174,7 @@
           <p:cNvPr id="6" name="Rectangle 6">
             <a:extLst>
               <a:ext uri="{FF2B5EF4-FFF2-40B4-BE49-F238E27FC236}">
-                <a16:creationId xmlns:a16="http://schemas.microsoft.com/office/drawing/2014/main" xmlns="" id="{291603C0-AEEF-495C-84B8-A97B75DBDA95}"/>
+                <a16:creationId xmlns="" xmlns:a16="http://schemas.microsoft.com/office/drawing/2014/main" id="{291603C0-AEEF-495C-84B8-A97B75DBDA95}"/>
               </a:ext>
             </a:extLst>
           </p:cNvPr>
@@ -10559,7 +11245,7 @@
           <p:cNvPr id="2" name="竖排标题 1">
             <a:extLst>
               <a:ext uri="{FF2B5EF4-FFF2-40B4-BE49-F238E27FC236}">
-                <a16:creationId xmlns:a16="http://schemas.microsoft.com/office/drawing/2014/main" xmlns="" id="{5C3D78EF-5EF5-478D-8576-1606D3C29178}"/>
+                <a16:creationId xmlns="" xmlns:a16="http://schemas.microsoft.com/office/drawing/2014/main" id="{5C3D78EF-5EF5-478D-8576-1606D3C29178}"/>
               </a:ext>
             </a:extLst>
           </p:cNvPr>
@@ -10592,7 +11278,7 @@
           <p:cNvPr id="3" name="竖排文字占位符 2">
             <a:extLst>
               <a:ext uri="{FF2B5EF4-FFF2-40B4-BE49-F238E27FC236}">
-                <a16:creationId xmlns:a16="http://schemas.microsoft.com/office/drawing/2014/main" xmlns="" id="{4DCD9F3D-20DB-4182-AD70-C533BC393EB5}"/>
+                <a16:creationId xmlns="" xmlns:a16="http://schemas.microsoft.com/office/drawing/2014/main" id="{4DCD9F3D-20DB-4182-AD70-C533BC393EB5}"/>
               </a:ext>
             </a:extLst>
           </p:cNvPr>
@@ -10654,7 +11340,7 @@
           <p:cNvPr id="4" name="Rectangle 4">
             <a:extLst>
               <a:ext uri="{FF2B5EF4-FFF2-40B4-BE49-F238E27FC236}">
-                <a16:creationId xmlns:a16="http://schemas.microsoft.com/office/drawing/2014/main" xmlns="" id="{80FCF88E-129A-43F9-90EC-1AB558A2726C}"/>
+                <a16:creationId xmlns="" xmlns:a16="http://schemas.microsoft.com/office/drawing/2014/main" id="{80FCF88E-129A-43F9-90EC-1AB558A2726C}"/>
               </a:ext>
             </a:extLst>
           </p:cNvPr>
@@ -10688,7 +11374,7 @@
           <p:cNvPr id="5" name="Rectangle 5">
             <a:extLst>
               <a:ext uri="{FF2B5EF4-FFF2-40B4-BE49-F238E27FC236}">
-                <a16:creationId xmlns:a16="http://schemas.microsoft.com/office/drawing/2014/main" xmlns="" id="{3124BE14-18C5-46A6-8BD5-794314EF816D}"/>
+                <a16:creationId xmlns="" xmlns:a16="http://schemas.microsoft.com/office/drawing/2014/main" id="{3124BE14-18C5-46A6-8BD5-794314EF816D}"/>
               </a:ext>
             </a:extLst>
           </p:cNvPr>
@@ -10722,7 +11408,7 @@
           <p:cNvPr id="6" name="Rectangle 6">
             <a:extLst>
               <a:ext uri="{FF2B5EF4-FFF2-40B4-BE49-F238E27FC236}">
-                <a16:creationId xmlns:a16="http://schemas.microsoft.com/office/drawing/2014/main" xmlns="" id="{597D6CFD-B5D7-46E4-8617-4E9947427CAF}"/>
+                <a16:creationId xmlns="" xmlns:a16="http://schemas.microsoft.com/office/drawing/2014/main" id="{597D6CFD-B5D7-46E4-8617-4E9947427CAF}"/>
               </a:ext>
             </a:extLst>
           </p:cNvPr>
@@ -10793,7 +11479,7 @@
           <p:cNvPr id="2" name="标题 1">
             <a:extLst>
               <a:ext uri="{FF2B5EF4-FFF2-40B4-BE49-F238E27FC236}">
-                <a16:creationId xmlns:a16="http://schemas.microsoft.com/office/drawing/2014/main" xmlns="" id="{79C7DECC-98E6-4FD9-AAA2-12B4A61F95C6}"/>
+                <a16:creationId xmlns="" xmlns:a16="http://schemas.microsoft.com/office/drawing/2014/main" id="{79C7DECC-98E6-4FD9-AAA2-12B4A61F95C6}"/>
               </a:ext>
             </a:extLst>
           </p:cNvPr>
@@ -10821,7 +11507,7 @@
           <p:cNvPr id="3" name="内容占位符 2">
             <a:extLst>
               <a:ext uri="{FF2B5EF4-FFF2-40B4-BE49-F238E27FC236}">
-                <a16:creationId xmlns:a16="http://schemas.microsoft.com/office/drawing/2014/main" xmlns="" id="{2DFFF49D-5346-4472-B7B4-2B4B12070C2F}"/>
+                <a16:creationId xmlns="" xmlns:a16="http://schemas.microsoft.com/office/drawing/2014/main" id="{2DFFF49D-5346-4472-B7B4-2B4B12070C2F}"/>
               </a:ext>
             </a:extLst>
           </p:cNvPr>
@@ -10878,7 +11564,7 @@
           <p:cNvPr id="4" name="Rectangle 4">
             <a:extLst>
               <a:ext uri="{FF2B5EF4-FFF2-40B4-BE49-F238E27FC236}">
-                <a16:creationId xmlns:a16="http://schemas.microsoft.com/office/drawing/2014/main" xmlns="" id="{3AE54C17-8281-4CEE-80BD-30C4F778807C}"/>
+                <a16:creationId xmlns="" xmlns:a16="http://schemas.microsoft.com/office/drawing/2014/main" id="{3AE54C17-8281-4CEE-80BD-30C4F778807C}"/>
               </a:ext>
             </a:extLst>
           </p:cNvPr>
@@ -10912,7 +11598,7 @@
           <p:cNvPr id="5" name="Rectangle 5">
             <a:extLst>
               <a:ext uri="{FF2B5EF4-FFF2-40B4-BE49-F238E27FC236}">
-                <a16:creationId xmlns:a16="http://schemas.microsoft.com/office/drawing/2014/main" xmlns="" id="{AA5AD5C1-CA4D-49A1-9F23-7E5608819125}"/>
+                <a16:creationId xmlns="" xmlns:a16="http://schemas.microsoft.com/office/drawing/2014/main" id="{AA5AD5C1-CA4D-49A1-9F23-7E5608819125}"/>
               </a:ext>
             </a:extLst>
           </p:cNvPr>
@@ -10946,7 +11632,7 @@
           <p:cNvPr id="6" name="Rectangle 6">
             <a:extLst>
               <a:ext uri="{FF2B5EF4-FFF2-40B4-BE49-F238E27FC236}">
-                <a16:creationId xmlns:a16="http://schemas.microsoft.com/office/drawing/2014/main" xmlns="" id="{89EA5E6E-1878-4876-87FC-34CF0D7DC10A}"/>
+                <a16:creationId xmlns="" xmlns:a16="http://schemas.microsoft.com/office/drawing/2014/main" id="{89EA5E6E-1878-4876-87FC-34CF0D7DC10A}"/>
               </a:ext>
             </a:extLst>
           </p:cNvPr>
@@ -11032,7 +11718,7 @@
           <p:cNvPr id="2" name="标题 1">
             <a:extLst>
               <a:ext uri="{FF2B5EF4-FFF2-40B4-BE49-F238E27FC236}">
-                <a16:creationId xmlns:a16="http://schemas.microsoft.com/office/drawing/2014/main" xmlns="" id="{D1C66AC4-7745-487C-B77E-D7209402F8D3}"/>
+                <a16:creationId xmlns="" xmlns:a16="http://schemas.microsoft.com/office/drawing/2014/main" id="{D1C66AC4-7745-487C-B77E-D7209402F8D3}"/>
               </a:ext>
             </a:extLst>
           </p:cNvPr>
@@ -11069,7 +11755,7 @@
           <p:cNvPr id="3" name="文本占位符 2">
             <a:extLst>
               <a:ext uri="{FF2B5EF4-FFF2-40B4-BE49-F238E27FC236}">
-                <a16:creationId xmlns:a16="http://schemas.microsoft.com/office/drawing/2014/main" xmlns="" id="{F0642504-C3D3-4FEB-932D-43E152422788}"/>
+                <a16:creationId xmlns="" xmlns:a16="http://schemas.microsoft.com/office/drawing/2014/main" id="{F0642504-C3D3-4FEB-932D-43E152422788}"/>
               </a:ext>
             </a:extLst>
           </p:cNvPr>
@@ -11140,7 +11826,7 @@
           <p:cNvPr id="4" name="Rectangle 4">
             <a:extLst>
               <a:ext uri="{FF2B5EF4-FFF2-40B4-BE49-F238E27FC236}">
-                <a16:creationId xmlns:a16="http://schemas.microsoft.com/office/drawing/2014/main" xmlns="" id="{1FDDD93F-F324-4F9A-B9D4-6849A4C3DA30}"/>
+                <a16:creationId xmlns="" xmlns:a16="http://schemas.microsoft.com/office/drawing/2014/main" id="{1FDDD93F-F324-4F9A-B9D4-6849A4C3DA30}"/>
               </a:ext>
             </a:extLst>
           </p:cNvPr>
@@ -11174,7 +11860,7 @@
           <p:cNvPr id="5" name="Rectangle 5">
             <a:extLst>
               <a:ext uri="{FF2B5EF4-FFF2-40B4-BE49-F238E27FC236}">
-                <a16:creationId xmlns:a16="http://schemas.microsoft.com/office/drawing/2014/main" xmlns="" id="{58D17B65-E136-4CDA-8948-06EE82F4BCF9}"/>
+                <a16:creationId xmlns="" xmlns:a16="http://schemas.microsoft.com/office/drawing/2014/main" id="{58D17B65-E136-4CDA-8948-06EE82F4BCF9}"/>
               </a:ext>
             </a:extLst>
           </p:cNvPr>
@@ -11208,7 +11894,7 @@
           <p:cNvPr id="6" name="Rectangle 6">
             <a:extLst>
               <a:ext uri="{FF2B5EF4-FFF2-40B4-BE49-F238E27FC236}">
-                <a16:creationId xmlns:a16="http://schemas.microsoft.com/office/drawing/2014/main" xmlns="" id="{D7125560-B1D6-4FEA-8C81-81F49D4763C4}"/>
+                <a16:creationId xmlns="" xmlns:a16="http://schemas.microsoft.com/office/drawing/2014/main" id="{D7125560-B1D6-4FEA-8C81-81F49D4763C4}"/>
               </a:ext>
             </a:extLst>
           </p:cNvPr>
@@ -11279,7 +11965,7 @@
           <p:cNvPr id="2" name="标题 1">
             <a:extLst>
               <a:ext uri="{FF2B5EF4-FFF2-40B4-BE49-F238E27FC236}">
-                <a16:creationId xmlns:a16="http://schemas.microsoft.com/office/drawing/2014/main" xmlns="" id="{235DD831-5C92-41D8-B2A4-F735B961D24C}"/>
+                <a16:creationId xmlns="" xmlns:a16="http://schemas.microsoft.com/office/drawing/2014/main" id="{235DD831-5C92-41D8-B2A4-F735B961D24C}"/>
               </a:ext>
             </a:extLst>
           </p:cNvPr>
@@ -11307,7 +11993,7 @@
           <p:cNvPr id="3" name="内容占位符 2">
             <a:extLst>
               <a:ext uri="{FF2B5EF4-FFF2-40B4-BE49-F238E27FC236}">
-                <a16:creationId xmlns:a16="http://schemas.microsoft.com/office/drawing/2014/main" xmlns="" id="{40589EF3-2B1D-4F74-90F9-1600D88D274F}"/>
+                <a16:creationId xmlns="" xmlns:a16="http://schemas.microsoft.com/office/drawing/2014/main" id="{40589EF3-2B1D-4F74-90F9-1600D88D274F}"/>
               </a:ext>
             </a:extLst>
           </p:cNvPr>
@@ -11369,7 +12055,7 @@
           <p:cNvPr id="4" name="内容占位符 3">
             <a:extLst>
               <a:ext uri="{FF2B5EF4-FFF2-40B4-BE49-F238E27FC236}">
-                <a16:creationId xmlns:a16="http://schemas.microsoft.com/office/drawing/2014/main" xmlns="" id="{31894757-41E5-4DC3-B486-BF0D8D2E3B3C}"/>
+                <a16:creationId xmlns="" xmlns:a16="http://schemas.microsoft.com/office/drawing/2014/main" id="{31894757-41E5-4DC3-B486-BF0D8D2E3B3C}"/>
               </a:ext>
             </a:extLst>
           </p:cNvPr>
@@ -11431,7 +12117,7 @@
           <p:cNvPr id="5" name="Rectangle 4">
             <a:extLst>
               <a:ext uri="{FF2B5EF4-FFF2-40B4-BE49-F238E27FC236}">
-                <a16:creationId xmlns:a16="http://schemas.microsoft.com/office/drawing/2014/main" xmlns="" id="{80B46424-4DF5-42C6-BA6D-7A5F0843E639}"/>
+                <a16:creationId xmlns="" xmlns:a16="http://schemas.microsoft.com/office/drawing/2014/main" id="{80B46424-4DF5-42C6-BA6D-7A5F0843E639}"/>
               </a:ext>
             </a:extLst>
           </p:cNvPr>
@@ -11465,7 +12151,7 @@
           <p:cNvPr id="6" name="Rectangle 5">
             <a:extLst>
               <a:ext uri="{FF2B5EF4-FFF2-40B4-BE49-F238E27FC236}">
-                <a16:creationId xmlns:a16="http://schemas.microsoft.com/office/drawing/2014/main" xmlns="" id="{54C6D9C2-78B1-4830-B70B-68D245CB3988}"/>
+                <a16:creationId xmlns="" xmlns:a16="http://schemas.microsoft.com/office/drawing/2014/main" id="{54C6D9C2-78B1-4830-B70B-68D245CB3988}"/>
               </a:ext>
             </a:extLst>
           </p:cNvPr>
@@ -11499,7 +12185,7 @@
           <p:cNvPr id="7" name="Rectangle 6">
             <a:extLst>
               <a:ext uri="{FF2B5EF4-FFF2-40B4-BE49-F238E27FC236}">
-                <a16:creationId xmlns:a16="http://schemas.microsoft.com/office/drawing/2014/main" xmlns="" id="{7C8F0C60-8AC6-4F0E-B049-CFBBD780349C}"/>
+                <a16:creationId xmlns="" xmlns:a16="http://schemas.microsoft.com/office/drawing/2014/main" id="{7C8F0C60-8AC6-4F0E-B049-CFBBD780349C}"/>
               </a:ext>
             </a:extLst>
           </p:cNvPr>
@@ -11570,7 +12256,7 @@
           <p:cNvPr id="2" name="标题 1">
             <a:extLst>
               <a:ext uri="{FF2B5EF4-FFF2-40B4-BE49-F238E27FC236}">
-                <a16:creationId xmlns:a16="http://schemas.microsoft.com/office/drawing/2014/main" xmlns="" id="{5EAC2349-C79E-4DAD-A7EC-F121B92EABC6}"/>
+                <a16:creationId xmlns="" xmlns:a16="http://schemas.microsoft.com/office/drawing/2014/main" id="{5EAC2349-C79E-4DAD-A7EC-F121B92EABC6}"/>
               </a:ext>
             </a:extLst>
           </p:cNvPr>
@@ -11603,7 +12289,7 @@
           <p:cNvPr id="3" name="文本占位符 2">
             <a:extLst>
               <a:ext uri="{FF2B5EF4-FFF2-40B4-BE49-F238E27FC236}">
-                <a16:creationId xmlns:a16="http://schemas.microsoft.com/office/drawing/2014/main" xmlns="" id="{6577C8D4-D6FA-4BC8-982E-A569EF349637}"/>
+                <a16:creationId xmlns="" xmlns:a16="http://schemas.microsoft.com/office/drawing/2014/main" id="{6577C8D4-D6FA-4BC8-982E-A569EF349637}"/>
               </a:ext>
             </a:extLst>
           </p:cNvPr>
@@ -11674,7 +12360,7 @@
           <p:cNvPr id="4" name="内容占位符 3">
             <a:extLst>
               <a:ext uri="{FF2B5EF4-FFF2-40B4-BE49-F238E27FC236}">
-                <a16:creationId xmlns:a16="http://schemas.microsoft.com/office/drawing/2014/main" xmlns="" id="{2C1BD52F-78B6-4701-9C21-05A4842E2948}"/>
+                <a16:creationId xmlns="" xmlns:a16="http://schemas.microsoft.com/office/drawing/2014/main" id="{2C1BD52F-78B6-4701-9C21-05A4842E2948}"/>
               </a:ext>
             </a:extLst>
           </p:cNvPr>
@@ -11736,7 +12422,7 @@
           <p:cNvPr id="5" name="文本占位符 4">
             <a:extLst>
               <a:ext uri="{FF2B5EF4-FFF2-40B4-BE49-F238E27FC236}">
-                <a16:creationId xmlns:a16="http://schemas.microsoft.com/office/drawing/2014/main" xmlns="" id="{41B5E117-E18D-486E-BBF0-E55E36688CE9}"/>
+                <a16:creationId xmlns="" xmlns:a16="http://schemas.microsoft.com/office/drawing/2014/main" id="{41B5E117-E18D-486E-BBF0-E55E36688CE9}"/>
               </a:ext>
             </a:extLst>
           </p:cNvPr>
@@ -11807,7 +12493,7 @@
           <p:cNvPr id="6" name="内容占位符 5">
             <a:extLst>
               <a:ext uri="{FF2B5EF4-FFF2-40B4-BE49-F238E27FC236}">
-                <a16:creationId xmlns:a16="http://schemas.microsoft.com/office/drawing/2014/main" xmlns="" id="{1A6184B9-916F-4A62-BB58-A9E1721165AE}"/>
+                <a16:creationId xmlns="" xmlns:a16="http://schemas.microsoft.com/office/drawing/2014/main" id="{1A6184B9-916F-4A62-BB58-A9E1721165AE}"/>
               </a:ext>
             </a:extLst>
           </p:cNvPr>
@@ -11869,7 +12555,7 @@
           <p:cNvPr id="7" name="Rectangle 4">
             <a:extLst>
               <a:ext uri="{FF2B5EF4-FFF2-40B4-BE49-F238E27FC236}">
-                <a16:creationId xmlns:a16="http://schemas.microsoft.com/office/drawing/2014/main" xmlns="" id="{9BDEFA24-1BB9-4A63-BE04-B2CD6F8BC7CD}"/>
+                <a16:creationId xmlns="" xmlns:a16="http://schemas.microsoft.com/office/drawing/2014/main" id="{9BDEFA24-1BB9-4A63-BE04-B2CD6F8BC7CD}"/>
               </a:ext>
             </a:extLst>
           </p:cNvPr>
@@ -11903,7 +12589,7 @@
           <p:cNvPr id="8" name="Rectangle 5">
             <a:extLst>
               <a:ext uri="{FF2B5EF4-FFF2-40B4-BE49-F238E27FC236}">
-                <a16:creationId xmlns:a16="http://schemas.microsoft.com/office/drawing/2014/main" xmlns="" id="{291227B2-68B3-4699-A416-5C0E6B364CA1}"/>
+                <a16:creationId xmlns="" xmlns:a16="http://schemas.microsoft.com/office/drawing/2014/main" id="{291227B2-68B3-4699-A416-5C0E6B364CA1}"/>
               </a:ext>
             </a:extLst>
           </p:cNvPr>
@@ -11937,7 +12623,7 @@
           <p:cNvPr id="9" name="Rectangle 6">
             <a:extLst>
               <a:ext uri="{FF2B5EF4-FFF2-40B4-BE49-F238E27FC236}">
-                <a16:creationId xmlns:a16="http://schemas.microsoft.com/office/drawing/2014/main" xmlns="" id="{DEC7A77C-9158-4F27-8F28-4C65512DA59A}"/>
+                <a16:creationId xmlns="" xmlns:a16="http://schemas.microsoft.com/office/drawing/2014/main" id="{DEC7A77C-9158-4F27-8F28-4C65512DA59A}"/>
               </a:ext>
             </a:extLst>
           </p:cNvPr>
@@ -12008,7 +12694,7 @@
           <p:cNvPr id="2" name="标题 1">
             <a:extLst>
               <a:ext uri="{FF2B5EF4-FFF2-40B4-BE49-F238E27FC236}">
-                <a16:creationId xmlns:a16="http://schemas.microsoft.com/office/drawing/2014/main" xmlns="" id="{2BC76C51-0028-4F2D-A216-4D11F5334867}"/>
+                <a16:creationId xmlns="" xmlns:a16="http://schemas.microsoft.com/office/drawing/2014/main" id="{2BC76C51-0028-4F2D-A216-4D11F5334867}"/>
               </a:ext>
             </a:extLst>
           </p:cNvPr>
@@ -12036,7 +12722,7 @@
           <p:cNvPr id="3" name="Rectangle 4">
             <a:extLst>
               <a:ext uri="{FF2B5EF4-FFF2-40B4-BE49-F238E27FC236}">
-                <a16:creationId xmlns:a16="http://schemas.microsoft.com/office/drawing/2014/main" xmlns="" id="{91CC3BF1-A404-4E2C-8AA3-99428C6F6DD8}"/>
+                <a16:creationId xmlns="" xmlns:a16="http://schemas.microsoft.com/office/drawing/2014/main" id="{91CC3BF1-A404-4E2C-8AA3-99428C6F6DD8}"/>
               </a:ext>
             </a:extLst>
           </p:cNvPr>
@@ -12070,7 +12756,7 @@
           <p:cNvPr id="4" name="Rectangle 5">
             <a:extLst>
               <a:ext uri="{FF2B5EF4-FFF2-40B4-BE49-F238E27FC236}">
-                <a16:creationId xmlns:a16="http://schemas.microsoft.com/office/drawing/2014/main" xmlns="" id="{B7D80654-FEB6-4772-9441-0475550AB2E7}"/>
+                <a16:creationId xmlns="" xmlns:a16="http://schemas.microsoft.com/office/drawing/2014/main" id="{B7D80654-FEB6-4772-9441-0475550AB2E7}"/>
               </a:ext>
             </a:extLst>
           </p:cNvPr>
@@ -12104,7 +12790,7 @@
           <p:cNvPr id="5" name="Rectangle 6">
             <a:extLst>
               <a:ext uri="{FF2B5EF4-FFF2-40B4-BE49-F238E27FC236}">
-                <a16:creationId xmlns:a16="http://schemas.microsoft.com/office/drawing/2014/main" xmlns="" id="{968FB6E6-FDEC-4041-BA77-FFA3A3FA254C}"/>
+                <a16:creationId xmlns="" xmlns:a16="http://schemas.microsoft.com/office/drawing/2014/main" id="{968FB6E6-FDEC-4041-BA77-FFA3A3FA254C}"/>
               </a:ext>
             </a:extLst>
           </p:cNvPr>
@@ -12175,7 +12861,7 @@
           <p:cNvPr id="2" name="Rectangle 4">
             <a:extLst>
               <a:ext uri="{FF2B5EF4-FFF2-40B4-BE49-F238E27FC236}">
-                <a16:creationId xmlns:a16="http://schemas.microsoft.com/office/drawing/2014/main" xmlns="" id="{6DC56CB5-95F7-41B4-8677-E12EBE1FBD59}"/>
+                <a16:creationId xmlns="" xmlns:a16="http://schemas.microsoft.com/office/drawing/2014/main" id="{6DC56CB5-95F7-41B4-8677-E12EBE1FBD59}"/>
               </a:ext>
             </a:extLst>
           </p:cNvPr>
@@ -12209,7 +12895,7 @@
           <p:cNvPr id="3" name="Rectangle 5">
             <a:extLst>
               <a:ext uri="{FF2B5EF4-FFF2-40B4-BE49-F238E27FC236}">
-                <a16:creationId xmlns:a16="http://schemas.microsoft.com/office/drawing/2014/main" xmlns="" id="{B7F0A7C5-5870-4D46-AA35-704A0D3C8668}"/>
+                <a16:creationId xmlns="" xmlns:a16="http://schemas.microsoft.com/office/drawing/2014/main" id="{B7F0A7C5-5870-4D46-AA35-704A0D3C8668}"/>
               </a:ext>
             </a:extLst>
           </p:cNvPr>
@@ -12243,7 +12929,7 @@
           <p:cNvPr id="4" name="Rectangle 6">
             <a:extLst>
               <a:ext uri="{FF2B5EF4-FFF2-40B4-BE49-F238E27FC236}">
-                <a16:creationId xmlns:a16="http://schemas.microsoft.com/office/drawing/2014/main" xmlns="" id="{11F62A78-2485-4514-AD6F-798D74A4E024}"/>
+                <a16:creationId xmlns="" xmlns:a16="http://schemas.microsoft.com/office/drawing/2014/main" id="{11F62A78-2485-4514-AD6F-798D74A4E024}"/>
               </a:ext>
             </a:extLst>
           </p:cNvPr>
@@ -12314,7 +13000,7 @@
           <p:cNvPr id="2" name="标题 1">
             <a:extLst>
               <a:ext uri="{FF2B5EF4-FFF2-40B4-BE49-F238E27FC236}">
-                <a16:creationId xmlns:a16="http://schemas.microsoft.com/office/drawing/2014/main" xmlns="" id="{0BD92CCA-0140-4241-AF84-A0DFC0FC9C4C}"/>
+                <a16:creationId xmlns="" xmlns:a16="http://schemas.microsoft.com/office/drawing/2014/main" id="{0BD92CCA-0140-4241-AF84-A0DFC0FC9C4C}"/>
               </a:ext>
             </a:extLst>
           </p:cNvPr>
@@ -12351,7 +13037,7 @@
           <p:cNvPr id="3" name="内容占位符 2">
             <a:extLst>
               <a:ext uri="{FF2B5EF4-FFF2-40B4-BE49-F238E27FC236}">
-                <a16:creationId xmlns:a16="http://schemas.microsoft.com/office/drawing/2014/main" xmlns="" id="{B149F413-03E0-42C8-96F2-A26C380EC64D}"/>
+                <a16:creationId xmlns="" xmlns:a16="http://schemas.microsoft.com/office/drawing/2014/main" id="{B149F413-03E0-42C8-96F2-A26C380EC64D}"/>
               </a:ext>
             </a:extLst>
           </p:cNvPr>
@@ -12441,7 +13127,7 @@
           <p:cNvPr id="4" name="文本占位符 3">
             <a:extLst>
               <a:ext uri="{FF2B5EF4-FFF2-40B4-BE49-F238E27FC236}">
-                <a16:creationId xmlns:a16="http://schemas.microsoft.com/office/drawing/2014/main" xmlns="" id="{80CED1CF-0137-4B94-B04B-8FDCB7C8B161}"/>
+                <a16:creationId xmlns="" xmlns:a16="http://schemas.microsoft.com/office/drawing/2014/main" id="{80CED1CF-0137-4B94-B04B-8FDCB7C8B161}"/>
               </a:ext>
             </a:extLst>
           </p:cNvPr>
@@ -12512,7 +13198,7 @@
           <p:cNvPr id="5" name="Rectangle 4">
             <a:extLst>
               <a:ext uri="{FF2B5EF4-FFF2-40B4-BE49-F238E27FC236}">
-                <a16:creationId xmlns:a16="http://schemas.microsoft.com/office/drawing/2014/main" xmlns="" id="{83A028F8-90C5-4894-9D68-1F454A6818EB}"/>
+                <a16:creationId xmlns="" xmlns:a16="http://schemas.microsoft.com/office/drawing/2014/main" id="{83A028F8-90C5-4894-9D68-1F454A6818EB}"/>
               </a:ext>
             </a:extLst>
           </p:cNvPr>
@@ -12546,7 +13232,7 @@
           <p:cNvPr id="6" name="Rectangle 5">
             <a:extLst>
               <a:ext uri="{FF2B5EF4-FFF2-40B4-BE49-F238E27FC236}">
-                <a16:creationId xmlns:a16="http://schemas.microsoft.com/office/drawing/2014/main" xmlns="" id="{4B6B0556-8025-49EB-A9D8-E82F10331C3C}"/>
+                <a16:creationId xmlns="" xmlns:a16="http://schemas.microsoft.com/office/drawing/2014/main" id="{4B6B0556-8025-49EB-A9D8-E82F10331C3C}"/>
               </a:ext>
             </a:extLst>
           </p:cNvPr>
@@ -12580,7 +13266,7 @@
           <p:cNvPr id="7" name="Rectangle 6">
             <a:extLst>
               <a:ext uri="{FF2B5EF4-FFF2-40B4-BE49-F238E27FC236}">
-                <a16:creationId xmlns:a16="http://schemas.microsoft.com/office/drawing/2014/main" xmlns="" id="{327CC8F1-4BD0-4FEC-AECB-DEAE8BCBA203}"/>
+                <a16:creationId xmlns="" xmlns:a16="http://schemas.microsoft.com/office/drawing/2014/main" id="{327CC8F1-4BD0-4FEC-AECB-DEAE8BCBA203}"/>
               </a:ext>
             </a:extLst>
           </p:cNvPr>
@@ -12651,7 +13337,7 @@
           <p:cNvPr id="2" name="标题 1">
             <a:extLst>
               <a:ext uri="{FF2B5EF4-FFF2-40B4-BE49-F238E27FC236}">
-                <a16:creationId xmlns:a16="http://schemas.microsoft.com/office/drawing/2014/main" xmlns="" id="{71EFFC16-3EB0-4FBB-96E7-A6D46DBE0860}"/>
+                <a16:creationId xmlns="" xmlns:a16="http://schemas.microsoft.com/office/drawing/2014/main" id="{71EFFC16-3EB0-4FBB-96E7-A6D46DBE0860}"/>
               </a:ext>
             </a:extLst>
           </p:cNvPr>
@@ -12688,7 +13374,7 @@
           <p:cNvPr id="3" name="图片占位符 2">
             <a:extLst>
               <a:ext uri="{FF2B5EF4-FFF2-40B4-BE49-F238E27FC236}">
-                <a16:creationId xmlns:a16="http://schemas.microsoft.com/office/drawing/2014/main" xmlns="" id="{5B422F93-2D7C-4C8D-98F2-E969A8987B29}"/>
+                <a16:creationId xmlns="" xmlns:a16="http://schemas.microsoft.com/office/drawing/2014/main" id="{5B422F93-2D7C-4C8D-98F2-E969A8987B29}"/>
               </a:ext>
             </a:extLst>
           </p:cNvPr>
@@ -12756,7 +13442,7 @@
           <p:cNvPr id="4" name="文本占位符 3">
             <a:extLst>
               <a:ext uri="{FF2B5EF4-FFF2-40B4-BE49-F238E27FC236}">
-                <a16:creationId xmlns:a16="http://schemas.microsoft.com/office/drawing/2014/main" xmlns="" id="{C6BF88C8-E1D1-4529-AA38-9722474E4E30}"/>
+                <a16:creationId xmlns="" xmlns:a16="http://schemas.microsoft.com/office/drawing/2014/main" id="{C6BF88C8-E1D1-4529-AA38-9722474E4E30}"/>
               </a:ext>
             </a:extLst>
           </p:cNvPr>
@@ -12827,7 +13513,7 @@
           <p:cNvPr id="5" name="Rectangle 4">
             <a:extLst>
               <a:ext uri="{FF2B5EF4-FFF2-40B4-BE49-F238E27FC236}">
-                <a16:creationId xmlns:a16="http://schemas.microsoft.com/office/drawing/2014/main" xmlns="" id="{8A92ADD1-D1E1-4FA7-89F9-EAC168EC5F5E}"/>
+                <a16:creationId xmlns="" xmlns:a16="http://schemas.microsoft.com/office/drawing/2014/main" id="{8A92ADD1-D1E1-4FA7-89F9-EAC168EC5F5E}"/>
               </a:ext>
             </a:extLst>
           </p:cNvPr>
@@ -12861,7 +13547,7 @@
           <p:cNvPr id="6" name="Rectangle 5">
             <a:extLst>
               <a:ext uri="{FF2B5EF4-FFF2-40B4-BE49-F238E27FC236}">
-                <a16:creationId xmlns:a16="http://schemas.microsoft.com/office/drawing/2014/main" xmlns="" id="{8AC2AA6A-2DDF-4129-A813-17A48D5D6578}"/>
+                <a16:creationId xmlns="" xmlns:a16="http://schemas.microsoft.com/office/drawing/2014/main" id="{8AC2AA6A-2DDF-4129-A813-17A48D5D6578}"/>
               </a:ext>
             </a:extLst>
           </p:cNvPr>
@@ -12895,7 +13581,7 @@
           <p:cNvPr id="7" name="Rectangle 6">
             <a:extLst>
               <a:ext uri="{FF2B5EF4-FFF2-40B4-BE49-F238E27FC236}">
-                <a16:creationId xmlns:a16="http://schemas.microsoft.com/office/drawing/2014/main" xmlns="" id="{AFAB14F8-8064-48F6-8B6D-749183531730}"/>
+                <a16:creationId xmlns="" xmlns:a16="http://schemas.microsoft.com/office/drawing/2014/main" id="{AFAB14F8-8064-48F6-8B6D-749183531730}"/>
               </a:ext>
             </a:extLst>
           </p:cNvPr>
@@ -12978,7 +13664,7 @@
           <p:cNvPr id="1026" name="Rectangle 2">
             <a:extLst>
               <a:ext uri="{FF2B5EF4-FFF2-40B4-BE49-F238E27FC236}">
-                <a16:creationId xmlns:a16="http://schemas.microsoft.com/office/drawing/2014/main" xmlns="" id="{80EF2504-E3EA-4812-BCE9-548B5A526130}"/>
+                <a16:creationId xmlns="" xmlns:a16="http://schemas.microsoft.com/office/drawing/2014/main" id="{80EF2504-E3EA-4812-BCE9-548B5A526130}"/>
               </a:ext>
             </a:extLst>
           </p:cNvPr>
@@ -13052,7 +13738,7 @@
           <p:cNvPr id="1027" name="Rectangle 3">
             <a:extLst>
               <a:ext uri="{FF2B5EF4-FFF2-40B4-BE49-F238E27FC236}">
-                <a16:creationId xmlns:a16="http://schemas.microsoft.com/office/drawing/2014/main" xmlns="" id="{7E888592-4D67-4FDC-8ACC-8DD192CAF425}"/>
+                <a16:creationId xmlns="" xmlns:a16="http://schemas.microsoft.com/office/drawing/2014/main" id="{7E888592-4D67-4FDC-8ACC-8DD192CAF425}"/>
               </a:ext>
             </a:extLst>
           </p:cNvPr>
@@ -13154,7 +13840,7 @@
           <p:cNvPr id="1028" name="Rectangle 4">
             <a:extLst>
               <a:ext uri="{FF2B5EF4-FFF2-40B4-BE49-F238E27FC236}">
-                <a16:creationId xmlns:a16="http://schemas.microsoft.com/office/drawing/2014/main" xmlns="" id="{40A3712E-94B2-46ED-881D-E1249EF279C0}"/>
+                <a16:creationId xmlns="" xmlns:a16="http://schemas.microsoft.com/office/drawing/2014/main" id="{40A3712E-94B2-46ED-881D-E1249EF279C0}"/>
               </a:ext>
             </a:extLst>
           </p:cNvPr>
@@ -13231,7 +13917,7 @@
           <p:cNvPr id="1029" name="Rectangle 5">
             <a:extLst>
               <a:ext uri="{FF2B5EF4-FFF2-40B4-BE49-F238E27FC236}">
-                <a16:creationId xmlns:a16="http://schemas.microsoft.com/office/drawing/2014/main" xmlns="" id="{26116D60-C064-41BB-B932-09348EA6EB7D}"/>
+                <a16:creationId xmlns="" xmlns:a16="http://schemas.microsoft.com/office/drawing/2014/main" id="{26116D60-C064-41BB-B932-09348EA6EB7D}"/>
               </a:ext>
             </a:extLst>
           </p:cNvPr>
@@ -13308,7 +13994,7 @@
           <p:cNvPr id="1030" name="Rectangle 6">
             <a:extLst>
               <a:ext uri="{FF2B5EF4-FFF2-40B4-BE49-F238E27FC236}">
-                <a16:creationId xmlns:a16="http://schemas.microsoft.com/office/drawing/2014/main" xmlns="" id="{4E6E49BE-DB26-4C77-94F7-5228E224DF48}"/>
+                <a16:creationId xmlns="" xmlns:a16="http://schemas.microsoft.com/office/drawing/2014/main" id="{4E6E49BE-DB26-4C77-94F7-5228E224DF48}"/>
               </a:ext>
             </a:extLst>
           </p:cNvPr>
@@ -13427,17 +14113,7 @@
                 <a:latin typeface="Times New Roman" panose="02020603050405020304" pitchFamily="18" charset="0"/>
                 <a:cs typeface="Times New Roman" panose="02020603050405020304" pitchFamily="18" charset="0"/>
               </a:rPr>
-              <a:t>: </a:t>
-            </a:r>
-            <a:r>
-              <a:rPr lang="en-US" altLang="zh-CN" dirty="0" smtClean="0">
-                <a:solidFill>
-                  <a:schemeClr val="bg1"/>
-                </a:solidFill>
-                <a:latin typeface="Times New Roman" panose="02020603050405020304" pitchFamily="18" charset="0"/>
-                <a:cs typeface="Times New Roman" panose="02020603050405020304" pitchFamily="18" charset="0"/>
-              </a:rPr>
-              <a:t>Networking Abstractions for </a:t>
+              <a:t>: Networking Abstractions for </a:t>
             </a:r>
             <a:r>
               <a:rPr lang="en-US" altLang="zh-CN" baseline="0" dirty="0" smtClean="0">
@@ -13908,7 +14584,7 @@
           <p:cNvPr id="5122" name="标题 1">
             <a:extLst>
               <a:ext uri="{FF2B5EF4-FFF2-40B4-BE49-F238E27FC236}">
-                <a16:creationId xmlns:a16="http://schemas.microsoft.com/office/drawing/2014/main" xmlns="" id="{A237414D-C4E1-407F-9B0D-585D2D878A74}"/>
+                <a16:creationId xmlns="" xmlns:a16="http://schemas.microsoft.com/office/drawing/2014/main" id="{A237414D-C4E1-407F-9B0D-585D2D878A74}"/>
               </a:ext>
             </a:extLst>
           </p:cNvPr>
@@ -13989,7 +14665,7 @@
           <p:cNvPr id="3" name="内容占位符 2">
             <a:extLst>
               <a:ext uri="{FF2B5EF4-FFF2-40B4-BE49-F238E27FC236}">
-                <a16:creationId xmlns:a16="http://schemas.microsoft.com/office/drawing/2014/main" xmlns="" id="{3DFD56C3-3B63-4F4C-A455-80D220434928}"/>
+                <a16:creationId xmlns="" xmlns:a16="http://schemas.microsoft.com/office/drawing/2014/main" id="{3DFD56C3-3B63-4F4C-A455-80D220434928}"/>
               </a:ext>
             </a:extLst>
           </p:cNvPr>
@@ -14140,7 +14816,7 @@
           <p:cNvPr id="4" name="内容占位符 2">
             <a:extLst>
               <a:ext uri="{FF2B5EF4-FFF2-40B4-BE49-F238E27FC236}">
-                <a16:creationId xmlns:a16="http://schemas.microsoft.com/office/drawing/2014/main" xmlns="" id="{3DFD56C3-3B63-4F4C-A455-80D220434928}"/>
+                <a16:creationId xmlns="" xmlns:a16="http://schemas.microsoft.com/office/drawing/2014/main" id="{3DFD56C3-3B63-4F4C-A455-80D220434928}"/>
               </a:ext>
             </a:extLst>
           </p:cNvPr>
@@ -14475,7 +15151,7 @@
           <p:cNvPr id="5122" name="标题 1">
             <a:extLst>
               <a:ext uri="{FF2B5EF4-FFF2-40B4-BE49-F238E27FC236}">
-                <a16:creationId xmlns:a16="http://schemas.microsoft.com/office/drawing/2014/main" xmlns="" id="{A237414D-C4E1-407F-9B0D-585D2D878A74}"/>
+                <a16:creationId xmlns="" xmlns:a16="http://schemas.microsoft.com/office/drawing/2014/main" id="{A237414D-C4E1-407F-9B0D-585D2D878A74}"/>
               </a:ext>
             </a:extLst>
           </p:cNvPr>
@@ -14515,7 +15191,7 @@
           <p:cNvPr id="3" name="内容占位符 2">
             <a:extLst>
               <a:ext uri="{FF2B5EF4-FFF2-40B4-BE49-F238E27FC236}">
-                <a16:creationId xmlns:a16="http://schemas.microsoft.com/office/drawing/2014/main" xmlns="" id="{3DFD56C3-3B63-4F4C-A455-80D220434928}"/>
+                <a16:creationId xmlns="" xmlns:a16="http://schemas.microsoft.com/office/drawing/2014/main" id="{3DFD56C3-3B63-4F4C-A455-80D220434928}"/>
               </a:ext>
             </a:extLst>
           </p:cNvPr>
@@ -14591,14 +15267,7 @@
                 <a:latin typeface="Times New Roman" panose="02020603050405020304" pitchFamily="18" charset="0"/>
                 <a:cs typeface="Times New Roman" panose="02020603050405020304" pitchFamily="18" charset="0"/>
               </a:rPr>
-              <a:t> </a:t>
-            </a:r>
-            <a:r>
-              <a:rPr lang="en-US" altLang="zh-CN" b="1" dirty="0" smtClean="0">
-                <a:latin typeface="Times New Roman" panose="02020603050405020304" pitchFamily="18" charset="0"/>
-                <a:cs typeface="Times New Roman" panose="02020603050405020304" pitchFamily="18" charset="0"/>
-              </a:rPr>
-              <a:t>Design</a:t>
+              <a:t> Design</a:t>
             </a:r>
             <a:endParaRPr lang="en-US" altLang="zh-CN" b="1" dirty="0">
               <a:latin typeface="Times New Roman" panose="02020603050405020304" pitchFamily="18" charset="0"/>
@@ -14898,7 +15567,7 @@
           <p:cNvPr id="5122" name="标题 1">
             <a:extLst>
               <a:ext uri="{FF2B5EF4-FFF2-40B4-BE49-F238E27FC236}">
-                <a16:creationId xmlns:a16="http://schemas.microsoft.com/office/drawing/2014/main" xmlns="" id="{A237414D-C4E1-407F-9B0D-585D2D878A74}"/>
+                <a16:creationId xmlns="" xmlns:a16="http://schemas.microsoft.com/office/drawing/2014/main" id="{A237414D-C4E1-407F-9B0D-585D2D878A74}"/>
               </a:ext>
             </a:extLst>
           </p:cNvPr>
@@ -14938,7 +15607,7 @@
           <p:cNvPr id="3" name="内容占位符 2">
             <a:extLst>
               <a:ext uri="{FF2B5EF4-FFF2-40B4-BE49-F238E27FC236}">
-                <a16:creationId xmlns:a16="http://schemas.microsoft.com/office/drawing/2014/main" xmlns="" id="{3DFD56C3-3B63-4F4C-A455-80D220434928}"/>
+                <a16:creationId xmlns="" xmlns:a16="http://schemas.microsoft.com/office/drawing/2014/main" id="{3DFD56C3-3B63-4F4C-A455-80D220434928}"/>
               </a:ext>
             </a:extLst>
           </p:cNvPr>
@@ -15261,7 +15930,7 @@
           <p:cNvPr id="5122" name="标题 1">
             <a:extLst>
               <a:ext uri="{FF2B5EF4-FFF2-40B4-BE49-F238E27FC236}">
-                <a16:creationId xmlns:a16="http://schemas.microsoft.com/office/drawing/2014/main" xmlns="" id="{A237414D-C4E1-407F-9B0D-585D2D878A74}"/>
+                <a16:creationId xmlns="" xmlns:a16="http://schemas.microsoft.com/office/drawing/2014/main" id="{A237414D-C4E1-407F-9B0D-585D2D878A74}"/>
               </a:ext>
             </a:extLst>
           </p:cNvPr>
@@ -15301,7 +15970,7 @@
           <p:cNvPr id="3" name="内容占位符 2">
             <a:extLst>
               <a:ext uri="{FF2B5EF4-FFF2-40B4-BE49-F238E27FC236}">
-                <a16:creationId xmlns:a16="http://schemas.microsoft.com/office/drawing/2014/main" xmlns="" id="{3DFD56C3-3B63-4F4C-A455-80D220434928}"/>
+                <a16:creationId xmlns="" xmlns:a16="http://schemas.microsoft.com/office/drawing/2014/main" id="{3DFD56C3-3B63-4F4C-A455-80D220434928}"/>
               </a:ext>
             </a:extLst>
           </p:cNvPr>
@@ -15598,7 +16267,7 @@
           <p:cNvPr id="5122" name="标题 1">
             <a:extLst>
               <a:ext uri="{FF2B5EF4-FFF2-40B4-BE49-F238E27FC236}">
-                <a16:creationId xmlns:a16="http://schemas.microsoft.com/office/drawing/2014/main" xmlns="" id="{A237414D-C4E1-407F-9B0D-585D2D878A74}"/>
+                <a16:creationId xmlns="" xmlns:a16="http://schemas.microsoft.com/office/drawing/2014/main" id="{A237414D-C4E1-407F-9B0D-585D2D878A74}"/>
               </a:ext>
             </a:extLst>
           </p:cNvPr>
@@ -15638,7 +16307,7 @@
           <p:cNvPr id="3" name="内容占位符 2">
             <a:extLst>
               <a:ext uri="{FF2B5EF4-FFF2-40B4-BE49-F238E27FC236}">
-                <a16:creationId xmlns:a16="http://schemas.microsoft.com/office/drawing/2014/main" xmlns="" id="{3DFD56C3-3B63-4F4C-A455-80D220434928}"/>
+                <a16:creationId xmlns="" xmlns:a16="http://schemas.microsoft.com/office/drawing/2014/main" id="{3DFD56C3-3B63-4F4C-A455-80D220434928}"/>
               </a:ext>
             </a:extLst>
           </p:cNvPr>
@@ -15889,7 +16558,7 @@
           <p:cNvPr id="5122" name="标题 1">
             <a:extLst>
               <a:ext uri="{FF2B5EF4-FFF2-40B4-BE49-F238E27FC236}">
-                <a16:creationId xmlns:a16="http://schemas.microsoft.com/office/drawing/2014/main" xmlns="" id="{A237414D-C4E1-407F-9B0D-585D2D878A74}"/>
+                <a16:creationId xmlns="" xmlns:a16="http://schemas.microsoft.com/office/drawing/2014/main" id="{A237414D-C4E1-407F-9B0D-585D2D878A74}"/>
               </a:ext>
             </a:extLst>
           </p:cNvPr>
@@ -15929,7 +16598,7 @@
           <p:cNvPr id="3" name="内容占位符 2">
             <a:extLst>
               <a:ext uri="{FF2B5EF4-FFF2-40B4-BE49-F238E27FC236}">
-                <a16:creationId xmlns:a16="http://schemas.microsoft.com/office/drawing/2014/main" xmlns="" id="{3DFD56C3-3B63-4F4C-A455-80D220434928}"/>
+                <a16:creationId xmlns="" xmlns:a16="http://schemas.microsoft.com/office/drawing/2014/main" id="{3DFD56C3-3B63-4F4C-A455-80D220434928}"/>
               </a:ext>
             </a:extLst>
           </p:cNvPr>
@@ -16005,14 +16674,7 @@
                 <a:latin typeface="Times New Roman" panose="02020603050405020304" pitchFamily="18" charset="0"/>
                 <a:cs typeface="Times New Roman" panose="02020603050405020304" pitchFamily="18" charset="0"/>
               </a:rPr>
-              <a:t> </a:t>
-            </a:r>
-            <a:r>
-              <a:rPr lang="en-US" altLang="zh-CN" b="1" dirty="0" smtClean="0">
-                <a:latin typeface="Times New Roman" panose="02020603050405020304" pitchFamily="18" charset="0"/>
-                <a:cs typeface="Times New Roman" panose="02020603050405020304" pitchFamily="18" charset="0"/>
-              </a:rPr>
-              <a:t>Design</a:t>
+              <a:t> Design</a:t>
             </a:r>
             <a:endParaRPr lang="en-US" altLang="zh-CN" b="1" dirty="0">
               <a:latin typeface="Times New Roman" panose="02020603050405020304" pitchFamily="18" charset="0"/>
@@ -16312,7 +16974,7 @@
           <p:cNvPr id="5122" name="标题 1">
             <a:extLst>
               <a:ext uri="{FF2B5EF4-FFF2-40B4-BE49-F238E27FC236}">
-                <a16:creationId xmlns:a16="http://schemas.microsoft.com/office/drawing/2014/main" xmlns="" id="{A237414D-C4E1-407F-9B0D-585D2D878A74}"/>
+                <a16:creationId xmlns="" xmlns:a16="http://schemas.microsoft.com/office/drawing/2014/main" id="{A237414D-C4E1-407F-9B0D-585D2D878A74}"/>
               </a:ext>
             </a:extLst>
           </p:cNvPr>
@@ -16348,7 +17010,7 @@
           <p:cNvPr id="3" name="内容占位符 2">
             <a:extLst>
               <a:ext uri="{FF2B5EF4-FFF2-40B4-BE49-F238E27FC236}">
-                <a16:creationId xmlns:a16="http://schemas.microsoft.com/office/drawing/2014/main" xmlns="" id="{3DFD56C3-3B63-4F4C-A455-80D220434928}"/>
+                <a16:creationId xmlns="" xmlns:a16="http://schemas.microsoft.com/office/drawing/2014/main" id="{3DFD56C3-3B63-4F4C-A455-80D220434928}"/>
               </a:ext>
             </a:extLst>
           </p:cNvPr>
@@ -16548,14 +17210,7 @@
                 <a:latin typeface="Times New Roman" panose="02020603050405020304" pitchFamily="18" charset="0"/>
                 <a:cs typeface="Times New Roman" panose="02020603050405020304" pitchFamily="18" charset="0"/>
               </a:rPr>
-              <a:t> </a:t>
-            </a:r>
-            <a:r>
-              <a:rPr lang="en-US" altLang="zh-CN" dirty="0" smtClean="0">
-                <a:latin typeface="Times New Roman" panose="02020603050405020304" pitchFamily="18" charset="0"/>
-                <a:cs typeface="Times New Roman" panose="02020603050405020304" pitchFamily="18" charset="0"/>
-              </a:rPr>
-              <a:t>aims to support </a:t>
+              <a:t> aims to support </a:t>
             </a:r>
             <a:r>
               <a:rPr lang="en-US" altLang="zh-CN" b="1" dirty="0" smtClean="0">
@@ -16648,7 +17303,7 @@
           <p:cNvPr id="5122" name="标题 1">
             <a:extLst>
               <a:ext uri="{FF2B5EF4-FFF2-40B4-BE49-F238E27FC236}">
-                <a16:creationId xmlns:a16="http://schemas.microsoft.com/office/drawing/2014/main" xmlns="" id="{A237414D-C4E1-407F-9B0D-585D2D878A74}"/>
+                <a16:creationId xmlns="" xmlns:a16="http://schemas.microsoft.com/office/drawing/2014/main" id="{A237414D-C4E1-407F-9B0D-585D2D878A74}"/>
               </a:ext>
             </a:extLst>
           </p:cNvPr>
@@ -16684,7 +17339,7 @@
           <p:cNvPr id="3" name="内容占位符 2">
             <a:extLst>
               <a:ext uri="{FF2B5EF4-FFF2-40B4-BE49-F238E27FC236}">
-                <a16:creationId xmlns:a16="http://schemas.microsoft.com/office/drawing/2014/main" xmlns="" id="{3DFD56C3-3B63-4F4C-A455-80D220434928}"/>
+                <a16:creationId xmlns="" xmlns:a16="http://schemas.microsoft.com/office/drawing/2014/main" id="{3DFD56C3-3B63-4F4C-A455-80D220434928}"/>
               </a:ext>
             </a:extLst>
           </p:cNvPr>
@@ -17192,7 +17847,7 @@
           <p:spPr>
             <a:xfrm>
               <a:off x="9542714" y="3131416"/>
-              <a:ext cx="2575395" cy="1897784"/>
+              <a:ext cx="2575395" cy="1980080"/>
             </a:xfrm>
             <a:prstGeom prst="roundRect">
               <a:avLst/>
@@ -17226,6 +17881,16 @@
             <a:p>
               <a:pPr algn="ctr"/>
               <a:r>
+                <a:rPr lang="en-US" altLang="zh-CN" dirty="0" smtClean="0">
+                  <a:solidFill>
+                    <a:srgbClr val="FF0000"/>
+                  </a:solidFill>
+                  <a:latin typeface="Times New Roman" panose="02020603050405020304" pitchFamily="18" charset="0"/>
+                  <a:cs typeface="Times New Roman" panose="02020603050405020304" pitchFamily="18" charset="0"/>
+                </a:rPr>
+                <a:t>Daemon architecture: It </a:t>
+              </a:r>
+              <a:r>
                 <a:rPr lang="en-US" altLang="zh-CN" dirty="0">
                   <a:solidFill>
                     <a:srgbClr val="FF0000"/>
@@ -17233,7 +17898,7 @@
                   <a:latin typeface="Times New Roman" panose="02020603050405020304" pitchFamily="18" charset="0"/>
                   <a:cs typeface="Times New Roman" panose="02020603050405020304" pitchFamily="18" charset="0"/>
                 </a:rPr>
-                <a:t>It is our hope that this model will make the computational</a:t>
+                <a:t>is our hope that this model will make the computational</a:t>
               </a:r>
             </a:p>
             <a:p>
@@ -17246,7 +17911,17 @@
                   <a:latin typeface="Times New Roman" panose="02020603050405020304" pitchFamily="18" charset="0"/>
                   <a:cs typeface="Times New Roman" panose="02020603050405020304" pitchFamily="18" charset="0"/>
                 </a:rPr>
-                <a:t>power of GPUs more easily accessible to networked services</a:t>
+                <a:t>power of GPUs more easily accessible to networked </a:t>
+              </a:r>
+              <a:r>
+                <a:rPr lang="en-US" altLang="zh-CN" dirty="0" smtClean="0">
+                  <a:solidFill>
+                    <a:srgbClr val="FF0000"/>
+                  </a:solidFill>
+                  <a:latin typeface="Times New Roman" panose="02020603050405020304" pitchFamily="18" charset="0"/>
+                  <a:cs typeface="Times New Roman" panose="02020603050405020304" pitchFamily="18" charset="0"/>
+                </a:rPr>
+                <a:t>services.</a:t>
               </a:r>
               <a:endParaRPr lang="zh-CN" altLang="en-US" dirty="0">
                 <a:solidFill>
@@ -17269,7 +17944,7 @@
           <p:spPr>
             <a:xfrm>
               <a:off x="9216921" y="3994071"/>
-              <a:ext cx="325793" cy="86237"/>
+              <a:ext cx="325793" cy="127385"/>
             </a:xfrm>
             <a:prstGeom prst="straightConnector1">
               <a:avLst/>
@@ -17580,7 +18255,424 @@
           <p:cNvPr id="5122" name="标题 1">
             <a:extLst>
               <a:ext uri="{FF2B5EF4-FFF2-40B4-BE49-F238E27FC236}">
-                <a16:creationId xmlns:a16="http://schemas.microsoft.com/office/drawing/2014/main" xmlns="" id="{A237414D-C4E1-407F-9B0D-585D2D878A74}"/>
+                <a16:creationId xmlns="" xmlns:a16="http://schemas.microsoft.com/office/drawing/2014/main" id="{A237414D-C4E1-407F-9B0D-585D2D878A74}"/>
+              </a:ext>
+            </a:extLst>
+          </p:cNvPr>
+          <p:cNvSpPr>
+            <a:spLocks noGrp="1"/>
+          </p:cNvSpPr>
+          <p:nvPr>
+            <p:ph type="title"/>
+          </p:nvPr>
+        </p:nvSpPr>
+        <p:spPr>
+          <a:xfrm>
+            <a:off x="624417" y="1109091"/>
+            <a:ext cx="10972800" cy="849042"/>
+          </a:xfrm>
+        </p:spPr>
+        <p:txBody>
+          <a:bodyPr/>
+          <a:lstStyle/>
+          <a:p>
+            <a:r>
+              <a:rPr lang="en-US" altLang="zh-CN" dirty="0" smtClean="0">
+                <a:latin typeface="Times New Roman" panose="02020603050405020304" pitchFamily="18" charset="0"/>
+                <a:cs typeface="Times New Roman" panose="02020603050405020304" pitchFamily="18" charset="0"/>
+              </a:rPr>
+              <a:t>Design Considerations</a:t>
+            </a:r>
+            <a:endParaRPr lang="en-US" altLang="zh-CN" dirty="0">
+              <a:latin typeface="Times New Roman" panose="02020603050405020304" pitchFamily="18" charset="0"/>
+              <a:cs typeface="Times New Roman" panose="02020603050405020304" pitchFamily="18" charset="0"/>
+            </a:endParaRPr>
+          </a:p>
+        </p:txBody>
+      </p:sp>
+      <p:sp>
+        <p:nvSpPr>
+          <p:cNvPr id="7" name="灯片编号占位符 6"/>
+          <p:cNvSpPr>
+            <a:spLocks noGrp="1"/>
+          </p:cNvSpPr>
+          <p:nvPr>
+            <p:ph type="sldNum" sz="quarter" idx="12"/>
+          </p:nvPr>
+        </p:nvSpPr>
+        <p:spPr/>
+        <p:txBody>
+          <a:bodyPr/>
+          <a:lstStyle/>
+          <a:p>
+            <a:pPr>
+              <a:defRPr/>
+            </a:pPr>
+            <a:fld id="{2B61CBCD-6AEA-4E03-89F5-67AC013F5D05}" type="slidenum">
+              <a:rPr lang="en-US" altLang="zh-CN" smtClean="0"/>
+              <a:pPr>
+                <a:defRPr/>
+              </a:pPr>
+              <a:t>17</a:t>
+            </a:fld>
+            <a:endParaRPr lang="en-US" altLang="zh-CN" dirty="0"/>
+          </a:p>
+        </p:txBody>
+      </p:sp>
+      <p:sp>
+        <p:nvSpPr>
+          <p:cNvPr id="3" name="内容占位符 2"/>
+          <p:cNvSpPr>
+            <a:spLocks noGrp="1"/>
+          </p:cNvSpPr>
+          <p:nvPr>
+            <p:ph idx="1"/>
+          </p:nvPr>
+        </p:nvSpPr>
+        <p:spPr>
+          <a:xfrm>
+            <a:off x="624417" y="2194297"/>
+            <a:ext cx="10972800" cy="3849688"/>
+          </a:xfrm>
+        </p:spPr>
+        <p:txBody>
+          <a:bodyPr/>
+          <a:lstStyle/>
+          <a:p>
+            <a:r>
+              <a:rPr lang="en-US" altLang="zh-CN" dirty="0" smtClean="0">
+                <a:latin typeface="Times New Roman" panose="02020603050405020304" pitchFamily="18" charset="0"/>
+                <a:cs typeface="Times New Roman" panose="02020603050405020304" pitchFamily="18" charset="0"/>
+              </a:rPr>
+              <a:t>Two Architecture of </a:t>
+            </a:r>
+            <a:r>
+              <a:rPr lang="en-US" altLang="zh-CN" dirty="0" err="1" smtClean="0">
+                <a:latin typeface="Times New Roman" panose="02020603050405020304" pitchFamily="18" charset="0"/>
+                <a:cs typeface="Times New Roman" panose="02020603050405020304" pitchFamily="18" charset="0"/>
+              </a:rPr>
+              <a:t>GPUnet</a:t>
+            </a:r>
+            <a:endParaRPr lang="en-US" altLang="zh-CN" dirty="0" smtClean="0">
+              <a:latin typeface="Times New Roman" panose="02020603050405020304" pitchFamily="18" charset="0"/>
+              <a:cs typeface="Times New Roman" panose="02020603050405020304" pitchFamily="18" charset="0"/>
+            </a:endParaRPr>
+          </a:p>
+          <a:p>
+            <a:pPr lvl="1"/>
+            <a:r>
+              <a:rPr lang="en-US" altLang="zh-CN" dirty="0">
+                <a:latin typeface="Times New Roman" panose="02020603050405020304" pitchFamily="18" charset="0"/>
+                <a:cs typeface="Times New Roman" panose="02020603050405020304" pitchFamily="18" charset="0"/>
+              </a:rPr>
+              <a:t> daemon </a:t>
+            </a:r>
+            <a:r>
+              <a:rPr lang="en-US" altLang="zh-CN" dirty="0" smtClean="0">
+                <a:latin typeface="Times New Roman" panose="02020603050405020304" pitchFamily="18" charset="0"/>
+                <a:cs typeface="Times New Roman" panose="02020603050405020304" pitchFamily="18" charset="0"/>
+              </a:rPr>
+              <a:t>architecture</a:t>
+            </a:r>
+          </a:p>
+          <a:p>
+            <a:pPr lvl="2"/>
+            <a:r>
+              <a:rPr lang="en-US" altLang="zh-CN" dirty="0" err="1">
+                <a:latin typeface="Times New Roman" panose="02020603050405020304" pitchFamily="18" charset="0"/>
+                <a:cs typeface="Times New Roman" panose="02020603050405020304" pitchFamily="18" charset="0"/>
+              </a:rPr>
+              <a:t>GPUnet</a:t>
+            </a:r>
+            <a:r>
+              <a:rPr lang="en-US" altLang="zh-CN" dirty="0">
+                <a:latin typeface="Times New Roman" panose="02020603050405020304" pitchFamily="18" charset="0"/>
+                <a:cs typeface="Times New Roman" panose="02020603050405020304" pitchFamily="18" charset="0"/>
+              </a:rPr>
+              <a:t> makes it possible for </a:t>
+            </a:r>
+            <a:r>
+              <a:rPr lang="en-US" altLang="zh-CN" dirty="0">
+                <a:solidFill>
+                  <a:srgbClr val="FF0000"/>
+                </a:solidFill>
+                <a:latin typeface="Times New Roman" panose="02020603050405020304" pitchFamily="18" charset="0"/>
+                <a:cs typeface="Times New Roman" panose="02020603050405020304" pitchFamily="18" charset="0"/>
+              </a:rPr>
+              <a:t>GPU servers </a:t>
+            </a:r>
+            <a:r>
+              <a:rPr lang="en-US" altLang="zh-CN" dirty="0">
+                <a:latin typeface="Times New Roman" panose="02020603050405020304" pitchFamily="18" charset="0"/>
+                <a:cs typeface="Times New Roman" panose="02020603050405020304" pitchFamily="18" charset="0"/>
+              </a:rPr>
+              <a:t>to </a:t>
+            </a:r>
+            <a:r>
+              <a:rPr lang="en-US" altLang="zh-CN" dirty="0">
+                <a:solidFill>
+                  <a:srgbClr val="7030A0"/>
+                </a:solidFill>
+                <a:latin typeface="Times New Roman" panose="02020603050405020304" pitchFamily="18" charset="0"/>
+                <a:cs typeface="Times New Roman" panose="02020603050405020304" pitchFamily="18" charset="0"/>
+              </a:rPr>
+              <a:t>handle</a:t>
+            </a:r>
+            <a:r>
+              <a:rPr lang="en-US" altLang="zh-CN" dirty="0">
+                <a:latin typeface="Times New Roman" panose="02020603050405020304" pitchFamily="18" charset="0"/>
+                <a:cs typeface="Times New Roman" panose="02020603050405020304" pitchFamily="18" charset="0"/>
+              </a:rPr>
+              <a:t> multiple </a:t>
+            </a:r>
+            <a:r>
+              <a:rPr lang="en-US" altLang="zh-CN" dirty="0">
+                <a:solidFill>
+                  <a:srgbClr val="FF0000"/>
+                </a:solidFill>
+                <a:latin typeface="Times New Roman" panose="02020603050405020304" pitchFamily="18" charset="0"/>
+                <a:cs typeface="Times New Roman" panose="02020603050405020304" pitchFamily="18" charset="0"/>
+              </a:rPr>
+              <a:t>independent </a:t>
+            </a:r>
+            <a:r>
+              <a:rPr lang="en-US" altLang="zh-CN" dirty="0" smtClean="0">
+                <a:solidFill>
+                  <a:srgbClr val="FF0000"/>
+                </a:solidFill>
+                <a:latin typeface="Times New Roman" panose="02020603050405020304" pitchFamily="18" charset="0"/>
+                <a:cs typeface="Times New Roman" panose="02020603050405020304" pitchFamily="18" charset="0"/>
+              </a:rPr>
+              <a:t>requests</a:t>
+            </a:r>
+            <a:r>
+              <a:rPr lang="en-US" altLang="zh-CN" dirty="0" smtClean="0">
+                <a:latin typeface="Times New Roman" panose="02020603050405020304" pitchFamily="18" charset="0"/>
+                <a:cs typeface="Times New Roman" panose="02020603050405020304" pitchFamily="18" charset="0"/>
+              </a:rPr>
+              <a:t> without </a:t>
+            </a:r>
+            <a:r>
+              <a:rPr lang="en-US" altLang="zh-CN" dirty="0">
+                <a:latin typeface="Times New Roman" panose="02020603050405020304" pitchFamily="18" charset="0"/>
+                <a:cs typeface="Times New Roman" panose="02020603050405020304" pitchFamily="18" charset="0"/>
+              </a:rPr>
+              <a:t>having to batch them first (far right in Figure 2), much like multitasking </a:t>
+            </a:r>
+            <a:r>
+              <a:rPr lang="en-US" altLang="zh-CN" dirty="0" smtClean="0">
+                <a:latin typeface="Times New Roman" panose="02020603050405020304" pitchFamily="18" charset="0"/>
+                <a:cs typeface="Times New Roman" panose="02020603050405020304" pitchFamily="18" charset="0"/>
+              </a:rPr>
+              <a:t>in multicore </a:t>
+            </a:r>
+            <a:r>
+              <a:rPr lang="en-US" altLang="zh-CN" dirty="0">
+                <a:latin typeface="Times New Roman" panose="02020603050405020304" pitchFamily="18" charset="0"/>
+                <a:cs typeface="Times New Roman" panose="02020603050405020304" pitchFamily="18" charset="0"/>
+              </a:rPr>
+              <a:t>CPUs. </a:t>
+            </a:r>
+            <a:endParaRPr lang="en-US" altLang="zh-CN" dirty="0" smtClean="0">
+              <a:latin typeface="Times New Roman" panose="02020603050405020304" pitchFamily="18" charset="0"/>
+              <a:cs typeface="Times New Roman" panose="02020603050405020304" pitchFamily="18" charset="0"/>
+            </a:endParaRPr>
+          </a:p>
+          <a:p>
+            <a:pPr lvl="1"/>
+            <a:r>
+              <a:rPr lang="en-US" altLang="zh-CN" dirty="0" smtClean="0">
+                <a:latin typeface="Times New Roman" panose="02020603050405020304" pitchFamily="18" charset="0"/>
+                <a:cs typeface="Times New Roman" panose="02020603050405020304" pitchFamily="18" charset="0"/>
+              </a:rPr>
+              <a:t>Independent architecture</a:t>
+            </a:r>
+          </a:p>
+          <a:p>
+            <a:pPr lvl="2"/>
+            <a:r>
+              <a:rPr lang="en-US" altLang="zh-CN" dirty="0">
+                <a:latin typeface="Times New Roman" panose="02020603050405020304" pitchFamily="18" charset="0"/>
+                <a:cs typeface="Times New Roman" panose="02020603050405020304" pitchFamily="18" charset="0"/>
+              </a:rPr>
+              <a:t>It is also possible </a:t>
+            </a:r>
+            <a:r>
+              <a:rPr lang="en-US" altLang="zh-CN" dirty="0" smtClean="0">
+                <a:latin typeface="Times New Roman" panose="02020603050405020304" pitchFamily="18" charset="0"/>
+                <a:cs typeface="Times New Roman" panose="02020603050405020304" pitchFamily="18" charset="0"/>
+              </a:rPr>
+              <a:t>to have </a:t>
+            </a:r>
+            <a:r>
+              <a:rPr lang="en-US" altLang="zh-CN" dirty="0">
+                <a:latin typeface="Times New Roman" panose="02020603050405020304" pitchFamily="18" charset="0"/>
+                <a:cs typeface="Times New Roman" panose="02020603050405020304" pitchFamily="18" charset="0"/>
+              </a:rPr>
+              <a:t>a </a:t>
+            </a:r>
+            <a:r>
+              <a:rPr lang="en-US" altLang="zh-CN" dirty="0" err="1">
+                <a:latin typeface="Times New Roman" panose="02020603050405020304" pitchFamily="18" charset="0"/>
+                <a:cs typeface="Times New Roman" panose="02020603050405020304" pitchFamily="18" charset="0"/>
+              </a:rPr>
+              <a:t>GPUnet</a:t>
+            </a:r>
+            <a:r>
+              <a:rPr lang="en-US" altLang="zh-CN" dirty="0">
+                <a:latin typeface="Times New Roman" panose="02020603050405020304" pitchFamily="18" charset="0"/>
+                <a:cs typeface="Times New Roman" panose="02020603050405020304" pitchFamily="18" charset="0"/>
+              </a:rPr>
+              <a:t> server where </a:t>
+            </a:r>
+            <a:r>
+              <a:rPr lang="en-US" altLang="zh-CN" dirty="0">
+                <a:solidFill>
+                  <a:srgbClr val="FF0000"/>
+                </a:solidFill>
+                <a:latin typeface="Times New Roman" panose="02020603050405020304" pitchFamily="18" charset="0"/>
+                <a:cs typeface="Times New Roman" panose="02020603050405020304" pitchFamily="18" charset="0"/>
+              </a:rPr>
+              <a:t>each </a:t>
+            </a:r>
+            <a:r>
+              <a:rPr lang="en-US" altLang="zh-CN" dirty="0" err="1">
+                <a:solidFill>
+                  <a:srgbClr val="FF0000"/>
+                </a:solidFill>
+                <a:latin typeface="Times New Roman" panose="02020603050405020304" pitchFamily="18" charset="0"/>
+                <a:cs typeface="Times New Roman" panose="02020603050405020304" pitchFamily="18" charset="0"/>
+              </a:rPr>
+              <a:t>threadblock</a:t>
+            </a:r>
+            <a:r>
+              <a:rPr lang="en-US" altLang="zh-CN" dirty="0">
+                <a:solidFill>
+                  <a:srgbClr val="FF0000"/>
+                </a:solidFill>
+                <a:latin typeface="Times New Roman" panose="02020603050405020304" pitchFamily="18" charset="0"/>
+                <a:cs typeface="Times New Roman" panose="02020603050405020304" pitchFamily="18" charset="0"/>
+              </a:rPr>
+              <a:t> </a:t>
+            </a:r>
+            <a:r>
+              <a:rPr lang="en-US" altLang="zh-CN" dirty="0">
+                <a:solidFill>
+                  <a:srgbClr val="7030A0"/>
+                </a:solidFill>
+                <a:latin typeface="Times New Roman" panose="02020603050405020304" pitchFamily="18" charset="0"/>
+                <a:cs typeface="Times New Roman" panose="02020603050405020304" pitchFamily="18" charset="0"/>
+              </a:rPr>
+              <a:t>acts as</a:t>
+            </a:r>
+            <a:r>
+              <a:rPr lang="en-US" altLang="zh-CN" dirty="0">
+                <a:latin typeface="Times New Roman" panose="02020603050405020304" pitchFamily="18" charset="0"/>
+                <a:cs typeface="Times New Roman" panose="02020603050405020304" pitchFamily="18" charset="0"/>
+              </a:rPr>
+              <a:t> an </a:t>
+            </a:r>
+            <a:r>
+              <a:rPr lang="en-US" altLang="zh-CN" dirty="0">
+                <a:solidFill>
+                  <a:srgbClr val="FF0000"/>
+                </a:solidFill>
+                <a:latin typeface="Times New Roman" panose="02020603050405020304" pitchFamily="18" charset="0"/>
+                <a:cs typeface="Times New Roman" panose="02020603050405020304" pitchFamily="18" charset="0"/>
+              </a:rPr>
+              <a:t>independent server</a:t>
+            </a:r>
+            <a:r>
+              <a:rPr lang="en-US" altLang="zh-CN" dirty="0">
+                <a:latin typeface="Times New Roman" panose="02020603050405020304" pitchFamily="18" charset="0"/>
+                <a:cs typeface="Times New Roman" panose="02020603050405020304" pitchFamily="18" charset="0"/>
+              </a:rPr>
+              <a:t>, </a:t>
+            </a:r>
+            <a:r>
+              <a:rPr lang="en-US" altLang="zh-CN" dirty="0" smtClean="0">
+                <a:latin typeface="Times New Roman" panose="02020603050405020304" pitchFamily="18" charset="0"/>
+                <a:cs typeface="Times New Roman" panose="02020603050405020304" pitchFamily="18" charset="0"/>
+              </a:rPr>
+              <a:t>accepting, computing</a:t>
+            </a:r>
+            <a:r>
+              <a:rPr lang="en-US" altLang="zh-CN" dirty="0">
+                <a:latin typeface="Times New Roman" panose="02020603050405020304" pitchFamily="18" charset="0"/>
+                <a:cs typeface="Times New Roman" panose="02020603050405020304" pitchFamily="18" charset="0"/>
+              </a:rPr>
+              <a:t>, and responding to requests.</a:t>
+            </a:r>
+            <a:r>
+              <a:rPr lang="en-US" altLang="zh-CN" dirty="0">
+                <a:latin typeface="Times New Roman" panose="02020603050405020304" pitchFamily="18" charset="0"/>
+                <a:cs typeface="Times New Roman" panose="02020603050405020304" pitchFamily="18" charset="0"/>
+              </a:rPr>
+              <a:t/>
+            </a:r>
+            <a:br>
+              <a:rPr lang="en-US" altLang="zh-CN" dirty="0">
+                <a:latin typeface="Times New Roman" panose="02020603050405020304" pitchFamily="18" charset="0"/>
+                <a:cs typeface="Times New Roman" panose="02020603050405020304" pitchFamily="18" charset="0"/>
+              </a:rPr>
+            </a:br>
+            <a:endParaRPr lang="en-US" altLang="zh-CN" dirty="0" smtClean="0">
+              <a:latin typeface="Times New Roman" panose="02020603050405020304" pitchFamily="18" charset="0"/>
+              <a:cs typeface="Times New Roman" panose="02020603050405020304" pitchFamily="18" charset="0"/>
+            </a:endParaRPr>
+          </a:p>
+          <a:p>
+            <a:pPr lvl="1"/>
+            <a:endParaRPr lang="zh-CN" altLang="en-US" dirty="0">
+              <a:latin typeface="Times New Roman" panose="02020603050405020304" pitchFamily="18" charset="0"/>
+              <a:cs typeface="Times New Roman" panose="02020603050405020304" pitchFamily="18" charset="0"/>
+            </a:endParaRPr>
+          </a:p>
+        </p:txBody>
+      </p:sp>
+    </p:spTree>
+    <p:extLst>
+      <p:ext uri="{BB962C8B-B14F-4D97-AF65-F5344CB8AC3E}">
+        <p14:creationId xmlns:p14="http://schemas.microsoft.com/office/powerpoint/2010/main" val="4180443914"/>
+      </p:ext>
+    </p:extLst>
+  </p:cSld>
+  <p:clrMapOvr>
+    <a:masterClrMapping/>
+  </p:clrMapOvr>
+  <p:timing>
+    <p:tnLst>
+      <p:par>
+        <p:cTn id="1" dur="indefinite" restart="never" nodeType="tmRoot"/>
+      </p:par>
+    </p:tnLst>
+  </p:timing>
+</p:sld>
+</file>
+
+<file path=ppt/slides/slide18.xml><?xml version="1.0" encoding="utf-8"?>
+<p:sld xmlns:a="http://schemas.openxmlformats.org/drawingml/2006/main" xmlns:r="http://schemas.openxmlformats.org/officeDocument/2006/relationships" xmlns:p="http://schemas.openxmlformats.org/presentationml/2006/main">
+  <p:cSld>
+    <p:spTree>
+      <p:nvGrpSpPr>
+        <p:cNvPr id="1" name=""/>
+        <p:cNvGrpSpPr/>
+        <p:nvPr/>
+      </p:nvGrpSpPr>
+      <p:grpSpPr>
+        <a:xfrm>
+          <a:off x="0" y="0"/>
+          <a:ext cx="0" cy="0"/>
+          <a:chOff x="0" y="0"/>
+          <a:chExt cx="0" cy="0"/>
+        </a:xfrm>
+      </p:grpSpPr>
+      <p:sp>
+        <p:nvSpPr>
+          <p:cNvPr id="5122" name="标题 1">
+            <a:extLst>
+              <a:ext uri="{FF2B5EF4-FFF2-40B4-BE49-F238E27FC236}">
+                <a16:creationId xmlns="" xmlns:a16="http://schemas.microsoft.com/office/drawing/2014/main" id="{A237414D-C4E1-407F-9B0D-585D2D878A74}"/>
               </a:ext>
             </a:extLst>
           </p:cNvPr>
@@ -17620,7 +18712,7 @@
           <p:cNvPr id="3" name="内容占位符 2">
             <a:extLst>
               <a:ext uri="{FF2B5EF4-FFF2-40B4-BE49-F238E27FC236}">
-                <a16:creationId xmlns:a16="http://schemas.microsoft.com/office/drawing/2014/main" xmlns="" id="{3DFD56C3-3B63-4F4C-A455-80D220434928}"/>
+                <a16:creationId xmlns="" xmlns:a16="http://schemas.microsoft.com/office/drawing/2014/main" id="{3DFD56C3-3B63-4F4C-A455-80D220434928}"/>
               </a:ext>
             </a:extLst>
           </p:cNvPr>
@@ -17696,14 +18788,7 @@
                 <a:latin typeface="Times New Roman" panose="02020603050405020304" pitchFamily="18" charset="0"/>
                 <a:cs typeface="Times New Roman" panose="02020603050405020304" pitchFamily="18" charset="0"/>
               </a:rPr>
-              <a:t> </a:t>
-            </a:r>
-            <a:r>
-              <a:rPr lang="en-US" altLang="zh-CN" b="1" dirty="0" smtClean="0">
-                <a:latin typeface="Times New Roman" panose="02020603050405020304" pitchFamily="18" charset="0"/>
-                <a:cs typeface="Times New Roman" panose="02020603050405020304" pitchFamily="18" charset="0"/>
-              </a:rPr>
-              <a:t>Design</a:t>
+              <a:t> Design</a:t>
             </a:r>
             <a:endParaRPr lang="en-US" altLang="zh-CN" b="1" dirty="0">
               <a:latin typeface="Times New Roman" panose="02020603050405020304" pitchFamily="18" charset="0"/>
@@ -17769,7 +18854,7 @@
               <a:pPr>
                 <a:defRPr/>
               </a:pPr>
-              <a:t>17</a:t>
+              <a:t>18</a:t>
             </a:fld>
             <a:endParaRPr lang="en-US" altLang="zh-CN" dirty="0"/>
           </a:p>
@@ -17974,7 +19059,7 @@
 </p:sld>
 </file>
 
-<file path=ppt/slides/slide18.xml><?xml version="1.0" encoding="utf-8"?>
+<file path=ppt/slides/slide19.xml><?xml version="1.0" encoding="utf-8"?>
 <p:sld xmlns:a="http://schemas.openxmlformats.org/drawingml/2006/main" xmlns:r="http://schemas.openxmlformats.org/officeDocument/2006/relationships" xmlns:p="http://schemas.openxmlformats.org/presentationml/2006/main">
   <p:cSld>
     <p:spTree>
@@ -17996,7 +19081,7 @@
           <p:cNvPr id="5122" name="标题 1">
             <a:extLst>
               <a:ext uri="{FF2B5EF4-FFF2-40B4-BE49-F238E27FC236}">
-                <a16:creationId xmlns:a16="http://schemas.microsoft.com/office/drawing/2014/main" xmlns="" id="{A237414D-C4E1-407F-9B0D-585D2D878A74}"/>
+                <a16:creationId xmlns="" xmlns:a16="http://schemas.microsoft.com/office/drawing/2014/main" id="{A237414D-C4E1-407F-9B0D-585D2D878A74}"/>
               </a:ext>
             </a:extLst>
           </p:cNvPr>
@@ -18029,14 +19114,7 @@
                 <a:latin typeface="Times New Roman" panose="02020603050405020304" pitchFamily="18" charset="0"/>
                 <a:cs typeface="Times New Roman" panose="02020603050405020304" pitchFamily="18" charset="0"/>
               </a:rPr>
-              <a:t> </a:t>
-            </a:r>
-            <a:r>
-              <a:rPr lang="en-US" altLang="zh-CN" dirty="0" smtClean="0">
-                <a:latin typeface="Times New Roman" panose="02020603050405020304" pitchFamily="18" charset="0"/>
-                <a:cs typeface="Times New Roman" panose="02020603050405020304" pitchFamily="18" charset="0"/>
-              </a:rPr>
-              <a:t>Design</a:t>
+              <a:t> Design</a:t>
             </a:r>
             <a:endParaRPr lang="en-US" altLang="zh-CN" dirty="0">
               <a:latin typeface="Times New Roman" panose="02020603050405020304" pitchFamily="18" charset="0"/>
@@ -18093,7 +19171,7 @@
               <a:pPr>
                 <a:defRPr/>
               </a:pPr>
-              <a:t>18</a:t>
+              <a:t>19</a:t>
             </a:fld>
             <a:endParaRPr lang="en-US" altLang="zh-CN" dirty="0"/>
           </a:p>
@@ -18259,15 +19337,7 @@
                     <a:srgbClr val="FF0000"/>
                   </a:solidFill>
                 </a:rPr>
-                <a:t> </a:t>
-              </a:r>
-              <a:r>
-                <a:rPr lang="en-US" altLang="zh-CN" dirty="0" smtClean="0">
-                  <a:solidFill>
-                    <a:srgbClr val="FF0000"/>
-                  </a:solidFill>
-                </a:rPr>
-                <a:t>stores network buffers in GPU memory</a:t>
+                <a:t> stores network buffers in GPU memory</a:t>
               </a:r>
               <a:endParaRPr lang="zh-CN" altLang="en-US" dirty="0">
                 <a:solidFill>
@@ -18501,17 +19571,7 @@
                 <a:latin typeface="Times New Roman" panose="02020603050405020304" pitchFamily="18" charset="0"/>
                 <a:cs typeface="Times New Roman" panose="02020603050405020304" pitchFamily="18" charset="0"/>
               </a:rPr>
-              <a:t> </a:t>
-            </a:r>
-            <a:r>
-              <a:rPr lang="en-US" altLang="zh-CN" dirty="0" smtClean="0">
-                <a:solidFill>
-                  <a:schemeClr val="tx1"/>
-                </a:solidFill>
-                <a:latin typeface="Times New Roman" panose="02020603050405020304" pitchFamily="18" charset="0"/>
-                <a:cs typeface="Times New Roman" panose="02020603050405020304" pitchFamily="18" charset="0"/>
-              </a:rPr>
-              <a:t>library. (2) CPU applications may use standard sockets to connect to remote GPU sockets. (3) </a:t>
+              <a:t> library. (2) CPU applications may use standard sockets to connect to remote GPU sockets. (3) </a:t>
             </a:r>
             <a:r>
               <a:rPr lang="en-US" altLang="zh-CN" sz="2000" dirty="0" smtClean="0">
@@ -18541,17 +19601,7 @@
                 <a:latin typeface="Times New Roman" panose="02020603050405020304" pitchFamily="18" charset="0"/>
                 <a:cs typeface="Times New Roman" panose="02020603050405020304" pitchFamily="18" charset="0"/>
               </a:rPr>
-              <a:t> </a:t>
-            </a:r>
-            <a:r>
-              <a:rPr lang="en-US" altLang="zh-CN" sz="2000" dirty="0" smtClean="0">
-                <a:solidFill>
-                  <a:srgbClr val="FF0000"/>
-                </a:solidFill>
-                <a:latin typeface="Times New Roman" panose="02020603050405020304" pitchFamily="18" charset="0"/>
-                <a:cs typeface="Times New Roman" panose="02020603050405020304" pitchFamily="18" charset="0"/>
-              </a:rPr>
-              <a:t>endpoint has identical capabilities as a CPU network endpoint.</a:t>
+              <a:t> endpoint has identical capabilities as a CPU network endpoint.</a:t>
             </a:r>
             <a:endParaRPr lang="zh-CN" altLang="en-US" sz="2000" dirty="0">
               <a:solidFill>
@@ -19191,475 +20241,6 @@
 </p:sld>
 </file>
 
-<file path=ppt/slides/slide19.xml><?xml version="1.0" encoding="utf-8"?>
-<p:sld xmlns:a="http://schemas.openxmlformats.org/drawingml/2006/main" xmlns:r="http://schemas.openxmlformats.org/officeDocument/2006/relationships" xmlns:p="http://schemas.openxmlformats.org/presentationml/2006/main">
-  <p:cSld>
-    <p:spTree>
-      <p:nvGrpSpPr>
-        <p:cNvPr id="1" name=""/>
-        <p:cNvGrpSpPr/>
-        <p:nvPr/>
-      </p:nvGrpSpPr>
-      <p:grpSpPr>
-        <a:xfrm>
-          <a:off x="0" y="0"/>
-          <a:ext cx="0" cy="0"/>
-          <a:chOff x="0" y="0"/>
-          <a:chExt cx="0" cy="0"/>
-        </a:xfrm>
-      </p:grpSpPr>
-      <p:sp>
-        <p:nvSpPr>
-          <p:cNvPr id="5122" name="标题 1">
-            <a:extLst>
-              <a:ext uri="{FF2B5EF4-FFF2-40B4-BE49-F238E27FC236}">
-                <a16:creationId xmlns:a16="http://schemas.microsoft.com/office/drawing/2014/main" xmlns="" id="{A237414D-C4E1-407F-9B0D-585D2D878A74}"/>
-              </a:ext>
-            </a:extLst>
-          </p:cNvPr>
-          <p:cNvSpPr>
-            <a:spLocks noGrp="1"/>
-          </p:cNvSpPr>
-          <p:nvPr>
-            <p:ph type="title"/>
-          </p:nvPr>
-        </p:nvSpPr>
-        <p:spPr>
-          <a:xfrm>
-            <a:off x="624417" y="1109091"/>
-            <a:ext cx="10972800" cy="849042"/>
-          </a:xfrm>
-        </p:spPr>
-        <p:txBody>
-          <a:bodyPr/>
-          <a:lstStyle/>
-          <a:p>
-            <a:r>
-              <a:rPr lang="en-US" altLang="zh-CN" dirty="0" err="1" smtClean="0">
-                <a:latin typeface="Times New Roman" panose="02020603050405020304" pitchFamily="18" charset="0"/>
-                <a:cs typeface="Times New Roman" panose="02020603050405020304" pitchFamily="18" charset="0"/>
-              </a:rPr>
-              <a:t>GPUnet</a:t>
-            </a:r>
-            <a:r>
-              <a:rPr lang="en-US" altLang="zh-CN" dirty="0" smtClean="0">
-                <a:latin typeface="Times New Roman" panose="02020603050405020304" pitchFamily="18" charset="0"/>
-                <a:cs typeface="Times New Roman" panose="02020603050405020304" pitchFamily="18" charset="0"/>
-              </a:rPr>
-              <a:t> </a:t>
-            </a:r>
-            <a:r>
-              <a:rPr lang="en-US" altLang="zh-CN" dirty="0" smtClean="0">
-                <a:latin typeface="Times New Roman" panose="02020603050405020304" pitchFamily="18" charset="0"/>
-                <a:cs typeface="Times New Roman" panose="02020603050405020304" pitchFamily="18" charset="0"/>
-              </a:rPr>
-              <a:t>Design</a:t>
-            </a:r>
-            <a:endParaRPr lang="en-US" altLang="zh-CN" dirty="0">
-              <a:latin typeface="Times New Roman" panose="02020603050405020304" pitchFamily="18" charset="0"/>
-              <a:cs typeface="Times New Roman" panose="02020603050405020304" pitchFamily="18" charset="0"/>
-            </a:endParaRPr>
-          </a:p>
-        </p:txBody>
-      </p:sp>
-      <p:sp>
-        <p:nvSpPr>
-          <p:cNvPr id="7" name="灯片编号占位符 6"/>
-          <p:cNvSpPr>
-            <a:spLocks noGrp="1"/>
-          </p:cNvSpPr>
-          <p:nvPr>
-            <p:ph type="sldNum" sz="quarter" idx="12"/>
-          </p:nvPr>
-        </p:nvSpPr>
-        <p:spPr/>
-        <p:txBody>
-          <a:bodyPr/>
-          <a:lstStyle/>
-          <a:p>
-            <a:pPr>
-              <a:defRPr/>
-            </a:pPr>
-            <a:fld id="{2B61CBCD-6AEA-4E03-89F5-67AC013F5D05}" type="slidenum">
-              <a:rPr lang="en-US" altLang="zh-CN" smtClean="0"/>
-              <a:pPr>
-                <a:defRPr/>
-              </a:pPr>
-              <a:t>19</a:t>
-            </a:fld>
-            <a:endParaRPr lang="en-US" altLang="zh-CN" dirty="0"/>
-          </a:p>
-        </p:txBody>
-      </p:sp>
-      <p:sp>
-        <p:nvSpPr>
-          <p:cNvPr id="3" name="内容占位符 2"/>
-          <p:cNvSpPr>
-            <a:spLocks noGrp="1"/>
-          </p:cNvSpPr>
-          <p:nvPr>
-            <p:ph idx="1"/>
-          </p:nvPr>
-        </p:nvSpPr>
-        <p:spPr>
-          <a:xfrm>
-            <a:off x="624417" y="2194297"/>
-            <a:ext cx="10972800" cy="3849688"/>
-          </a:xfrm>
-        </p:spPr>
-        <p:txBody>
-          <a:bodyPr/>
-          <a:lstStyle/>
-          <a:p>
-            <a:r>
-              <a:rPr lang="en-US" altLang="zh-CN" b="1" dirty="0" smtClean="0">
-                <a:latin typeface="Times New Roman" panose="02020603050405020304" pitchFamily="18" charset="0"/>
-                <a:cs typeface="Times New Roman" panose="02020603050405020304" pitchFamily="18" charset="0"/>
-              </a:rPr>
-              <a:t>The difference of </a:t>
-            </a:r>
-            <a:r>
-              <a:rPr lang="en-US" altLang="zh-CN" b="1" dirty="0" smtClean="0">
-                <a:solidFill>
-                  <a:srgbClr val="FF0000"/>
-                </a:solidFill>
-                <a:latin typeface="Times New Roman" panose="02020603050405020304" pitchFamily="18" charset="0"/>
-                <a:cs typeface="Times New Roman" panose="02020603050405020304" pitchFamily="18" charset="0"/>
-              </a:rPr>
-              <a:t>processing model </a:t>
-            </a:r>
-            <a:r>
-              <a:rPr lang="en-US" altLang="zh-CN" b="1" dirty="0" smtClean="0">
-                <a:latin typeface="Times New Roman" panose="02020603050405020304" pitchFamily="18" charset="0"/>
-                <a:cs typeface="Times New Roman" panose="02020603050405020304" pitchFamily="18" charset="0"/>
-              </a:rPr>
-              <a:t>in </a:t>
-            </a:r>
-            <a:r>
-              <a:rPr lang="en-US" altLang="zh-CN" b="1" dirty="0" smtClean="0">
-                <a:solidFill>
-                  <a:srgbClr val="FF0000"/>
-                </a:solidFill>
-                <a:latin typeface="Times New Roman" panose="02020603050405020304" pitchFamily="18" charset="0"/>
-                <a:cs typeface="Times New Roman" panose="02020603050405020304" pitchFamily="18" charset="0"/>
-              </a:rPr>
-              <a:t>CPU and GPU</a:t>
-            </a:r>
-          </a:p>
-          <a:p>
-            <a:pPr lvl="1"/>
-            <a:r>
-              <a:rPr lang="en-US" altLang="zh-CN" dirty="0" err="1">
-                <a:latin typeface="Times New Roman" panose="02020603050405020304" pitchFamily="18" charset="0"/>
-                <a:cs typeface="Times New Roman" panose="02020603050405020304" pitchFamily="18" charset="0"/>
-              </a:rPr>
-              <a:t>GPUnet</a:t>
-            </a:r>
-            <a:r>
-              <a:rPr lang="en-US" altLang="zh-CN" dirty="0">
-                <a:latin typeface="Times New Roman" panose="02020603050405020304" pitchFamily="18" charset="0"/>
-                <a:cs typeface="Times New Roman" panose="02020603050405020304" pitchFamily="18" charset="0"/>
-              </a:rPr>
-              <a:t> requires applications to </a:t>
-            </a:r>
-            <a:r>
-              <a:rPr lang="en-US" altLang="zh-CN" dirty="0">
-                <a:solidFill>
-                  <a:srgbClr val="FF0000"/>
-                </a:solidFill>
-                <a:latin typeface="Times New Roman" panose="02020603050405020304" pitchFamily="18" charset="0"/>
-                <a:cs typeface="Times New Roman" panose="02020603050405020304" pitchFamily="18" charset="0"/>
-              </a:rPr>
-              <a:t>invoke its API </a:t>
-            </a:r>
-            <a:r>
-              <a:rPr lang="en-US" altLang="zh-CN" dirty="0">
-                <a:latin typeface="Times New Roman" panose="02020603050405020304" pitchFamily="18" charset="0"/>
-                <a:cs typeface="Times New Roman" panose="02020603050405020304" pitchFamily="18" charset="0"/>
-              </a:rPr>
-              <a:t>at the </a:t>
-            </a:r>
-            <a:r>
-              <a:rPr lang="en-US" altLang="zh-CN" dirty="0">
-                <a:solidFill>
-                  <a:srgbClr val="FF0000"/>
-                </a:solidFill>
-                <a:latin typeface="Times New Roman" panose="02020603050405020304" pitchFamily="18" charset="0"/>
-                <a:cs typeface="Times New Roman" panose="02020603050405020304" pitchFamily="18" charset="0"/>
-              </a:rPr>
-              <a:t>granularity</a:t>
-            </a:r>
-            <a:r>
-              <a:rPr lang="en-US" altLang="zh-CN" dirty="0">
-                <a:latin typeface="Times New Roman" panose="02020603050405020304" pitchFamily="18" charset="0"/>
-                <a:cs typeface="Times New Roman" panose="02020603050405020304" pitchFamily="18" charset="0"/>
-              </a:rPr>
-              <a:t> of a </a:t>
-            </a:r>
-            <a:r>
-              <a:rPr lang="en-US" altLang="zh-CN" dirty="0">
-                <a:solidFill>
-                  <a:srgbClr val="FF0000"/>
-                </a:solidFill>
-                <a:latin typeface="Times New Roman" panose="02020603050405020304" pitchFamily="18" charset="0"/>
-                <a:cs typeface="Times New Roman" panose="02020603050405020304" pitchFamily="18" charset="0"/>
-              </a:rPr>
-              <a:t>single </a:t>
-            </a:r>
-            <a:r>
-              <a:rPr lang="en-US" altLang="zh-CN" dirty="0" err="1">
-                <a:solidFill>
-                  <a:srgbClr val="FF0000"/>
-                </a:solidFill>
-                <a:latin typeface="Times New Roman" panose="02020603050405020304" pitchFamily="18" charset="0"/>
-                <a:cs typeface="Times New Roman" panose="02020603050405020304" pitchFamily="18" charset="0"/>
-              </a:rPr>
-              <a:t>threadblock</a:t>
-            </a:r>
-            <a:r>
-              <a:rPr lang="en-US" altLang="zh-CN" dirty="0">
-                <a:latin typeface="Times New Roman" panose="02020603050405020304" pitchFamily="18" charset="0"/>
-                <a:cs typeface="Times New Roman" panose="02020603050405020304" pitchFamily="18" charset="0"/>
-              </a:rPr>
-              <a:t>. </a:t>
-            </a:r>
-            <a:r>
-              <a:rPr lang="en-US" altLang="zh-CN" dirty="0">
-                <a:solidFill>
-                  <a:srgbClr val="FF0000"/>
-                </a:solidFill>
-                <a:latin typeface="Times New Roman" panose="02020603050405020304" pitchFamily="18" charset="0"/>
-                <a:cs typeface="Times New Roman" panose="02020603050405020304" pitchFamily="18" charset="0"/>
-              </a:rPr>
-              <a:t>All threads in a </a:t>
-            </a:r>
-            <a:r>
-              <a:rPr lang="en-US" altLang="zh-CN" dirty="0" err="1">
-                <a:solidFill>
-                  <a:srgbClr val="FF0000"/>
-                </a:solidFill>
-                <a:latin typeface="Times New Roman" panose="02020603050405020304" pitchFamily="18" charset="0"/>
-                <a:cs typeface="Times New Roman" panose="02020603050405020304" pitchFamily="18" charset="0"/>
-              </a:rPr>
-              <a:t>threadblock</a:t>
-            </a:r>
-            <a:r>
-              <a:rPr lang="en-US" altLang="zh-CN" dirty="0">
-                <a:solidFill>
-                  <a:srgbClr val="FF0000"/>
-                </a:solidFill>
-                <a:latin typeface="Times New Roman" panose="02020603050405020304" pitchFamily="18" charset="0"/>
-                <a:cs typeface="Times New Roman" panose="02020603050405020304" pitchFamily="18" charset="0"/>
-              </a:rPr>
-              <a:t> </a:t>
-            </a:r>
-            <a:r>
-              <a:rPr lang="en-US" altLang="zh-CN" dirty="0">
-                <a:latin typeface="Times New Roman" panose="02020603050405020304" pitchFamily="18" charset="0"/>
-                <a:cs typeface="Times New Roman" panose="02020603050405020304" pitchFamily="18" charset="0"/>
-              </a:rPr>
-              <a:t>must </a:t>
-            </a:r>
-            <a:r>
-              <a:rPr lang="en-US" altLang="zh-CN" dirty="0">
-                <a:solidFill>
-                  <a:srgbClr val="FF0000"/>
-                </a:solidFill>
-                <a:latin typeface="Times New Roman" panose="02020603050405020304" pitchFamily="18" charset="0"/>
-                <a:cs typeface="Times New Roman" panose="02020603050405020304" pitchFamily="18" charset="0"/>
-              </a:rPr>
-              <a:t>invoke</a:t>
-            </a:r>
-            <a:r>
-              <a:rPr lang="en-US" altLang="zh-CN" dirty="0">
-                <a:latin typeface="Times New Roman" panose="02020603050405020304" pitchFamily="18" charset="0"/>
-                <a:cs typeface="Times New Roman" panose="02020603050405020304" pitchFamily="18" charset="0"/>
-              </a:rPr>
-              <a:t> the </a:t>
-            </a:r>
-            <a:r>
-              <a:rPr lang="en-US" altLang="zh-CN" dirty="0">
-                <a:solidFill>
-                  <a:srgbClr val="FF0000"/>
-                </a:solidFill>
-                <a:latin typeface="Times New Roman" panose="02020603050405020304" pitchFamily="18" charset="0"/>
-                <a:cs typeface="Times New Roman" panose="02020603050405020304" pitchFamily="18" charset="0"/>
-              </a:rPr>
-              <a:t>same </a:t>
-            </a:r>
-            <a:r>
-              <a:rPr lang="en-US" altLang="zh-CN" dirty="0" err="1">
-                <a:solidFill>
-                  <a:srgbClr val="FF0000"/>
-                </a:solidFill>
-                <a:latin typeface="Times New Roman" panose="02020603050405020304" pitchFamily="18" charset="0"/>
-                <a:cs typeface="Times New Roman" panose="02020603050405020304" pitchFamily="18" charset="0"/>
-              </a:rPr>
-              <a:t>GPUnet</a:t>
-            </a:r>
-            <a:r>
-              <a:rPr lang="en-US" altLang="zh-CN" dirty="0">
-                <a:solidFill>
-                  <a:srgbClr val="FF0000"/>
-                </a:solidFill>
-                <a:latin typeface="Times New Roman" panose="02020603050405020304" pitchFamily="18" charset="0"/>
-                <a:cs typeface="Times New Roman" panose="02020603050405020304" pitchFamily="18" charset="0"/>
-              </a:rPr>
-              <a:t> call</a:t>
-            </a:r>
-            <a:r>
-              <a:rPr lang="en-US" altLang="zh-CN" dirty="0">
-                <a:latin typeface="Times New Roman" panose="02020603050405020304" pitchFamily="18" charset="0"/>
-                <a:cs typeface="Times New Roman" panose="02020603050405020304" pitchFamily="18" charset="0"/>
-              </a:rPr>
-              <a:t> together </a:t>
-            </a:r>
-            <a:r>
-              <a:rPr lang="en-US" altLang="zh-CN" dirty="0" smtClean="0">
-                <a:latin typeface="Times New Roman" panose="02020603050405020304" pitchFamily="18" charset="0"/>
-                <a:cs typeface="Times New Roman" panose="02020603050405020304" pitchFamily="18" charset="0"/>
-              </a:rPr>
-              <a:t>in a </a:t>
-            </a:r>
-            <a:r>
-              <a:rPr lang="en-US" altLang="zh-CN" dirty="0">
-                <a:latin typeface="Times New Roman" panose="02020603050405020304" pitchFamily="18" charset="0"/>
-                <a:cs typeface="Times New Roman" panose="02020603050405020304" pitchFamily="18" charset="0"/>
-              </a:rPr>
-              <a:t>coalesced </a:t>
-            </a:r>
-            <a:r>
-              <a:rPr lang="en-US" altLang="zh-CN" dirty="0" smtClean="0">
-                <a:latin typeface="Times New Roman" panose="02020603050405020304" pitchFamily="18" charset="0"/>
-                <a:cs typeface="Times New Roman" panose="02020603050405020304" pitchFamily="18" charset="0"/>
-              </a:rPr>
-              <a:t>manner</a:t>
-            </a:r>
-          </a:p>
-          <a:p>
-            <a:pPr lvl="1"/>
-            <a:r>
-              <a:rPr lang="en-US" altLang="zh-CN" dirty="0">
-                <a:latin typeface="Times New Roman" panose="02020603050405020304" pitchFamily="18" charset="0"/>
-                <a:cs typeface="Times New Roman" panose="02020603050405020304" pitchFamily="18" charset="0"/>
-              </a:rPr>
-              <a:t>A traditional </a:t>
-            </a:r>
-            <a:r>
-              <a:rPr lang="en-US" altLang="zh-CN" dirty="0">
-                <a:solidFill>
-                  <a:srgbClr val="FF0000"/>
-                </a:solidFill>
-                <a:latin typeface="Times New Roman" panose="02020603050405020304" pitchFamily="18" charset="0"/>
-                <a:cs typeface="Times New Roman" panose="02020603050405020304" pitchFamily="18" charset="0"/>
-              </a:rPr>
-              <a:t>CPU network </a:t>
-            </a:r>
-            <a:r>
-              <a:rPr lang="en-US" altLang="zh-CN" dirty="0">
-                <a:latin typeface="Times New Roman" panose="02020603050405020304" pitchFamily="18" charset="0"/>
-                <a:cs typeface="Times New Roman" panose="02020603050405020304" pitchFamily="18" charset="0"/>
-              </a:rPr>
-              <a:t>API is </a:t>
-            </a:r>
-            <a:r>
-              <a:rPr lang="en-US" altLang="zh-CN" dirty="0">
-                <a:solidFill>
-                  <a:srgbClr val="FF0000"/>
-                </a:solidFill>
-                <a:latin typeface="Times New Roman" panose="02020603050405020304" pitchFamily="18" charset="0"/>
-                <a:cs typeface="Times New Roman" panose="02020603050405020304" pitchFamily="18" charset="0"/>
-              </a:rPr>
-              <a:t>single threaded</a:t>
-            </a:r>
-            <a:r>
-              <a:rPr lang="en-US" altLang="zh-CN" dirty="0">
-                <a:latin typeface="Times New Roman" panose="02020603050405020304" pitchFamily="18" charset="0"/>
-                <a:cs typeface="Times New Roman" panose="02020603050405020304" pitchFamily="18" charset="0"/>
-              </a:rPr>
-              <a:t>—that is,</a:t>
-            </a:r>
-            <a:br>
-              <a:rPr lang="en-US" altLang="zh-CN" dirty="0">
-                <a:latin typeface="Times New Roman" panose="02020603050405020304" pitchFamily="18" charset="0"/>
-                <a:cs typeface="Times New Roman" panose="02020603050405020304" pitchFamily="18" charset="0"/>
-              </a:rPr>
-            </a:br>
-            <a:r>
-              <a:rPr lang="en-US" altLang="zh-CN" dirty="0">
-                <a:solidFill>
-                  <a:srgbClr val="FF0000"/>
-                </a:solidFill>
-                <a:latin typeface="Times New Roman" panose="02020603050405020304" pitchFamily="18" charset="0"/>
-                <a:cs typeface="Times New Roman" panose="02020603050405020304" pitchFamily="18" charset="0"/>
-              </a:rPr>
-              <a:t>each thread </a:t>
-            </a:r>
-            <a:r>
-              <a:rPr lang="en-US" altLang="zh-CN" dirty="0">
-                <a:latin typeface="Times New Roman" panose="02020603050405020304" pitchFamily="18" charset="0"/>
-                <a:cs typeface="Times New Roman" panose="02020603050405020304" pitchFamily="18" charset="0"/>
-              </a:rPr>
-              <a:t>can make </a:t>
-            </a:r>
-            <a:r>
-              <a:rPr lang="en-US" altLang="zh-CN" dirty="0">
-                <a:solidFill>
-                  <a:srgbClr val="FF0000"/>
-                </a:solidFill>
-                <a:latin typeface="Times New Roman" panose="02020603050405020304" pitchFamily="18" charset="0"/>
-                <a:cs typeface="Times New Roman" panose="02020603050405020304" pitchFamily="18" charset="0"/>
-              </a:rPr>
-              <a:t>independent API calls </a:t>
-            </a:r>
-            <a:r>
-              <a:rPr lang="en-US" altLang="zh-CN" dirty="0">
-                <a:latin typeface="Times New Roman" panose="02020603050405020304" pitchFamily="18" charset="0"/>
-                <a:cs typeface="Times New Roman" panose="02020603050405020304" pitchFamily="18" charset="0"/>
-              </a:rPr>
-              <a:t>and receive independent results. </a:t>
-            </a:r>
-            <a:r>
-              <a:rPr lang="en-US" altLang="zh-CN" dirty="0"/>
-              <a:t/>
-            </a:r>
-            <a:br>
-              <a:rPr lang="en-US" altLang="zh-CN" dirty="0"/>
-            </a:br>
-            <a:endParaRPr lang="en-US" altLang="zh-CN" dirty="0" smtClean="0">
-              <a:latin typeface="Times New Roman" panose="02020603050405020304" pitchFamily="18" charset="0"/>
-              <a:cs typeface="Times New Roman" panose="02020603050405020304" pitchFamily="18" charset="0"/>
-            </a:endParaRPr>
-          </a:p>
-          <a:p>
-            <a:pPr lvl="1"/>
-            <a:endParaRPr lang="zh-CN" altLang="en-US" dirty="0">
-              <a:latin typeface="Times New Roman" panose="02020603050405020304" pitchFamily="18" charset="0"/>
-              <a:cs typeface="Times New Roman" panose="02020603050405020304" pitchFamily="18" charset="0"/>
-            </a:endParaRPr>
-          </a:p>
-        </p:txBody>
-      </p:sp>
-    </p:spTree>
-    <p:extLst>
-      <p:ext uri="{BB962C8B-B14F-4D97-AF65-F5344CB8AC3E}">
-        <p14:creationId xmlns:p14="http://schemas.microsoft.com/office/powerpoint/2010/main" val="3005564297"/>
-      </p:ext>
-    </p:extLst>
-  </p:cSld>
-  <p:clrMapOvr>
-    <a:masterClrMapping/>
-  </p:clrMapOvr>
-  <p:timing>
-    <p:tnLst>
-      <p:par>
-        <p:cTn id="1" dur="indefinite" restart="never" nodeType="tmRoot"/>
-      </p:par>
-    </p:tnLst>
-  </p:timing>
-</p:sld>
-</file>
-
 <file path=ppt/slides/slide2.xml><?xml version="1.0" encoding="utf-8"?>
 <p:sld xmlns:a="http://schemas.openxmlformats.org/drawingml/2006/main" xmlns:r="http://schemas.openxmlformats.org/officeDocument/2006/relationships" xmlns:p="http://schemas.openxmlformats.org/presentationml/2006/main">
   <p:cSld>
@@ -19682,7 +20263,7 @@
           <p:cNvPr id="5122" name="标题 1">
             <a:extLst>
               <a:ext uri="{FF2B5EF4-FFF2-40B4-BE49-F238E27FC236}">
-                <a16:creationId xmlns:a16="http://schemas.microsoft.com/office/drawing/2014/main" xmlns="" id="{A237414D-C4E1-407F-9B0D-585D2D878A74}"/>
+                <a16:creationId xmlns="" xmlns:a16="http://schemas.microsoft.com/office/drawing/2014/main" id="{A237414D-C4E1-407F-9B0D-585D2D878A74}"/>
               </a:ext>
             </a:extLst>
           </p:cNvPr>
@@ -20324,7 +20905,469 @@
           <p:cNvPr id="5122" name="标题 1">
             <a:extLst>
               <a:ext uri="{FF2B5EF4-FFF2-40B4-BE49-F238E27FC236}">
-                <a16:creationId xmlns:a16="http://schemas.microsoft.com/office/drawing/2014/main" xmlns="" id="{A237414D-C4E1-407F-9B0D-585D2D878A74}"/>
+                <a16:creationId xmlns="" xmlns:a16="http://schemas.microsoft.com/office/drawing/2014/main" id="{A237414D-C4E1-407F-9B0D-585D2D878A74}"/>
+              </a:ext>
+            </a:extLst>
+          </p:cNvPr>
+          <p:cNvSpPr>
+            <a:spLocks noGrp="1"/>
+          </p:cNvSpPr>
+          <p:nvPr>
+            <p:ph type="title"/>
+          </p:nvPr>
+        </p:nvSpPr>
+        <p:spPr>
+          <a:xfrm>
+            <a:off x="624417" y="1109091"/>
+            <a:ext cx="10972800" cy="849042"/>
+          </a:xfrm>
+        </p:spPr>
+        <p:txBody>
+          <a:bodyPr/>
+          <a:lstStyle/>
+          <a:p>
+            <a:r>
+              <a:rPr lang="en-US" altLang="zh-CN" dirty="0" err="1" smtClean="0">
+                <a:latin typeface="Times New Roman" panose="02020603050405020304" pitchFamily="18" charset="0"/>
+                <a:cs typeface="Times New Roman" panose="02020603050405020304" pitchFamily="18" charset="0"/>
+              </a:rPr>
+              <a:t>GPUnet</a:t>
+            </a:r>
+            <a:r>
+              <a:rPr lang="en-US" altLang="zh-CN" dirty="0" smtClean="0">
+                <a:latin typeface="Times New Roman" panose="02020603050405020304" pitchFamily="18" charset="0"/>
+                <a:cs typeface="Times New Roman" panose="02020603050405020304" pitchFamily="18" charset="0"/>
+              </a:rPr>
+              <a:t> Design</a:t>
+            </a:r>
+            <a:endParaRPr lang="en-US" altLang="zh-CN" dirty="0">
+              <a:latin typeface="Times New Roman" panose="02020603050405020304" pitchFamily="18" charset="0"/>
+              <a:cs typeface="Times New Roman" panose="02020603050405020304" pitchFamily="18" charset="0"/>
+            </a:endParaRPr>
+          </a:p>
+        </p:txBody>
+      </p:sp>
+      <p:sp>
+        <p:nvSpPr>
+          <p:cNvPr id="7" name="灯片编号占位符 6"/>
+          <p:cNvSpPr>
+            <a:spLocks noGrp="1"/>
+          </p:cNvSpPr>
+          <p:nvPr>
+            <p:ph type="sldNum" sz="quarter" idx="12"/>
+          </p:nvPr>
+        </p:nvSpPr>
+        <p:spPr/>
+        <p:txBody>
+          <a:bodyPr/>
+          <a:lstStyle/>
+          <a:p>
+            <a:pPr>
+              <a:defRPr/>
+            </a:pPr>
+            <a:fld id="{2B61CBCD-6AEA-4E03-89F5-67AC013F5D05}" type="slidenum">
+              <a:rPr lang="en-US" altLang="zh-CN" smtClean="0"/>
+              <a:pPr>
+                <a:defRPr/>
+              </a:pPr>
+              <a:t>20</a:t>
+            </a:fld>
+            <a:endParaRPr lang="en-US" altLang="zh-CN" dirty="0"/>
+          </a:p>
+        </p:txBody>
+      </p:sp>
+      <p:sp>
+        <p:nvSpPr>
+          <p:cNvPr id="3" name="内容占位符 2"/>
+          <p:cNvSpPr>
+            <a:spLocks noGrp="1"/>
+          </p:cNvSpPr>
+          <p:nvPr>
+            <p:ph idx="1"/>
+          </p:nvPr>
+        </p:nvSpPr>
+        <p:spPr>
+          <a:xfrm>
+            <a:off x="624417" y="2194297"/>
+            <a:ext cx="10972800" cy="3849688"/>
+          </a:xfrm>
+        </p:spPr>
+        <p:txBody>
+          <a:bodyPr/>
+          <a:lstStyle/>
+          <a:p>
+            <a:r>
+              <a:rPr lang="en-US" altLang="zh-CN" b="1" dirty="0" smtClean="0">
+                <a:latin typeface="Times New Roman" panose="02020603050405020304" pitchFamily="18" charset="0"/>
+                <a:cs typeface="Times New Roman" panose="02020603050405020304" pitchFamily="18" charset="0"/>
+              </a:rPr>
+              <a:t>The difference of </a:t>
+            </a:r>
+            <a:r>
+              <a:rPr lang="en-US" altLang="zh-CN" b="1" dirty="0" smtClean="0">
+                <a:solidFill>
+                  <a:srgbClr val="FF0000"/>
+                </a:solidFill>
+                <a:latin typeface="Times New Roman" panose="02020603050405020304" pitchFamily="18" charset="0"/>
+                <a:cs typeface="Times New Roman" panose="02020603050405020304" pitchFamily="18" charset="0"/>
+              </a:rPr>
+              <a:t>processing model </a:t>
+            </a:r>
+            <a:r>
+              <a:rPr lang="en-US" altLang="zh-CN" b="1" dirty="0" smtClean="0">
+                <a:latin typeface="Times New Roman" panose="02020603050405020304" pitchFamily="18" charset="0"/>
+                <a:cs typeface="Times New Roman" panose="02020603050405020304" pitchFamily="18" charset="0"/>
+              </a:rPr>
+              <a:t>in </a:t>
+            </a:r>
+            <a:r>
+              <a:rPr lang="en-US" altLang="zh-CN" b="1" dirty="0" smtClean="0">
+                <a:solidFill>
+                  <a:srgbClr val="FF0000"/>
+                </a:solidFill>
+                <a:latin typeface="Times New Roman" panose="02020603050405020304" pitchFamily="18" charset="0"/>
+                <a:cs typeface="Times New Roman" panose="02020603050405020304" pitchFamily="18" charset="0"/>
+              </a:rPr>
+              <a:t>CPU and GPU</a:t>
+            </a:r>
+          </a:p>
+          <a:p>
+            <a:pPr lvl="1"/>
+            <a:r>
+              <a:rPr lang="en-US" altLang="zh-CN" dirty="0" err="1">
+                <a:latin typeface="Times New Roman" panose="02020603050405020304" pitchFamily="18" charset="0"/>
+                <a:cs typeface="Times New Roman" panose="02020603050405020304" pitchFamily="18" charset="0"/>
+              </a:rPr>
+              <a:t>GPUnet</a:t>
+            </a:r>
+            <a:r>
+              <a:rPr lang="en-US" altLang="zh-CN" dirty="0">
+                <a:latin typeface="Times New Roman" panose="02020603050405020304" pitchFamily="18" charset="0"/>
+                <a:cs typeface="Times New Roman" panose="02020603050405020304" pitchFamily="18" charset="0"/>
+              </a:rPr>
+              <a:t> requires applications to </a:t>
+            </a:r>
+            <a:r>
+              <a:rPr lang="en-US" altLang="zh-CN" dirty="0">
+                <a:solidFill>
+                  <a:srgbClr val="FF0000"/>
+                </a:solidFill>
+                <a:latin typeface="Times New Roman" panose="02020603050405020304" pitchFamily="18" charset="0"/>
+                <a:cs typeface="Times New Roman" panose="02020603050405020304" pitchFamily="18" charset="0"/>
+              </a:rPr>
+              <a:t>invoke its API </a:t>
+            </a:r>
+            <a:r>
+              <a:rPr lang="en-US" altLang="zh-CN" dirty="0">
+                <a:latin typeface="Times New Roman" panose="02020603050405020304" pitchFamily="18" charset="0"/>
+                <a:cs typeface="Times New Roman" panose="02020603050405020304" pitchFamily="18" charset="0"/>
+              </a:rPr>
+              <a:t>at the </a:t>
+            </a:r>
+            <a:r>
+              <a:rPr lang="en-US" altLang="zh-CN" dirty="0">
+                <a:solidFill>
+                  <a:srgbClr val="FF0000"/>
+                </a:solidFill>
+                <a:latin typeface="Times New Roman" panose="02020603050405020304" pitchFamily="18" charset="0"/>
+                <a:cs typeface="Times New Roman" panose="02020603050405020304" pitchFamily="18" charset="0"/>
+              </a:rPr>
+              <a:t>granularity</a:t>
+            </a:r>
+            <a:r>
+              <a:rPr lang="en-US" altLang="zh-CN" dirty="0">
+                <a:latin typeface="Times New Roman" panose="02020603050405020304" pitchFamily="18" charset="0"/>
+                <a:cs typeface="Times New Roman" panose="02020603050405020304" pitchFamily="18" charset="0"/>
+              </a:rPr>
+              <a:t> of a </a:t>
+            </a:r>
+            <a:r>
+              <a:rPr lang="en-US" altLang="zh-CN" dirty="0">
+                <a:solidFill>
+                  <a:srgbClr val="FF0000"/>
+                </a:solidFill>
+                <a:latin typeface="Times New Roman" panose="02020603050405020304" pitchFamily="18" charset="0"/>
+                <a:cs typeface="Times New Roman" panose="02020603050405020304" pitchFamily="18" charset="0"/>
+              </a:rPr>
+              <a:t>single </a:t>
+            </a:r>
+            <a:r>
+              <a:rPr lang="en-US" altLang="zh-CN" dirty="0" err="1">
+                <a:solidFill>
+                  <a:srgbClr val="FF0000"/>
+                </a:solidFill>
+                <a:latin typeface="Times New Roman" panose="02020603050405020304" pitchFamily="18" charset="0"/>
+                <a:cs typeface="Times New Roman" panose="02020603050405020304" pitchFamily="18" charset="0"/>
+              </a:rPr>
+              <a:t>threadblock</a:t>
+            </a:r>
+            <a:r>
+              <a:rPr lang="en-US" altLang="zh-CN" dirty="0">
+                <a:latin typeface="Times New Roman" panose="02020603050405020304" pitchFamily="18" charset="0"/>
+                <a:cs typeface="Times New Roman" panose="02020603050405020304" pitchFamily="18" charset="0"/>
+              </a:rPr>
+              <a:t>. </a:t>
+            </a:r>
+            <a:r>
+              <a:rPr lang="en-US" altLang="zh-CN" dirty="0">
+                <a:solidFill>
+                  <a:srgbClr val="FF0000"/>
+                </a:solidFill>
+                <a:latin typeface="Times New Roman" panose="02020603050405020304" pitchFamily="18" charset="0"/>
+                <a:cs typeface="Times New Roman" panose="02020603050405020304" pitchFamily="18" charset="0"/>
+              </a:rPr>
+              <a:t>All threads in a </a:t>
+            </a:r>
+            <a:r>
+              <a:rPr lang="en-US" altLang="zh-CN" dirty="0" err="1">
+                <a:solidFill>
+                  <a:srgbClr val="FF0000"/>
+                </a:solidFill>
+                <a:latin typeface="Times New Roman" panose="02020603050405020304" pitchFamily="18" charset="0"/>
+                <a:cs typeface="Times New Roman" panose="02020603050405020304" pitchFamily="18" charset="0"/>
+              </a:rPr>
+              <a:t>threadblock</a:t>
+            </a:r>
+            <a:r>
+              <a:rPr lang="en-US" altLang="zh-CN" dirty="0">
+                <a:solidFill>
+                  <a:srgbClr val="FF0000"/>
+                </a:solidFill>
+                <a:latin typeface="Times New Roman" panose="02020603050405020304" pitchFamily="18" charset="0"/>
+                <a:cs typeface="Times New Roman" panose="02020603050405020304" pitchFamily="18" charset="0"/>
+              </a:rPr>
+              <a:t> </a:t>
+            </a:r>
+            <a:r>
+              <a:rPr lang="en-US" altLang="zh-CN" dirty="0">
+                <a:latin typeface="Times New Roman" panose="02020603050405020304" pitchFamily="18" charset="0"/>
+                <a:cs typeface="Times New Roman" panose="02020603050405020304" pitchFamily="18" charset="0"/>
+              </a:rPr>
+              <a:t>must </a:t>
+            </a:r>
+            <a:r>
+              <a:rPr lang="en-US" altLang="zh-CN" dirty="0">
+                <a:solidFill>
+                  <a:srgbClr val="FF0000"/>
+                </a:solidFill>
+                <a:latin typeface="Times New Roman" panose="02020603050405020304" pitchFamily="18" charset="0"/>
+                <a:cs typeface="Times New Roman" panose="02020603050405020304" pitchFamily="18" charset="0"/>
+              </a:rPr>
+              <a:t>invoke</a:t>
+            </a:r>
+            <a:r>
+              <a:rPr lang="en-US" altLang="zh-CN" dirty="0">
+                <a:latin typeface="Times New Roman" panose="02020603050405020304" pitchFamily="18" charset="0"/>
+                <a:cs typeface="Times New Roman" panose="02020603050405020304" pitchFamily="18" charset="0"/>
+              </a:rPr>
+              <a:t> the </a:t>
+            </a:r>
+            <a:r>
+              <a:rPr lang="en-US" altLang="zh-CN" dirty="0">
+                <a:solidFill>
+                  <a:srgbClr val="FF0000"/>
+                </a:solidFill>
+                <a:latin typeface="Times New Roman" panose="02020603050405020304" pitchFamily="18" charset="0"/>
+                <a:cs typeface="Times New Roman" panose="02020603050405020304" pitchFamily="18" charset="0"/>
+              </a:rPr>
+              <a:t>same </a:t>
+            </a:r>
+            <a:r>
+              <a:rPr lang="en-US" altLang="zh-CN" dirty="0" err="1">
+                <a:solidFill>
+                  <a:srgbClr val="FF0000"/>
+                </a:solidFill>
+                <a:latin typeface="Times New Roman" panose="02020603050405020304" pitchFamily="18" charset="0"/>
+                <a:cs typeface="Times New Roman" panose="02020603050405020304" pitchFamily="18" charset="0"/>
+              </a:rPr>
+              <a:t>GPUnet</a:t>
+            </a:r>
+            <a:r>
+              <a:rPr lang="en-US" altLang="zh-CN" dirty="0">
+                <a:solidFill>
+                  <a:srgbClr val="FF0000"/>
+                </a:solidFill>
+                <a:latin typeface="Times New Roman" panose="02020603050405020304" pitchFamily="18" charset="0"/>
+                <a:cs typeface="Times New Roman" panose="02020603050405020304" pitchFamily="18" charset="0"/>
+              </a:rPr>
+              <a:t> call</a:t>
+            </a:r>
+            <a:r>
+              <a:rPr lang="en-US" altLang="zh-CN" dirty="0">
+                <a:latin typeface="Times New Roman" panose="02020603050405020304" pitchFamily="18" charset="0"/>
+                <a:cs typeface="Times New Roman" panose="02020603050405020304" pitchFamily="18" charset="0"/>
+              </a:rPr>
+              <a:t> together </a:t>
+            </a:r>
+            <a:r>
+              <a:rPr lang="en-US" altLang="zh-CN" dirty="0" smtClean="0">
+                <a:latin typeface="Times New Roman" panose="02020603050405020304" pitchFamily="18" charset="0"/>
+                <a:cs typeface="Times New Roman" panose="02020603050405020304" pitchFamily="18" charset="0"/>
+              </a:rPr>
+              <a:t>in a </a:t>
+            </a:r>
+            <a:r>
+              <a:rPr lang="en-US" altLang="zh-CN" dirty="0">
+                <a:latin typeface="Times New Roman" panose="02020603050405020304" pitchFamily="18" charset="0"/>
+                <a:cs typeface="Times New Roman" panose="02020603050405020304" pitchFamily="18" charset="0"/>
+              </a:rPr>
+              <a:t>coalesced </a:t>
+            </a:r>
+            <a:r>
+              <a:rPr lang="en-US" altLang="zh-CN" dirty="0" smtClean="0">
+                <a:latin typeface="Times New Roman" panose="02020603050405020304" pitchFamily="18" charset="0"/>
+                <a:cs typeface="Times New Roman" panose="02020603050405020304" pitchFamily="18" charset="0"/>
+              </a:rPr>
+              <a:t>manner</a:t>
+            </a:r>
+          </a:p>
+          <a:p>
+            <a:pPr lvl="1"/>
+            <a:r>
+              <a:rPr lang="en-US" altLang="zh-CN" dirty="0">
+                <a:latin typeface="Times New Roman" panose="02020603050405020304" pitchFamily="18" charset="0"/>
+                <a:cs typeface="Times New Roman" panose="02020603050405020304" pitchFamily="18" charset="0"/>
+              </a:rPr>
+              <a:t>A traditional </a:t>
+            </a:r>
+            <a:r>
+              <a:rPr lang="en-US" altLang="zh-CN" dirty="0">
+                <a:solidFill>
+                  <a:srgbClr val="FF0000"/>
+                </a:solidFill>
+                <a:latin typeface="Times New Roman" panose="02020603050405020304" pitchFamily="18" charset="0"/>
+                <a:cs typeface="Times New Roman" panose="02020603050405020304" pitchFamily="18" charset="0"/>
+              </a:rPr>
+              <a:t>CPU network </a:t>
+            </a:r>
+            <a:r>
+              <a:rPr lang="en-US" altLang="zh-CN" dirty="0">
+                <a:latin typeface="Times New Roman" panose="02020603050405020304" pitchFamily="18" charset="0"/>
+                <a:cs typeface="Times New Roman" panose="02020603050405020304" pitchFamily="18" charset="0"/>
+              </a:rPr>
+              <a:t>API is </a:t>
+            </a:r>
+            <a:r>
+              <a:rPr lang="en-US" altLang="zh-CN" dirty="0">
+                <a:solidFill>
+                  <a:srgbClr val="FF0000"/>
+                </a:solidFill>
+                <a:latin typeface="Times New Roman" panose="02020603050405020304" pitchFamily="18" charset="0"/>
+                <a:cs typeface="Times New Roman" panose="02020603050405020304" pitchFamily="18" charset="0"/>
+              </a:rPr>
+              <a:t>single threaded</a:t>
+            </a:r>
+            <a:r>
+              <a:rPr lang="en-US" altLang="zh-CN" dirty="0">
+                <a:latin typeface="Times New Roman" panose="02020603050405020304" pitchFamily="18" charset="0"/>
+                <a:cs typeface="Times New Roman" panose="02020603050405020304" pitchFamily="18" charset="0"/>
+              </a:rPr>
+              <a:t>—that is,</a:t>
+            </a:r>
+            <a:br>
+              <a:rPr lang="en-US" altLang="zh-CN" dirty="0">
+                <a:latin typeface="Times New Roman" panose="02020603050405020304" pitchFamily="18" charset="0"/>
+                <a:cs typeface="Times New Roman" panose="02020603050405020304" pitchFamily="18" charset="0"/>
+              </a:rPr>
+            </a:br>
+            <a:r>
+              <a:rPr lang="en-US" altLang="zh-CN" dirty="0">
+                <a:solidFill>
+                  <a:srgbClr val="FF0000"/>
+                </a:solidFill>
+                <a:latin typeface="Times New Roman" panose="02020603050405020304" pitchFamily="18" charset="0"/>
+                <a:cs typeface="Times New Roman" panose="02020603050405020304" pitchFamily="18" charset="0"/>
+              </a:rPr>
+              <a:t>each thread </a:t>
+            </a:r>
+            <a:r>
+              <a:rPr lang="en-US" altLang="zh-CN" dirty="0">
+                <a:latin typeface="Times New Roman" panose="02020603050405020304" pitchFamily="18" charset="0"/>
+                <a:cs typeface="Times New Roman" panose="02020603050405020304" pitchFamily="18" charset="0"/>
+              </a:rPr>
+              <a:t>can make </a:t>
+            </a:r>
+            <a:r>
+              <a:rPr lang="en-US" altLang="zh-CN" dirty="0">
+                <a:solidFill>
+                  <a:srgbClr val="FF0000"/>
+                </a:solidFill>
+                <a:latin typeface="Times New Roman" panose="02020603050405020304" pitchFamily="18" charset="0"/>
+                <a:cs typeface="Times New Roman" panose="02020603050405020304" pitchFamily="18" charset="0"/>
+              </a:rPr>
+              <a:t>independent API calls </a:t>
+            </a:r>
+            <a:r>
+              <a:rPr lang="en-US" altLang="zh-CN" dirty="0">
+                <a:latin typeface="Times New Roman" panose="02020603050405020304" pitchFamily="18" charset="0"/>
+                <a:cs typeface="Times New Roman" panose="02020603050405020304" pitchFamily="18" charset="0"/>
+              </a:rPr>
+              <a:t>and receive independent results. </a:t>
+            </a:r>
+            <a:r>
+              <a:rPr lang="en-US" altLang="zh-CN" dirty="0"/>
+              <a:t/>
+            </a:r>
+            <a:br>
+              <a:rPr lang="en-US" altLang="zh-CN" dirty="0"/>
+            </a:br>
+            <a:endParaRPr lang="en-US" altLang="zh-CN" dirty="0" smtClean="0">
+              <a:latin typeface="Times New Roman" panose="02020603050405020304" pitchFamily="18" charset="0"/>
+              <a:cs typeface="Times New Roman" panose="02020603050405020304" pitchFamily="18" charset="0"/>
+            </a:endParaRPr>
+          </a:p>
+          <a:p>
+            <a:pPr lvl="1"/>
+            <a:endParaRPr lang="zh-CN" altLang="en-US" dirty="0">
+              <a:latin typeface="Times New Roman" panose="02020603050405020304" pitchFamily="18" charset="0"/>
+              <a:cs typeface="Times New Roman" panose="02020603050405020304" pitchFamily="18" charset="0"/>
+            </a:endParaRPr>
+          </a:p>
+        </p:txBody>
+      </p:sp>
+    </p:spTree>
+    <p:extLst>
+      <p:ext uri="{BB962C8B-B14F-4D97-AF65-F5344CB8AC3E}">
+        <p14:creationId xmlns:p14="http://schemas.microsoft.com/office/powerpoint/2010/main" val="3005564297"/>
+      </p:ext>
+    </p:extLst>
+  </p:cSld>
+  <p:clrMapOvr>
+    <a:masterClrMapping/>
+  </p:clrMapOvr>
+  <p:timing>
+    <p:tnLst>
+      <p:par>
+        <p:cTn id="1" dur="indefinite" restart="never" nodeType="tmRoot"/>
+      </p:par>
+    </p:tnLst>
+  </p:timing>
+</p:sld>
+</file>
+
+<file path=ppt/slides/slide21.xml><?xml version="1.0" encoding="utf-8"?>
+<p:sld xmlns:a="http://schemas.openxmlformats.org/drawingml/2006/main" xmlns:r="http://schemas.openxmlformats.org/officeDocument/2006/relationships" xmlns:p="http://schemas.openxmlformats.org/presentationml/2006/main">
+  <p:cSld>
+    <p:spTree>
+      <p:nvGrpSpPr>
+        <p:cNvPr id="1" name=""/>
+        <p:cNvGrpSpPr/>
+        <p:nvPr/>
+      </p:nvGrpSpPr>
+      <p:grpSpPr>
+        <a:xfrm>
+          <a:off x="0" y="0"/>
+          <a:ext cx="0" cy="0"/>
+          <a:chOff x="0" y="0"/>
+          <a:chExt cx="0" cy="0"/>
+        </a:xfrm>
+      </p:grpSpPr>
+      <p:sp>
+        <p:nvSpPr>
+          <p:cNvPr id="5122" name="标题 1">
+            <a:extLst>
+              <a:ext uri="{FF2B5EF4-FFF2-40B4-BE49-F238E27FC236}">
+                <a16:creationId xmlns="" xmlns:a16="http://schemas.microsoft.com/office/drawing/2014/main" id="{A237414D-C4E1-407F-9B0D-585D2D878A74}"/>
               </a:ext>
             </a:extLst>
           </p:cNvPr>
@@ -20357,14 +21400,7 @@
                 <a:latin typeface="Times New Roman" panose="02020603050405020304" pitchFamily="18" charset="0"/>
                 <a:cs typeface="Times New Roman" panose="02020603050405020304" pitchFamily="18" charset="0"/>
               </a:rPr>
-              <a:t> </a:t>
-            </a:r>
-            <a:r>
-              <a:rPr lang="en-US" altLang="zh-CN" dirty="0" smtClean="0">
-                <a:latin typeface="Times New Roman" panose="02020603050405020304" pitchFamily="18" charset="0"/>
-                <a:cs typeface="Times New Roman" panose="02020603050405020304" pitchFamily="18" charset="0"/>
-              </a:rPr>
-              <a:t>Design</a:t>
+              <a:t> Design</a:t>
             </a:r>
             <a:endParaRPr lang="en-US" altLang="zh-CN" dirty="0">
               <a:latin typeface="Times New Roman" panose="02020603050405020304" pitchFamily="18" charset="0"/>
@@ -20396,7 +21432,7 @@
               <a:pPr>
                 <a:defRPr/>
               </a:pPr>
-              <a:t>20</a:t>
+              <a:t>21</a:t>
             </a:fld>
             <a:endParaRPr lang="en-US" altLang="zh-CN" dirty="0"/>
           </a:p>
@@ -20928,7 +21964,7 @@
 </p:sld>
 </file>
 
-<file path=ppt/slides/slide21.xml><?xml version="1.0" encoding="utf-8"?>
+<file path=ppt/slides/slide22.xml><?xml version="1.0" encoding="utf-8"?>
 <p:sld xmlns:a="http://schemas.openxmlformats.org/drawingml/2006/main" xmlns:r="http://schemas.openxmlformats.org/officeDocument/2006/relationships" xmlns:p="http://schemas.openxmlformats.org/presentationml/2006/main">
   <p:cSld>
     <p:spTree>
@@ -20950,7 +21986,7 @@
           <p:cNvPr id="5122" name="标题 1">
             <a:extLst>
               <a:ext uri="{FF2B5EF4-FFF2-40B4-BE49-F238E27FC236}">
-                <a16:creationId xmlns:a16="http://schemas.microsoft.com/office/drawing/2014/main" xmlns="" id="{A237414D-C4E1-407F-9B0D-585D2D878A74}"/>
+                <a16:creationId xmlns="" xmlns:a16="http://schemas.microsoft.com/office/drawing/2014/main" id="{A237414D-C4E1-407F-9B0D-585D2D878A74}"/>
               </a:ext>
             </a:extLst>
           </p:cNvPr>
@@ -20983,14 +22019,7 @@
                 <a:latin typeface="Times New Roman" panose="02020603050405020304" pitchFamily="18" charset="0"/>
                 <a:cs typeface="Times New Roman" panose="02020603050405020304" pitchFamily="18" charset="0"/>
               </a:rPr>
-              <a:t> </a:t>
-            </a:r>
-            <a:r>
-              <a:rPr lang="en-US" altLang="zh-CN" dirty="0" smtClean="0">
-                <a:latin typeface="Times New Roman" panose="02020603050405020304" pitchFamily="18" charset="0"/>
-                <a:cs typeface="Times New Roman" panose="02020603050405020304" pitchFamily="18" charset="0"/>
-              </a:rPr>
-              <a:t>Design</a:t>
+              <a:t> Design</a:t>
             </a:r>
             <a:endParaRPr lang="en-US" altLang="zh-CN" dirty="0">
               <a:latin typeface="Times New Roman" panose="02020603050405020304" pitchFamily="18" charset="0"/>
@@ -21022,7 +22051,7 @@
               <a:pPr>
                 <a:defRPr/>
               </a:pPr>
-              <a:t>21</a:t>
+              <a:t>22</a:t>
             </a:fld>
             <a:endParaRPr lang="en-US" altLang="zh-CN" dirty="0"/>
           </a:p>
@@ -21116,7 +22145,7 @@
 </p:sld>
 </file>
 
-<file path=ppt/slides/slide22.xml><?xml version="1.0" encoding="utf-8"?>
+<file path=ppt/slides/slide23.xml><?xml version="1.0" encoding="utf-8"?>
 <p:sld xmlns:a="http://schemas.openxmlformats.org/drawingml/2006/main" xmlns:r="http://schemas.openxmlformats.org/officeDocument/2006/relationships" xmlns:p="http://schemas.openxmlformats.org/presentationml/2006/main">
   <p:cSld>
     <p:spTree>
@@ -21138,7 +22167,7 @@
           <p:cNvPr id="5122" name="标题 1">
             <a:extLst>
               <a:ext uri="{FF2B5EF4-FFF2-40B4-BE49-F238E27FC236}">
-                <a16:creationId xmlns:a16="http://schemas.microsoft.com/office/drawing/2014/main" xmlns="" id="{A237414D-C4E1-407F-9B0D-585D2D878A74}"/>
+                <a16:creationId xmlns="" xmlns:a16="http://schemas.microsoft.com/office/drawing/2014/main" id="{A237414D-C4E1-407F-9B0D-585D2D878A74}"/>
               </a:ext>
             </a:extLst>
           </p:cNvPr>
@@ -21171,14 +22200,7 @@
                 <a:latin typeface="Times New Roman" panose="02020603050405020304" pitchFamily="18" charset="0"/>
                 <a:cs typeface="Times New Roman" panose="02020603050405020304" pitchFamily="18" charset="0"/>
               </a:rPr>
-              <a:t> </a:t>
-            </a:r>
-            <a:r>
-              <a:rPr lang="en-US" altLang="zh-CN" dirty="0" smtClean="0">
-                <a:latin typeface="Times New Roman" panose="02020603050405020304" pitchFamily="18" charset="0"/>
-                <a:cs typeface="Times New Roman" panose="02020603050405020304" pitchFamily="18" charset="0"/>
-              </a:rPr>
-              <a:t>Design</a:t>
+              <a:t> Design</a:t>
             </a:r>
             <a:endParaRPr lang="en-US" altLang="zh-CN" dirty="0">
               <a:latin typeface="Times New Roman" panose="02020603050405020304" pitchFamily="18" charset="0"/>
@@ -21210,7 +22232,7 @@
               <a:pPr>
                 <a:defRPr/>
               </a:pPr>
-              <a:t>22</a:t>
+              <a:t>23</a:t>
             </a:fld>
             <a:endParaRPr lang="en-US" altLang="zh-CN" dirty="0"/>
           </a:p>
@@ -21280,14 +22302,7 @@
                 <a:latin typeface="Times New Roman" panose="02020603050405020304" pitchFamily="18" charset="0"/>
                 <a:cs typeface="Times New Roman" panose="02020603050405020304" pitchFamily="18" charset="0"/>
               </a:rPr>
-              <a:t> </a:t>
-            </a:r>
-            <a:r>
-              <a:rPr lang="en-US" altLang="zh-CN" sz="3200" b="1" dirty="0" smtClean="0">
-                <a:latin typeface="Times New Roman" panose="02020603050405020304" pitchFamily="18" charset="0"/>
-                <a:cs typeface="Times New Roman" panose="02020603050405020304" pitchFamily="18" charset="0"/>
-              </a:rPr>
-              <a:t>Network Stack</a:t>
+              <a:t> Network Stack</a:t>
             </a:r>
             <a:endParaRPr lang="zh-CN" altLang="en-US" sz="3200" b="1" dirty="0">
               <a:latin typeface="Times New Roman" panose="02020603050405020304" pitchFamily="18" charset="0"/>
@@ -21543,7 +22558,7 @@
 </p:sld>
 </file>
 
-<file path=ppt/slides/slide23.xml><?xml version="1.0" encoding="utf-8"?>
+<file path=ppt/slides/slide24.xml><?xml version="1.0" encoding="utf-8"?>
 <p:sld xmlns:a="http://schemas.openxmlformats.org/drawingml/2006/main" xmlns:r="http://schemas.openxmlformats.org/officeDocument/2006/relationships" xmlns:p="http://schemas.openxmlformats.org/presentationml/2006/main">
   <p:cSld>
     <p:spTree>
@@ -21565,7 +22580,7 @@
           <p:cNvPr id="5122" name="标题 1">
             <a:extLst>
               <a:ext uri="{FF2B5EF4-FFF2-40B4-BE49-F238E27FC236}">
-                <a16:creationId xmlns:a16="http://schemas.microsoft.com/office/drawing/2014/main" xmlns="" id="{A237414D-C4E1-407F-9B0D-585D2D878A74}"/>
+                <a16:creationId xmlns="" xmlns:a16="http://schemas.microsoft.com/office/drawing/2014/main" id="{A237414D-C4E1-407F-9B0D-585D2D878A74}"/>
               </a:ext>
             </a:extLst>
           </p:cNvPr>
@@ -21605,7 +22620,7 @@
           <p:cNvPr id="3" name="内容占位符 2">
             <a:extLst>
               <a:ext uri="{FF2B5EF4-FFF2-40B4-BE49-F238E27FC236}">
-                <a16:creationId xmlns:a16="http://schemas.microsoft.com/office/drawing/2014/main" xmlns="" id="{3DFD56C3-3B63-4F4C-A455-80D220434928}"/>
+                <a16:creationId xmlns="" xmlns:a16="http://schemas.microsoft.com/office/drawing/2014/main" id="{3DFD56C3-3B63-4F4C-A455-80D220434928}"/>
               </a:ext>
             </a:extLst>
           </p:cNvPr>
@@ -21681,14 +22696,7 @@
                 <a:latin typeface="Times New Roman" panose="02020603050405020304" pitchFamily="18" charset="0"/>
                 <a:cs typeface="Times New Roman" panose="02020603050405020304" pitchFamily="18" charset="0"/>
               </a:rPr>
-              <a:t> </a:t>
-            </a:r>
-            <a:r>
-              <a:rPr lang="en-US" altLang="zh-CN" b="1" dirty="0" smtClean="0">
-                <a:latin typeface="Times New Roman" panose="02020603050405020304" pitchFamily="18" charset="0"/>
-                <a:cs typeface="Times New Roman" panose="02020603050405020304" pitchFamily="18" charset="0"/>
-              </a:rPr>
-              <a:t>Design</a:t>
+              <a:t> Design</a:t>
             </a:r>
             <a:endParaRPr lang="en-US" altLang="zh-CN" b="1" dirty="0">
               <a:latin typeface="Times New Roman" panose="02020603050405020304" pitchFamily="18" charset="0"/>
@@ -21761,7 +22769,7 @@
               <a:pPr>
                 <a:defRPr/>
               </a:pPr>
-              <a:t>23</a:t>
+              <a:t>24</a:t>
             </a:fld>
             <a:endParaRPr lang="en-US" altLang="zh-CN" dirty="0"/>
           </a:p>
@@ -21966,7 +22974,7 @@
 </p:sld>
 </file>
 
-<file path=ppt/slides/slide24.xml><?xml version="1.0" encoding="utf-8"?>
+<file path=ppt/slides/slide25.xml><?xml version="1.0" encoding="utf-8"?>
 <p:sld xmlns:a="http://schemas.openxmlformats.org/drawingml/2006/main" xmlns:r="http://schemas.openxmlformats.org/officeDocument/2006/relationships" xmlns:p="http://schemas.openxmlformats.org/presentationml/2006/main">
   <p:cSld>
     <p:spTree>
@@ -21988,7 +22996,7 @@
           <p:cNvPr id="5122" name="标题 1">
             <a:extLst>
               <a:ext uri="{FF2B5EF4-FFF2-40B4-BE49-F238E27FC236}">
-                <a16:creationId xmlns:a16="http://schemas.microsoft.com/office/drawing/2014/main" xmlns="" id="{A237414D-C4E1-407F-9B0D-585D2D878A74}"/>
+                <a16:creationId xmlns="" xmlns:a16="http://schemas.microsoft.com/office/drawing/2014/main" id="{A237414D-C4E1-407F-9B0D-585D2D878A74}"/>
               </a:ext>
             </a:extLst>
           </p:cNvPr>
@@ -22024,7 +23032,7 @@
           <p:cNvPr id="3" name="内容占位符 2">
             <a:extLst>
               <a:ext uri="{FF2B5EF4-FFF2-40B4-BE49-F238E27FC236}">
-                <a16:creationId xmlns:a16="http://schemas.microsoft.com/office/drawing/2014/main" xmlns="" id="{3DFD56C3-3B63-4F4C-A455-80D220434928}"/>
+                <a16:creationId xmlns="" xmlns:a16="http://schemas.microsoft.com/office/drawing/2014/main" id="{3DFD56C3-3B63-4F4C-A455-80D220434928}"/>
               </a:ext>
             </a:extLst>
           </p:cNvPr>
@@ -22092,7 +23100,7 @@
               <a:pPr>
                 <a:defRPr/>
               </a:pPr>
-              <a:t>24</a:t>
+              <a:t>25</a:t>
             </a:fld>
             <a:endParaRPr lang="en-US" altLang="zh-CN" dirty="0"/>
           </a:p>
@@ -22183,7 +23191,7 @@
 </p:sld>
 </file>
 
-<file path=ppt/slides/slide25.xml><?xml version="1.0" encoding="utf-8"?>
+<file path=ppt/slides/slide26.xml><?xml version="1.0" encoding="utf-8"?>
 <p:sld xmlns:a="http://schemas.openxmlformats.org/drawingml/2006/main" xmlns:r="http://schemas.openxmlformats.org/officeDocument/2006/relationships" xmlns:p="http://schemas.openxmlformats.org/presentationml/2006/main">
   <p:cSld>
     <p:spTree>
@@ -22205,7 +23213,7 @@
           <p:cNvPr id="5122" name="标题 1">
             <a:extLst>
               <a:ext uri="{FF2B5EF4-FFF2-40B4-BE49-F238E27FC236}">
-                <a16:creationId xmlns:a16="http://schemas.microsoft.com/office/drawing/2014/main" xmlns="" id="{A237414D-C4E1-407F-9B0D-585D2D878A74}"/>
+                <a16:creationId xmlns="" xmlns:a16="http://schemas.microsoft.com/office/drawing/2014/main" id="{A237414D-C4E1-407F-9B0D-585D2D878A74}"/>
               </a:ext>
             </a:extLst>
           </p:cNvPr>
@@ -22241,7 +23249,7 @@
           <p:cNvPr id="3" name="内容占位符 2">
             <a:extLst>
               <a:ext uri="{FF2B5EF4-FFF2-40B4-BE49-F238E27FC236}">
-                <a16:creationId xmlns:a16="http://schemas.microsoft.com/office/drawing/2014/main" xmlns="" id="{3DFD56C3-3B63-4F4C-A455-80D220434928}"/>
+                <a16:creationId xmlns="" xmlns:a16="http://schemas.microsoft.com/office/drawing/2014/main" id="{3DFD56C3-3B63-4F4C-A455-80D220434928}"/>
               </a:ext>
             </a:extLst>
           </p:cNvPr>
@@ -22299,7 +23307,7 @@
               <a:pPr>
                 <a:defRPr/>
               </a:pPr>
-              <a:t>25</a:t>
+              <a:t>26</a:t>
             </a:fld>
             <a:endParaRPr lang="en-US" altLang="zh-CN" dirty="0"/>
           </a:p>
@@ -22373,7 +23381,7 @@
 </p:sld>
 </file>
 
-<file path=ppt/slides/slide26.xml><?xml version="1.0" encoding="utf-8"?>
+<file path=ppt/slides/slide27.xml><?xml version="1.0" encoding="utf-8"?>
 <p:sld xmlns:a="http://schemas.openxmlformats.org/drawingml/2006/main" xmlns:r="http://schemas.openxmlformats.org/officeDocument/2006/relationships" xmlns:p="http://schemas.openxmlformats.org/presentationml/2006/main">
   <p:cSld>
     <p:spTree>
@@ -22395,7 +23403,7 @@
           <p:cNvPr id="5122" name="标题 1">
             <a:extLst>
               <a:ext uri="{FF2B5EF4-FFF2-40B4-BE49-F238E27FC236}">
-                <a16:creationId xmlns:a16="http://schemas.microsoft.com/office/drawing/2014/main" xmlns="" id="{A237414D-C4E1-407F-9B0D-585D2D878A74}"/>
+                <a16:creationId xmlns="" xmlns:a16="http://schemas.microsoft.com/office/drawing/2014/main" id="{A237414D-C4E1-407F-9B0D-585D2D878A74}"/>
               </a:ext>
             </a:extLst>
           </p:cNvPr>
@@ -22431,7 +23439,7 @@
           <p:cNvPr id="3" name="内容占位符 2">
             <a:extLst>
               <a:ext uri="{FF2B5EF4-FFF2-40B4-BE49-F238E27FC236}">
-                <a16:creationId xmlns:a16="http://schemas.microsoft.com/office/drawing/2014/main" xmlns="" id="{3DFD56C3-3B63-4F4C-A455-80D220434928}"/>
+                <a16:creationId xmlns="" xmlns:a16="http://schemas.microsoft.com/office/drawing/2014/main" id="{3DFD56C3-3B63-4F4C-A455-80D220434928}"/>
               </a:ext>
             </a:extLst>
           </p:cNvPr>
@@ -22489,7 +23497,7 @@
               <a:pPr>
                 <a:defRPr/>
               </a:pPr>
-              <a:t>26</a:t>
+              <a:t>27</a:t>
             </a:fld>
             <a:endParaRPr lang="en-US" altLang="zh-CN" dirty="0"/>
           </a:p>
@@ -22636,7 +23644,7 @@
 </p:sld>
 </file>
 
-<file path=ppt/slides/slide27.xml><?xml version="1.0" encoding="utf-8"?>
+<file path=ppt/slides/slide28.xml><?xml version="1.0" encoding="utf-8"?>
 <p:sld xmlns:a="http://schemas.openxmlformats.org/drawingml/2006/main" xmlns:r="http://schemas.openxmlformats.org/officeDocument/2006/relationships" xmlns:p="http://schemas.openxmlformats.org/presentationml/2006/main">
   <p:cSld>
     <p:spTree>
@@ -22658,7 +23666,7 @@
           <p:cNvPr id="5122" name="标题 1">
             <a:extLst>
               <a:ext uri="{FF2B5EF4-FFF2-40B4-BE49-F238E27FC236}">
-                <a16:creationId xmlns:a16="http://schemas.microsoft.com/office/drawing/2014/main" xmlns="" id="{A237414D-C4E1-407F-9B0D-585D2D878A74}"/>
+                <a16:creationId xmlns="" xmlns:a16="http://schemas.microsoft.com/office/drawing/2014/main" id="{A237414D-C4E1-407F-9B0D-585D2D878A74}"/>
               </a:ext>
             </a:extLst>
           </p:cNvPr>
@@ -22698,7 +23706,7 @@
           <p:cNvPr id="3" name="内容占位符 2">
             <a:extLst>
               <a:ext uri="{FF2B5EF4-FFF2-40B4-BE49-F238E27FC236}">
-                <a16:creationId xmlns:a16="http://schemas.microsoft.com/office/drawing/2014/main" xmlns="" id="{3DFD56C3-3B63-4F4C-A455-80D220434928}"/>
+                <a16:creationId xmlns="" xmlns:a16="http://schemas.microsoft.com/office/drawing/2014/main" id="{3DFD56C3-3B63-4F4C-A455-80D220434928}"/>
               </a:ext>
             </a:extLst>
           </p:cNvPr>
@@ -22774,14 +23782,7 @@
                 <a:latin typeface="Times New Roman" panose="02020603050405020304" pitchFamily="18" charset="0"/>
                 <a:cs typeface="Times New Roman" panose="02020603050405020304" pitchFamily="18" charset="0"/>
               </a:rPr>
-              <a:t> </a:t>
-            </a:r>
-            <a:r>
-              <a:rPr lang="en-US" altLang="zh-CN" b="1" dirty="0" smtClean="0">
-                <a:latin typeface="Times New Roman" panose="02020603050405020304" pitchFamily="18" charset="0"/>
-                <a:cs typeface="Times New Roman" panose="02020603050405020304" pitchFamily="18" charset="0"/>
-              </a:rPr>
-              <a:t>Design</a:t>
+              <a:t> Design</a:t>
             </a:r>
             <a:endParaRPr lang="en-US" altLang="zh-CN" b="1" dirty="0">
               <a:latin typeface="Times New Roman" panose="02020603050405020304" pitchFamily="18" charset="0"/>
@@ -22854,7 +23855,7 @@
               <a:pPr>
                 <a:defRPr/>
               </a:pPr>
-              <a:t>27</a:t>
+              <a:t>28</a:t>
             </a:fld>
             <a:endParaRPr lang="en-US" altLang="zh-CN" dirty="0"/>
           </a:p>
@@ -23059,7 +24060,7 @@
 </p:sld>
 </file>
 
-<file path=ppt/slides/slide28.xml><?xml version="1.0" encoding="utf-8"?>
+<file path=ppt/slides/slide29.xml><?xml version="1.0" encoding="utf-8"?>
 <p:sld xmlns:a="http://schemas.openxmlformats.org/drawingml/2006/main" xmlns:r="http://schemas.openxmlformats.org/officeDocument/2006/relationships" xmlns:p="http://schemas.openxmlformats.org/presentationml/2006/main">
   <p:cSld>
     <p:spTree>
@@ -23081,7 +24082,7 @@
           <p:cNvPr id="5122" name="标题 1">
             <a:extLst>
               <a:ext uri="{FF2B5EF4-FFF2-40B4-BE49-F238E27FC236}">
-                <a16:creationId xmlns:a16="http://schemas.microsoft.com/office/drawing/2014/main" xmlns="" id="{A237414D-C4E1-407F-9B0D-585D2D878A74}"/>
+                <a16:creationId xmlns="" xmlns:a16="http://schemas.microsoft.com/office/drawing/2014/main" id="{A237414D-C4E1-407F-9B0D-585D2D878A74}"/>
               </a:ext>
             </a:extLst>
           </p:cNvPr>
@@ -23121,7 +24122,7 @@
           <p:cNvPr id="3" name="内容占位符 2">
             <a:extLst>
               <a:ext uri="{FF2B5EF4-FFF2-40B4-BE49-F238E27FC236}">
-                <a16:creationId xmlns:a16="http://schemas.microsoft.com/office/drawing/2014/main" xmlns="" id="{3DFD56C3-3B63-4F4C-A455-80D220434928}"/>
+                <a16:creationId xmlns="" xmlns:a16="http://schemas.microsoft.com/office/drawing/2014/main" id="{3DFD56C3-3B63-4F4C-A455-80D220434928}"/>
               </a:ext>
             </a:extLst>
           </p:cNvPr>
@@ -23366,7 +24367,7 @@
               <a:pPr>
                 <a:defRPr/>
               </a:pPr>
-              <a:t>28</a:t>
+              <a:t>29</a:t>
             </a:fld>
             <a:endParaRPr lang="en-US" altLang="zh-CN" dirty="0"/>
           </a:p>
@@ -23414,7 +24415,7 @@
           <p:cNvPr id="5122" name="标题 1">
             <a:extLst>
               <a:ext uri="{FF2B5EF4-FFF2-40B4-BE49-F238E27FC236}">
-                <a16:creationId xmlns:a16="http://schemas.microsoft.com/office/drawing/2014/main" xmlns="" id="{A237414D-C4E1-407F-9B0D-585D2D878A74}"/>
+                <a16:creationId xmlns="" xmlns:a16="http://schemas.microsoft.com/office/drawing/2014/main" id="{A237414D-C4E1-407F-9B0D-585D2D878A74}"/>
               </a:ext>
             </a:extLst>
           </p:cNvPr>
@@ -23454,7 +24455,7 @@
           <p:cNvPr id="3" name="内容占位符 2">
             <a:extLst>
               <a:ext uri="{FF2B5EF4-FFF2-40B4-BE49-F238E27FC236}">
-                <a16:creationId xmlns:a16="http://schemas.microsoft.com/office/drawing/2014/main" xmlns="" id="{3DFD56C3-3B63-4F4C-A455-80D220434928}"/>
+                <a16:creationId xmlns="" xmlns:a16="http://schemas.microsoft.com/office/drawing/2014/main" id="{3DFD56C3-3B63-4F4C-A455-80D220434928}"/>
               </a:ext>
             </a:extLst>
           </p:cNvPr>
@@ -23530,14 +24531,7 @@
                 <a:latin typeface="Times New Roman" panose="02020603050405020304" pitchFamily="18" charset="0"/>
                 <a:cs typeface="Times New Roman" panose="02020603050405020304" pitchFamily="18" charset="0"/>
               </a:rPr>
-              <a:t> </a:t>
-            </a:r>
-            <a:r>
-              <a:rPr lang="en-US" altLang="zh-CN" b="1" dirty="0" smtClean="0">
-                <a:latin typeface="Times New Roman" panose="02020603050405020304" pitchFamily="18" charset="0"/>
-                <a:cs typeface="Times New Roman" panose="02020603050405020304" pitchFamily="18" charset="0"/>
-              </a:rPr>
-              <a:t>Design</a:t>
+              <a:t> Design</a:t>
             </a:r>
             <a:endParaRPr lang="en-US" altLang="zh-CN" b="1" dirty="0">
               <a:latin typeface="Times New Roman" panose="02020603050405020304" pitchFamily="18" charset="0"/>
@@ -23805,6 +24799,305 @@
 </p:sld>
 </file>
 
+<file path=ppt/slides/slide30.xml><?xml version="1.0" encoding="utf-8"?>
+<p:sld xmlns:a="http://schemas.openxmlformats.org/drawingml/2006/main" xmlns:r="http://schemas.openxmlformats.org/officeDocument/2006/relationships" xmlns:p="http://schemas.openxmlformats.org/presentationml/2006/main">
+  <p:cSld>
+    <p:spTree>
+      <p:nvGrpSpPr>
+        <p:cNvPr id="1" name=""/>
+        <p:cNvGrpSpPr/>
+        <p:nvPr/>
+      </p:nvGrpSpPr>
+      <p:grpSpPr>
+        <a:xfrm>
+          <a:off x="0" y="0"/>
+          <a:ext cx="0" cy="0"/>
+          <a:chOff x="0" y="0"/>
+          <a:chExt cx="0" cy="0"/>
+        </a:xfrm>
+      </p:grpSpPr>
+      <p:sp>
+        <p:nvSpPr>
+          <p:cNvPr id="5122" name="标题 1">
+            <a:extLst>
+              <a:ext uri="{FF2B5EF4-FFF2-40B4-BE49-F238E27FC236}">
+                <a16:creationId xmlns="" xmlns:a16="http://schemas.microsoft.com/office/drawing/2014/main" id="{A237414D-C4E1-407F-9B0D-585D2D878A74}"/>
+              </a:ext>
+            </a:extLst>
+          </p:cNvPr>
+          <p:cNvSpPr>
+            <a:spLocks noGrp="1"/>
+          </p:cNvSpPr>
+          <p:nvPr>
+            <p:ph type="title"/>
+          </p:nvPr>
+        </p:nvSpPr>
+        <p:spPr>
+          <a:xfrm>
+            <a:off x="624417" y="1109091"/>
+            <a:ext cx="10972800" cy="938784"/>
+          </a:xfrm>
+        </p:spPr>
+        <p:txBody>
+          <a:bodyPr/>
+          <a:lstStyle/>
+          <a:p>
+            <a:r>
+              <a:rPr lang="en-US" altLang="zh-CN" dirty="0" smtClean="0">
+                <a:latin typeface="Times New Roman" panose="02020603050405020304" pitchFamily="18" charset="0"/>
+                <a:cs typeface="Times New Roman" panose="02020603050405020304" pitchFamily="18" charset="0"/>
+              </a:rPr>
+              <a:t>Conclusions &amp; Future Work</a:t>
+            </a:r>
+            <a:endParaRPr lang="en-US" altLang="zh-CN" dirty="0">
+              <a:latin typeface="Times New Roman" panose="02020603050405020304" pitchFamily="18" charset="0"/>
+              <a:cs typeface="Times New Roman" panose="02020603050405020304" pitchFamily="18" charset="0"/>
+            </a:endParaRPr>
+          </a:p>
+        </p:txBody>
+      </p:sp>
+      <p:sp>
+        <p:nvSpPr>
+          <p:cNvPr id="3" name="内容占位符 2">
+            <a:extLst>
+              <a:ext uri="{FF2B5EF4-FFF2-40B4-BE49-F238E27FC236}">
+                <a16:creationId xmlns="" xmlns:a16="http://schemas.microsoft.com/office/drawing/2014/main" id="{3DFD56C3-3B63-4F4C-A455-80D220434928}"/>
+              </a:ext>
+            </a:extLst>
+          </p:cNvPr>
+          <p:cNvSpPr>
+            <a:spLocks noGrp="1"/>
+          </p:cNvSpPr>
+          <p:nvPr>
+            <p:ph idx="1"/>
+          </p:nvPr>
+        </p:nvSpPr>
+        <p:spPr>
+          <a:xfrm>
+            <a:off x="813816" y="2047875"/>
+            <a:ext cx="10415016" cy="4270629"/>
+          </a:xfrm>
+        </p:spPr>
+        <p:txBody>
+          <a:bodyPr/>
+          <a:lstStyle/>
+          <a:p>
+            <a:pPr>
+              <a:buFont typeface="Arial" panose="020B0604020202020204" pitchFamily="34" charset="0"/>
+              <a:buChar char="•"/>
+            </a:pPr>
+            <a:r>
+              <a:rPr lang="en-US" altLang="zh-CN" dirty="0">
+                <a:latin typeface="Times New Roman" panose="02020603050405020304" pitchFamily="18" charset="0"/>
+                <a:cs typeface="Times New Roman" panose="02020603050405020304" pitchFamily="18" charset="0"/>
+              </a:rPr>
+              <a:t>These system enhancements continue </a:t>
+            </a:r>
+            <a:r>
+              <a:rPr lang="en-US" altLang="zh-CN" dirty="0">
+                <a:solidFill>
+                  <a:srgbClr val="FF0000"/>
+                </a:solidFill>
+                <a:latin typeface="Times New Roman" panose="02020603050405020304" pitchFamily="18" charset="0"/>
+                <a:cs typeface="Times New Roman" panose="02020603050405020304" pitchFamily="18" charset="0"/>
+              </a:rPr>
+              <a:t>the trend </a:t>
+            </a:r>
+            <a:r>
+              <a:rPr lang="en-US" altLang="zh-CN" dirty="0">
+                <a:latin typeface="Times New Roman" panose="02020603050405020304" pitchFamily="18" charset="0"/>
+                <a:cs typeface="Times New Roman" panose="02020603050405020304" pitchFamily="18" charset="0"/>
+              </a:rPr>
+              <a:t>toward more </a:t>
+            </a:r>
+            <a:r>
+              <a:rPr lang="en-US" altLang="zh-CN" dirty="0">
+                <a:solidFill>
+                  <a:srgbClr val="FF0000"/>
+                </a:solidFill>
+                <a:latin typeface="Times New Roman" panose="02020603050405020304" pitchFamily="18" charset="0"/>
+                <a:cs typeface="Times New Roman" panose="02020603050405020304" pitchFamily="18" charset="0"/>
+              </a:rPr>
+              <a:t>flexible</a:t>
+            </a:r>
+            <a:r>
+              <a:rPr lang="en-US" altLang="zh-CN" dirty="0">
+                <a:latin typeface="Times New Roman" panose="02020603050405020304" pitchFamily="18" charset="0"/>
+                <a:cs typeface="Times New Roman" panose="02020603050405020304" pitchFamily="18" charset="0"/>
+              </a:rPr>
+              <a:t>, </a:t>
+            </a:r>
+            <a:r>
+              <a:rPr lang="en-US" altLang="zh-CN" dirty="0">
+                <a:solidFill>
+                  <a:srgbClr val="FF0000"/>
+                </a:solidFill>
+                <a:latin typeface="Times New Roman" panose="02020603050405020304" pitchFamily="18" charset="0"/>
+                <a:cs typeface="Times New Roman" panose="02020603050405020304" pitchFamily="18" charset="0"/>
+              </a:rPr>
+              <a:t>versatile</a:t>
+            </a:r>
+            <a:r>
+              <a:rPr lang="en-US" altLang="zh-CN" dirty="0">
+                <a:latin typeface="Times New Roman" panose="02020603050405020304" pitchFamily="18" charset="0"/>
+                <a:cs typeface="Times New Roman" panose="02020603050405020304" pitchFamily="18" charset="0"/>
+              </a:rPr>
+              <a:t>, </a:t>
+            </a:r>
+            <a:r>
+              <a:rPr lang="en-US" altLang="zh-CN" dirty="0" smtClean="0">
+                <a:latin typeface="Times New Roman" panose="02020603050405020304" pitchFamily="18" charset="0"/>
+                <a:cs typeface="Times New Roman" panose="02020603050405020304" pitchFamily="18" charset="0"/>
+              </a:rPr>
+              <a:t>and </a:t>
+            </a:r>
+            <a:r>
+              <a:rPr lang="en-US" altLang="zh-CN" dirty="0" smtClean="0">
+                <a:solidFill>
+                  <a:srgbClr val="FF0000"/>
+                </a:solidFill>
+                <a:latin typeface="Times New Roman" panose="02020603050405020304" pitchFamily="18" charset="0"/>
+                <a:cs typeface="Times New Roman" panose="02020603050405020304" pitchFamily="18" charset="0"/>
+              </a:rPr>
+              <a:t>efficient </a:t>
+            </a:r>
+            <a:r>
+              <a:rPr lang="en-US" altLang="zh-CN" dirty="0">
+                <a:solidFill>
+                  <a:srgbClr val="FF0000"/>
+                </a:solidFill>
+                <a:latin typeface="Times New Roman" panose="02020603050405020304" pitchFamily="18" charset="0"/>
+                <a:cs typeface="Times New Roman" panose="02020603050405020304" pitchFamily="18" charset="0"/>
+              </a:rPr>
+              <a:t>GPU-accelerated </a:t>
+            </a:r>
+            <a:r>
+              <a:rPr lang="en-US" altLang="zh-CN" dirty="0">
+                <a:latin typeface="Times New Roman" panose="02020603050405020304" pitchFamily="18" charset="0"/>
+                <a:cs typeface="Times New Roman" panose="02020603050405020304" pitchFamily="18" charset="0"/>
+              </a:rPr>
+              <a:t>systems where </a:t>
+            </a:r>
+            <a:r>
+              <a:rPr lang="en-US" altLang="zh-CN" dirty="0">
+                <a:solidFill>
+                  <a:srgbClr val="FF0000"/>
+                </a:solidFill>
+                <a:latin typeface="Times New Roman" panose="02020603050405020304" pitchFamily="18" charset="0"/>
+                <a:cs typeface="Times New Roman" panose="02020603050405020304" pitchFamily="18" charset="0"/>
+              </a:rPr>
+              <a:t>GPUs have more control over their I/O operations</a:t>
+            </a:r>
+            <a:r>
+              <a:rPr lang="en-US" altLang="zh-CN" dirty="0">
+                <a:latin typeface="Times New Roman" panose="02020603050405020304" pitchFamily="18" charset="0"/>
+                <a:cs typeface="Times New Roman" panose="02020603050405020304" pitchFamily="18" charset="0"/>
+              </a:rPr>
+              <a:t>, underscoring the importance of the </a:t>
+            </a:r>
+            <a:r>
+              <a:rPr lang="en-US" altLang="zh-CN" dirty="0">
+                <a:solidFill>
+                  <a:srgbClr val="FF0000"/>
+                </a:solidFill>
+                <a:latin typeface="Times New Roman" panose="02020603050405020304" pitchFamily="18" charset="0"/>
+                <a:cs typeface="Times New Roman" panose="02020603050405020304" pitchFamily="18" charset="0"/>
+              </a:rPr>
+              <a:t>GPU-native high-level OS </a:t>
+            </a:r>
+            <a:r>
+              <a:rPr lang="en-US" altLang="zh-CN" dirty="0" smtClean="0">
+                <a:solidFill>
+                  <a:srgbClr val="FF0000"/>
+                </a:solidFill>
+                <a:latin typeface="Times New Roman" panose="02020603050405020304" pitchFamily="18" charset="0"/>
+                <a:cs typeface="Times New Roman" panose="02020603050405020304" pitchFamily="18" charset="0"/>
+              </a:rPr>
+              <a:t>abstractions</a:t>
+            </a:r>
+            <a:r>
+              <a:rPr lang="en-US" altLang="zh-CN" dirty="0" smtClean="0">
+                <a:latin typeface="Times New Roman" panose="02020603050405020304" pitchFamily="18" charset="0"/>
+                <a:cs typeface="Times New Roman" panose="02020603050405020304" pitchFamily="18" charset="0"/>
+              </a:rPr>
+              <a:t> presented </a:t>
+            </a:r>
+            <a:r>
+              <a:rPr lang="en-US" altLang="zh-CN" dirty="0">
+                <a:latin typeface="Times New Roman" panose="02020603050405020304" pitchFamily="18" charset="0"/>
+                <a:cs typeface="Times New Roman" panose="02020603050405020304" pitchFamily="18" charset="0"/>
+              </a:rPr>
+              <a:t>in this article for future GPUs.</a:t>
+            </a:r>
+            <a:r>
+              <a:rPr lang="en-US" altLang="zh-CN" dirty="0">
+                <a:latin typeface="Times New Roman" panose="02020603050405020304" pitchFamily="18" charset="0"/>
+                <a:cs typeface="Times New Roman" panose="02020603050405020304" pitchFamily="18" charset="0"/>
+              </a:rPr>
+              <a:t/>
+            </a:r>
+            <a:br>
+              <a:rPr lang="en-US" altLang="zh-CN" dirty="0">
+                <a:latin typeface="Times New Roman" panose="02020603050405020304" pitchFamily="18" charset="0"/>
+                <a:cs typeface="Times New Roman" panose="02020603050405020304" pitchFamily="18" charset="0"/>
+              </a:rPr>
+            </a:br>
+            <a:endParaRPr lang="en-US" altLang="zh-CN" dirty="0">
+              <a:latin typeface="Times New Roman" panose="02020603050405020304" pitchFamily="18" charset="0"/>
+              <a:cs typeface="Times New Roman" panose="02020603050405020304" pitchFamily="18" charset="0"/>
+            </a:endParaRPr>
+          </a:p>
+        </p:txBody>
+      </p:sp>
+      <p:sp>
+        <p:nvSpPr>
+          <p:cNvPr id="5" name="灯片编号占位符 4"/>
+          <p:cNvSpPr>
+            <a:spLocks noGrp="1"/>
+          </p:cNvSpPr>
+          <p:nvPr>
+            <p:ph type="sldNum" sz="quarter" idx="12"/>
+          </p:nvPr>
+        </p:nvSpPr>
+        <p:spPr/>
+        <p:txBody>
+          <a:bodyPr/>
+          <a:lstStyle/>
+          <a:p>
+            <a:pPr>
+              <a:defRPr/>
+            </a:pPr>
+            <a:fld id="{2B61CBCD-6AEA-4E03-89F5-67AC013F5D05}" type="slidenum">
+              <a:rPr lang="en-US" altLang="zh-CN" smtClean="0"/>
+              <a:pPr>
+                <a:defRPr/>
+              </a:pPr>
+              <a:t>30</a:t>
+            </a:fld>
+            <a:endParaRPr lang="en-US" altLang="zh-CN" dirty="0"/>
+          </a:p>
+        </p:txBody>
+      </p:sp>
+    </p:spTree>
+    <p:extLst>
+      <p:ext uri="{BB962C8B-B14F-4D97-AF65-F5344CB8AC3E}">
+        <p14:creationId xmlns:p14="http://schemas.microsoft.com/office/powerpoint/2010/main" val="2557802727"/>
+      </p:ext>
+    </p:extLst>
+  </p:cSld>
+  <p:clrMapOvr>
+    <a:masterClrMapping/>
+  </p:clrMapOvr>
+  <p:timing>
+    <p:tnLst>
+      <p:par>
+        <p:cTn id="1" dur="indefinite" restart="never" nodeType="tmRoot"/>
+      </p:par>
+    </p:tnLst>
+  </p:timing>
+</p:sld>
+</file>
+
 <file path=ppt/slides/slide4.xml><?xml version="1.0" encoding="utf-8"?>
 <p:sld xmlns:a="http://schemas.openxmlformats.org/drawingml/2006/main" xmlns:r="http://schemas.openxmlformats.org/officeDocument/2006/relationships" xmlns:p="http://schemas.openxmlformats.org/presentationml/2006/main">
   <p:cSld>
@@ -23827,7 +25120,7 @@
           <p:cNvPr id="5122" name="标题 1">
             <a:extLst>
               <a:ext uri="{FF2B5EF4-FFF2-40B4-BE49-F238E27FC236}">
-                <a16:creationId xmlns:a16="http://schemas.microsoft.com/office/drawing/2014/main" xmlns="" id="{A237414D-C4E1-407F-9B0D-585D2D878A74}"/>
+                <a16:creationId xmlns="" xmlns:a16="http://schemas.microsoft.com/office/drawing/2014/main" id="{A237414D-C4E1-407F-9B0D-585D2D878A74}"/>
               </a:ext>
             </a:extLst>
           </p:cNvPr>
@@ -23867,7 +25160,7 @@
           <p:cNvPr id="3" name="内容占位符 2">
             <a:extLst>
               <a:ext uri="{FF2B5EF4-FFF2-40B4-BE49-F238E27FC236}">
-                <a16:creationId xmlns:a16="http://schemas.microsoft.com/office/drawing/2014/main" xmlns="" id="{3DFD56C3-3B63-4F4C-A455-80D220434928}"/>
+                <a16:creationId xmlns="" xmlns:a16="http://schemas.microsoft.com/office/drawing/2014/main" id="{3DFD56C3-3B63-4F4C-A455-80D220434928}"/>
               </a:ext>
             </a:extLst>
           </p:cNvPr>
@@ -24224,7 +25517,7 @@
           <p:cNvPr id="5122" name="标题 1">
             <a:extLst>
               <a:ext uri="{FF2B5EF4-FFF2-40B4-BE49-F238E27FC236}">
-                <a16:creationId xmlns:a16="http://schemas.microsoft.com/office/drawing/2014/main" xmlns="" id="{A237414D-C4E1-407F-9B0D-585D2D878A74}"/>
+                <a16:creationId xmlns="" xmlns:a16="http://schemas.microsoft.com/office/drawing/2014/main" id="{A237414D-C4E1-407F-9B0D-585D2D878A74}"/>
               </a:ext>
             </a:extLst>
           </p:cNvPr>
@@ -24264,7 +25557,7 @@
           <p:cNvPr id="3" name="内容占位符 2">
             <a:extLst>
               <a:ext uri="{FF2B5EF4-FFF2-40B4-BE49-F238E27FC236}">
-                <a16:creationId xmlns:a16="http://schemas.microsoft.com/office/drawing/2014/main" xmlns="" id="{3DFD56C3-3B63-4F4C-A455-80D220434928}"/>
+                <a16:creationId xmlns="" xmlns:a16="http://schemas.microsoft.com/office/drawing/2014/main" id="{3DFD56C3-3B63-4F4C-A455-80D220434928}"/>
               </a:ext>
             </a:extLst>
           </p:cNvPr>
@@ -24823,7 +26116,7 @@
           <p:cNvPr id="5122" name="标题 1">
             <a:extLst>
               <a:ext uri="{FF2B5EF4-FFF2-40B4-BE49-F238E27FC236}">
-                <a16:creationId xmlns:a16="http://schemas.microsoft.com/office/drawing/2014/main" xmlns="" id="{A237414D-C4E1-407F-9B0D-585D2D878A74}"/>
+                <a16:creationId xmlns="" xmlns:a16="http://schemas.microsoft.com/office/drawing/2014/main" id="{A237414D-C4E1-407F-9B0D-585D2D878A74}"/>
               </a:ext>
             </a:extLst>
           </p:cNvPr>
@@ -24863,7 +26156,7 @@
           <p:cNvPr id="3" name="内容占位符 2">
             <a:extLst>
               <a:ext uri="{FF2B5EF4-FFF2-40B4-BE49-F238E27FC236}">
-                <a16:creationId xmlns:a16="http://schemas.microsoft.com/office/drawing/2014/main" xmlns="" id="{3DFD56C3-3B63-4F4C-A455-80D220434928}"/>
+                <a16:creationId xmlns="" xmlns:a16="http://schemas.microsoft.com/office/drawing/2014/main" id="{3DFD56C3-3B63-4F4C-A455-80D220434928}"/>
               </a:ext>
             </a:extLst>
           </p:cNvPr>
@@ -25111,7 +26404,7 @@
           <p:cNvPr id="5122" name="标题 1">
             <a:extLst>
               <a:ext uri="{FF2B5EF4-FFF2-40B4-BE49-F238E27FC236}">
-                <a16:creationId xmlns:a16="http://schemas.microsoft.com/office/drawing/2014/main" xmlns="" id="{A237414D-C4E1-407F-9B0D-585D2D878A74}"/>
+                <a16:creationId xmlns="" xmlns:a16="http://schemas.microsoft.com/office/drawing/2014/main" id="{A237414D-C4E1-407F-9B0D-585D2D878A74}"/>
               </a:ext>
             </a:extLst>
           </p:cNvPr>
@@ -25151,7 +26444,7 @@
           <p:cNvPr id="3" name="内容占位符 2">
             <a:extLst>
               <a:ext uri="{FF2B5EF4-FFF2-40B4-BE49-F238E27FC236}">
-                <a16:creationId xmlns:a16="http://schemas.microsoft.com/office/drawing/2014/main" xmlns="" id="{3DFD56C3-3B63-4F4C-A455-80D220434928}"/>
+                <a16:creationId xmlns="" xmlns:a16="http://schemas.microsoft.com/office/drawing/2014/main" id="{3DFD56C3-3B63-4F4C-A455-80D220434928}"/>
               </a:ext>
             </a:extLst>
           </p:cNvPr>
@@ -25429,7 +26722,7 @@
           <p:cNvPr id="5122" name="标题 1">
             <a:extLst>
               <a:ext uri="{FF2B5EF4-FFF2-40B4-BE49-F238E27FC236}">
-                <a16:creationId xmlns:a16="http://schemas.microsoft.com/office/drawing/2014/main" xmlns="" id="{A237414D-C4E1-407F-9B0D-585D2D878A74}"/>
+                <a16:creationId xmlns="" xmlns:a16="http://schemas.microsoft.com/office/drawing/2014/main" id="{A237414D-C4E1-407F-9B0D-585D2D878A74}"/>
               </a:ext>
             </a:extLst>
           </p:cNvPr>
@@ -25469,7 +26762,7 @@
           <p:cNvPr id="3" name="内容占位符 2">
             <a:extLst>
               <a:ext uri="{FF2B5EF4-FFF2-40B4-BE49-F238E27FC236}">
-                <a16:creationId xmlns:a16="http://schemas.microsoft.com/office/drawing/2014/main" xmlns="" id="{3DFD56C3-3B63-4F4C-A455-80D220434928}"/>
+                <a16:creationId xmlns="" xmlns:a16="http://schemas.microsoft.com/office/drawing/2014/main" id="{3DFD56C3-3B63-4F4C-A455-80D220434928}"/>
               </a:ext>
             </a:extLst>
           </p:cNvPr>
@@ -25506,14 +26799,7 @@
                 <a:latin typeface="Times New Roman" panose="02020603050405020304" pitchFamily="18" charset="0"/>
                 <a:cs typeface="Times New Roman" panose="02020603050405020304" pitchFamily="18" charset="0"/>
               </a:rPr>
-              <a:t> </a:t>
-            </a:r>
-            <a:r>
-              <a:rPr lang="en-US" altLang="zh-CN" b="1" dirty="0" smtClean="0">
-                <a:latin typeface="Times New Roman" panose="02020603050405020304" pitchFamily="18" charset="0"/>
-                <a:cs typeface="Times New Roman" panose="02020603050405020304" pitchFamily="18" charset="0"/>
-              </a:rPr>
-              <a:t>provides</a:t>
+              <a:t> provides</a:t>
             </a:r>
             <a:r>
               <a:rPr lang="en-US" altLang="zh-CN" dirty="0" smtClean="0">
@@ -25848,7 +27134,7 @@
           <p:cNvPr id="5122" name="标题 1">
             <a:extLst>
               <a:ext uri="{FF2B5EF4-FFF2-40B4-BE49-F238E27FC236}">
-                <a16:creationId xmlns:a16="http://schemas.microsoft.com/office/drawing/2014/main" xmlns="" id="{A237414D-C4E1-407F-9B0D-585D2D878A74}"/>
+                <a16:creationId xmlns="" xmlns:a16="http://schemas.microsoft.com/office/drawing/2014/main" id="{A237414D-C4E1-407F-9B0D-585D2D878A74}"/>
               </a:ext>
             </a:extLst>
           </p:cNvPr>
@@ -25888,7 +27174,7 @@
           <p:cNvPr id="3" name="内容占位符 2">
             <a:extLst>
               <a:ext uri="{FF2B5EF4-FFF2-40B4-BE49-F238E27FC236}">
-                <a16:creationId xmlns:a16="http://schemas.microsoft.com/office/drawing/2014/main" xmlns="" id="{3DFD56C3-3B63-4F4C-A455-80D220434928}"/>
+                <a16:creationId xmlns="" xmlns:a16="http://schemas.microsoft.com/office/drawing/2014/main" id="{3DFD56C3-3B63-4F4C-A455-80D220434928}"/>
               </a:ext>
             </a:extLst>
           </p:cNvPr>
